--- a/UNIUBE-PDI/Slides/05 - Convolucao.pptx
+++ b/UNIUBE-PDI/Slides/05 - Convolucao.pptx
@@ -6,7 +6,7 @@
     <p:sldMasterId id="2147483684" r:id="rId2"/>
   </p:sldMasterIdLst>
   <p:notesMasterIdLst>
-    <p:notesMasterId r:id="rId13"/>
+    <p:notesMasterId r:id="rId24"/>
   </p:notesMasterIdLst>
   <p:sldIdLst>
     <p:sldId id="320" r:id="rId3"/>
@@ -18,7 +18,18 @@
     <p:sldId id="340" r:id="rId9"/>
     <p:sldId id="343" r:id="rId10"/>
     <p:sldId id="341" r:id="rId11"/>
-    <p:sldId id="336" r:id="rId12"/>
+    <p:sldId id="344" r:id="rId12"/>
+    <p:sldId id="345" r:id="rId13"/>
+    <p:sldId id="346" r:id="rId14"/>
+    <p:sldId id="347" r:id="rId15"/>
+    <p:sldId id="348" r:id="rId16"/>
+    <p:sldId id="350" r:id="rId17"/>
+    <p:sldId id="352" r:id="rId18"/>
+    <p:sldId id="353" r:id="rId19"/>
+    <p:sldId id="356" r:id="rId20"/>
+    <p:sldId id="354" r:id="rId21"/>
+    <p:sldId id="355" r:id="rId22"/>
+    <p:sldId id="336" r:id="rId23"/>
   </p:sldIdLst>
   <p:sldSz cx="12192000" cy="6858000"/>
   <p:notesSz cx="6858000" cy="9144000"/>
@@ -219,7 +230,7 @@
           <a:p>
             <a:fld id="{6ED03497-8374-466E-85FA-95E1138D8F6E}" type="datetimeFigureOut">
               <a:rPr lang="pt-BR" smtClean="0"/>
-              <a:t>14/09/2026</a:t>
+              <a:t>15/09/2026</a:t>
             </a:fld>
             <a:endParaRPr lang="pt-BR"/>
           </a:p>
@@ -609,7 +620,7 @@
         <p:cNvPr id="1" name="">
           <a:extLst>
             <a:ext uri="{FF2B5EF4-FFF2-40B4-BE49-F238E27FC236}">
-              <a16:creationId xmlns:a16="http://schemas.microsoft.com/office/drawing/2014/main" id="{781A5DBF-F087-D425-FE1F-C594C66B8E63}"/>
+              <a16:creationId xmlns:a16="http://schemas.microsoft.com/office/drawing/2014/main" id="{2FE1CF6C-5110-8B88-B5A7-F025986015D0}"/>
             </a:ext>
           </a:extLst>
         </p:cNvPr>
@@ -629,7 +640,7 @@
           <p:cNvPr id="2" name="Espaço Reservado para Imagem de Slide 1">
             <a:extLst>
               <a:ext uri="{FF2B5EF4-FFF2-40B4-BE49-F238E27FC236}">
-                <a16:creationId xmlns:a16="http://schemas.microsoft.com/office/drawing/2014/main" id="{43E1EC70-E1DD-80B5-AE67-F989BC04FC2E}"/>
+                <a16:creationId xmlns:a16="http://schemas.microsoft.com/office/drawing/2014/main" id="{581616CE-3123-8CC5-A237-B8A4B18EB79C}"/>
               </a:ext>
             </a:extLst>
           </p:cNvPr>
@@ -654,7 +665,7 @@
           <p:cNvPr id="3" name="Espaço Reservado para Anotações 2">
             <a:extLst>
               <a:ext uri="{FF2B5EF4-FFF2-40B4-BE49-F238E27FC236}">
-                <a16:creationId xmlns:a16="http://schemas.microsoft.com/office/drawing/2014/main" id="{B0ECADB7-139D-33D9-1BFF-A3158C9ACF0D}"/>
+                <a16:creationId xmlns:a16="http://schemas.microsoft.com/office/drawing/2014/main" id="{3F93D092-93E9-97C0-B3B6-2CF27E389C9B}"/>
               </a:ext>
             </a:extLst>
           </p:cNvPr>
@@ -670,30 +681,11 @@
           <a:bodyPr/>
           <a:lstStyle/>
           <a:p>
-            <a:pPr marL="0" marR="0" lvl="0" indent="0" algn="l" defTabSz="914400" rtl="0" eaLnBrk="1" fontAlgn="auto" latinLnBrk="0" hangingPunct="1">
-              <a:lnSpc>
-                <a:spcPct val="100000"/>
-              </a:lnSpc>
-              <a:spcBef>
-                <a:spcPts val="0"/>
-              </a:spcBef>
-              <a:spcAft>
-                <a:spcPts val="0"/>
-              </a:spcAft>
-              <a:buClrTx/>
-              <a:buSzTx/>
-              <a:buFontTx/>
-              <a:buNone/>
-              <a:tabLst/>
-              <a:defRPr/>
+            <a:pPr marL="171450" indent="-171450">
+              <a:buFont typeface="Arial" panose="020B0604020202020204" pitchFamily="34" charset="0"/>
+              <a:buChar char="•"/>
             </a:pPr>
-            <a:r>
-              <a:rPr lang="pt-BR" sz="1200" dirty="0"/>
-              <a:t>Etapas básicas para transformar um sinal contínuo (analógico) em um sinal digital</a:t>
-            </a:r>
-          </a:p>
-          <a:p>
-            <a:endParaRPr lang="pt-BR" b="1" dirty="0"/>
+            <a:endParaRPr lang="pt-BR" b="0" dirty="0"/>
           </a:p>
         </p:txBody>
       </p:sp>
@@ -702,7 +694,7 @@
           <p:cNvPr id="4" name="Espaço Reservado para Número de Slide 3">
             <a:extLst>
               <a:ext uri="{FF2B5EF4-FFF2-40B4-BE49-F238E27FC236}">
-                <a16:creationId xmlns:a16="http://schemas.microsoft.com/office/drawing/2014/main" id="{7C5A10F7-6A75-1784-5EB0-733CDBEAF5FB}"/>
+                <a16:creationId xmlns:a16="http://schemas.microsoft.com/office/drawing/2014/main" id="{EC93FE29-D538-C701-BCCB-5FAC2F75BF2D}"/>
               </a:ext>
             </a:extLst>
           </p:cNvPr>
@@ -729,7 +721,1122 @@
     </p:spTree>
     <p:extLst>
       <p:ext uri="{BB962C8B-B14F-4D97-AF65-F5344CB8AC3E}">
-        <p14:creationId xmlns:p14="http://schemas.microsoft.com/office/powerpoint/2010/main" val="445097786"/>
+        <p14:creationId xmlns:p14="http://schemas.microsoft.com/office/powerpoint/2010/main" val="2058354791"/>
+      </p:ext>
+    </p:extLst>
+  </p:cSld>
+  <p:clrMapOvr>
+    <a:masterClrMapping/>
+  </p:clrMapOvr>
+</p:notes>
+</file>
+
+<file path=ppt/notesSlides/notesSlide11.xml><?xml version="1.0" encoding="utf-8"?>
+<p:notes xmlns:a="http://schemas.openxmlformats.org/drawingml/2006/main" xmlns:r="http://schemas.openxmlformats.org/officeDocument/2006/relationships" xmlns:p="http://schemas.openxmlformats.org/presentationml/2006/main">
+  <p:cSld>
+    <p:spTree>
+      <p:nvGrpSpPr>
+        <p:cNvPr id="1" name="">
+          <a:extLst>
+            <a:ext uri="{FF2B5EF4-FFF2-40B4-BE49-F238E27FC236}">
+              <a16:creationId xmlns:a16="http://schemas.microsoft.com/office/drawing/2014/main" id="{034BB0BB-9A0B-832D-11F7-5D3241DA41F1}"/>
+            </a:ext>
+          </a:extLst>
+        </p:cNvPr>
+        <p:cNvGrpSpPr/>
+        <p:nvPr/>
+      </p:nvGrpSpPr>
+      <p:grpSpPr>
+        <a:xfrm>
+          <a:off x="0" y="0"/>
+          <a:ext cx="0" cy="0"/>
+          <a:chOff x="0" y="0"/>
+          <a:chExt cx="0" cy="0"/>
+        </a:xfrm>
+      </p:grpSpPr>
+      <p:sp>
+        <p:nvSpPr>
+          <p:cNvPr id="2" name="Espaço Reservado para Imagem de Slide 1">
+            <a:extLst>
+              <a:ext uri="{FF2B5EF4-FFF2-40B4-BE49-F238E27FC236}">
+                <a16:creationId xmlns:a16="http://schemas.microsoft.com/office/drawing/2014/main" id="{3C306F21-333E-E8AC-73D7-D091FC9A258A}"/>
+              </a:ext>
+            </a:extLst>
+          </p:cNvPr>
+          <p:cNvSpPr>
+            <a:spLocks noGrp="1" noRot="1" noChangeAspect="1"/>
+          </p:cNvSpPr>
+          <p:nvPr>
+            <p:ph type="sldImg"/>
+          </p:nvPr>
+        </p:nvSpPr>
+        <p:spPr/>
+        <p:txBody>
+          <a:bodyPr/>
+          <a:lstStyle/>
+          <a:p>
+            <a:endParaRPr lang="pt-BR"/>
+          </a:p>
+        </p:txBody>
+      </p:sp>
+      <p:sp>
+        <p:nvSpPr>
+          <p:cNvPr id="3" name="Espaço Reservado para Anotações 2">
+            <a:extLst>
+              <a:ext uri="{FF2B5EF4-FFF2-40B4-BE49-F238E27FC236}">
+                <a16:creationId xmlns:a16="http://schemas.microsoft.com/office/drawing/2014/main" id="{A3FE1B73-49BB-FA16-F4D5-A65AF1CC5208}"/>
+              </a:ext>
+            </a:extLst>
+          </p:cNvPr>
+          <p:cNvSpPr>
+            <a:spLocks noGrp="1"/>
+          </p:cNvSpPr>
+          <p:nvPr>
+            <p:ph type="body" idx="1"/>
+          </p:nvPr>
+        </p:nvSpPr>
+        <p:spPr/>
+        <p:txBody>
+          <a:bodyPr/>
+          <a:lstStyle/>
+          <a:p>
+            <a:pPr marL="171450" indent="-171450">
+              <a:buFont typeface="Arial" panose="020B0604020202020204" pitchFamily="34" charset="0"/>
+              <a:buChar char="•"/>
+            </a:pPr>
+            <a:endParaRPr lang="pt-BR" b="0" dirty="0"/>
+          </a:p>
+        </p:txBody>
+      </p:sp>
+      <p:sp>
+        <p:nvSpPr>
+          <p:cNvPr id="4" name="Espaço Reservado para Número de Slide 3">
+            <a:extLst>
+              <a:ext uri="{FF2B5EF4-FFF2-40B4-BE49-F238E27FC236}">
+                <a16:creationId xmlns:a16="http://schemas.microsoft.com/office/drawing/2014/main" id="{F6E82AA1-3B5A-5FD8-D61A-84B831B4F665}"/>
+              </a:ext>
+            </a:extLst>
+          </p:cNvPr>
+          <p:cNvSpPr>
+            <a:spLocks noGrp="1"/>
+          </p:cNvSpPr>
+          <p:nvPr>
+            <p:ph type="sldNum" sz="quarter" idx="5"/>
+          </p:nvPr>
+        </p:nvSpPr>
+        <p:spPr/>
+        <p:txBody>
+          <a:bodyPr/>
+          <a:lstStyle/>
+          <a:p>
+            <a:fld id="{80F36A49-A1DD-40F8-B8AD-E6F5365256CB}" type="slidenum">
+              <a:rPr lang="pt-BR" smtClean="0"/>
+              <a:t>11</a:t>
+            </a:fld>
+            <a:endParaRPr lang="pt-BR"/>
+          </a:p>
+        </p:txBody>
+      </p:sp>
+    </p:spTree>
+    <p:extLst>
+      <p:ext uri="{BB962C8B-B14F-4D97-AF65-F5344CB8AC3E}">
+        <p14:creationId xmlns:p14="http://schemas.microsoft.com/office/powerpoint/2010/main" val="4131816931"/>
+      </p:ext>
+    </p:extLst>
+  </p:cSld>
+  <p:clrMapOvr>
+    <a:masterClrMapping/>
+  </p:clrMapOvr>
+</p:notes>
+</file>
+
+<file path=ppt/notesSlides/notesSlide12.xml><?xml version="1.0" encoding="utf-8"?>
+<p:notes xmlns:a="http://schemas.openxmlformats.org/drawingml/2006/main" xmlns:r="http://schemas.openxmlformats.org/officeDocument/2006/relationships" xmlns:p="http://schemas.openxmlformats.org/presentationml/2006/main">
+  <p:cSld>
+    <p:spTree>
+      <p:nvGrpSpPr>
+        <p:cNvPr id="1" name="">
+          <a:extLst>
+            <a:ext uri="{FF2B5EF4-FFF2-40B4-BE49-F238E27FC236}">
+              <a16:creationId xmlns:a16="http://schemas.microsoft.com/office/drawing/2014/main" id="{D3014BA8-AEC9-4DF9-5C77-8A7E2A5B47B3}"/>
+            </a:ext>
+          </a:extLst>
+        </p:cNvPr>
+        <p:cNvGrpSpPr/>
+        <p:nvPr/>
+      </p:nvGrpSpPr>
+      <p:grpSpPr>
+        <a:xfrm>
+          <a:off x="0" y="0"/>
+          <a:ext cx="0" cy="0"/>
+          <a:chOff x="0" y="0"/>
+          <a:chExt cx="0" cy="0"/>
+        </a:xfrm>
+      </p:grpSpPr>
+      <p:sp>
+        <p:nvSpPr>
+          <p:cNvPr id="2" name="Espaço Reservado para Imagem de Slide 1">
+            <a:extLst>
+              <a:ext uri="{FF2B5EF4-FFF2-40B4-BE49-F238E27FC236}">
+                <a16:creationId xmlns:a16="http://schemas.microsoft.com/office/drawing/2014/main" id="{017083A9-7E96-1845-F04E-97BD27B4DCE0}"/>
+              </a:ext>
+            </a:extLst>
+          </p:cNvPr>
+          <p:cNvSpPr>
+            <a:spLocks noGrp="1" noRot="1" noChangeAspect="1"/>
+          </p:cNvSpPr>
+          <p:nvPr>
+            <p:ph type="sldImg"/>
+          </p:nvPr>
+        </p:nvSpPr>
+        <p:spPr/>
+        <p:txBody>
+          <a:bodyPr/>
+          <a:lstStyle/>
+          <a:p>
+            <a:endParaRPr lang="pt-BR"/>
+          </a:p>
+        </p:txBody>
+      </p:sp>
+      <p:sp>
+        <p:nvSpPr>
+          <p:cNvPr id="3" name="Espaço Reservado para Anotações 2">
+            <a:extLst>
+              <a:ext uri="{FF2B5EF4-FFF2-40B4-BE49-F238E27FC236}">
+                <a16:creationId xmlns:a16="http://schemas.microsoft.com/office/drawing/2014/main" id="{346DB92F-EE9B-E06A-DD2E-7C5E594B6FFC}"/>
+              </a:ext>
+            </a:extLst>
+          </p:cNvPr>
+          <p:cNvSpPr>
+            <a:spLocks noGrp="1"/>
+          </p:cNvSpPr>
+          <p:nvPr>
+            <p:ph type="body" idx="1"/>
+          </p:nvPr>
+        </p:nvSpPr>
+        <p:spPr/>
+        <p:txBody>
+          <a:bodyPr/>
+          <a:lstStyle/>
+          <a:p>
+            <a:pPr marL="171450" indent="-171450">
+              <a:buFont typeface="Arial" panose="020B0604020202020204" pitchFamily="34" charset="0"/>
+              <a:buChar char="•"/>
+            </a:pPr>
+            <a:endParaRPr lang="pt-BR" b="0" dirty="0"/>
+          </a:p>
+        </p:txBody>
+      </p:sp>
+      <p:sp>
+        <p:nvSpPr>
+          <p:cNvPr id="4" name="Espaço Reservado para Número de Slide 3">
+            <a:extLst>
+              <a:ext uri="{FF2B5EF4-FFF2-40B4-BE49-F238E27FC236}">
+                <a16:creationId xmlns:a16="http://schemas.microsoft.com/office/drawing/2014/main" id="{6FDF9A9E-0C22-66F6-6B5B-1D3F5890B4F7}"/>
+              </a:ext>
+            </a:extLst>
+          </p:cNvPr>
+          <p:cNvSpPr>
+            <a:spLocks noGrp="1"/>
+          </p:cNvSpPr>
+          <p:nvPr>
+            <p:ph type="sldNum" sz="quarter" idx="5"/>
+          </p:nvPr>
+        </p:nvSpPr>
+        <p:spPr/>
+        <p:txBody>
+          <a:bodyPr/>
+          <a:lstStyle/>
+          <a:p>
+            <a:fld id="{80F36A49-A1DD-40F8-B8AD-E6F5365256CB}" type="slidenum">
+              <a:rPr lang="pt-BR" smtClean="0"/>
+              <a:t>12</a:t>
+            </a:fld>
+            <a:endParaRPr lang="pt-BR"/>
+          </a:p>
+        </p:txBody>
+      </p:sp>
+    </p:spTree>
+    <p:extLst>
+      <p:ext uri="{BB962C8B-B14F-4D97-AF65-F5344CB8AC3E}">
+        <p14:creationId xmlns:p14="http://schemas.microsoft.com/office/powerpoint/2010/main" val="145798975"/>
+      </p:ext>
+    </p:extLst>
+  </p:cSld>
+  <p:clrMapOvr>
+    <a:masterClrMapping/>
+  </p:clrMapOvr>
+</p:notes>
+</file>
+
+<file path=ppt/notesSlides/notesSlide13.xml><?xml version="1.0" encoding="utf-8"?>
+<p:notes xmlns:a="http://schemas.openxmlformats.org/drawingml/2006/main" xmlns:r="http://schemas.openxmlformats.org/officeDocument/2006/relationships" xmlns:p="http://schemas.openxmlformats.org/presentationml/2006/main">
+  <p:cSld>
+    <p:spTree>
+      <p:nvGrpSpPr>
+        <p:cNvPr id="1" name="">
+          <a:extLst>
+            <a:ext uri="{FF2B5EF4-FFF2-40B4-BE49-F238E27FC236}">
+              <a16:creationId xmlns:a16="http://schemas.microsoft.com/office/drawing/2014/main" id="{E53D1CB5-2CA0-A426-9D54-8ADFE5F47D2D}"/>
+            </a:ext>
+          </a:extLst>
+        </p:cNvPr>
+        <p:cNvGrpSpPr/>
+        <p:nvPr/>
+      </p:nvGrpSpPr>
+      <p:grpSpPr>
+        <a:xfrm>
+          <a:off x="0" y="0"/>
+          <a:ext cx="0" cy="0"/>
+          <a:chOff x="0" y="0"/>
+          <a:chExt cx="0" cy="0"/>
+        </a:xfrm>
+      </p:grpSpPr>
+      <p:sp>
+        <p:nvSpPr>
+          <p:cNvPr id="2" name="Espaço Reservado para Imagem de Slide 1">
+            <a:extLst>
+              <a:ext uri="{FF2B5EF4-FFF2-40B4-BE49-F238E27FC236}">
+                <a16:creationId xmlns:a16="http://schemas.microsoft.com/office/drawing/2014/main" id="{603D1B3B-24C6-F015-2BB0-C6AE316FCA42}"/>
+              </a:ext>
+            </a:extLst>
+          </p:cNvPr>
+          <p:cNvSpPr>
+            <a:spLocks noGrp="1" noRot="1" noChangeAspect="1"/>
+          </p:cNvSpPr>
+          <p:nvPr>
+            <p:ph type="sldImg"/>
+          </p:nvPr>
+        </p:nvSpPr>
+        <p:spPr/>
+        <p:txBody>
+          <a:bodyPr/>
+          <a:lstStyle/>
+          <a:p>
+            <a:endParaRPr lang="pt-BR"/>
+          </a:p>
+        </p:txBody>
+      </p:sp>
+      <p:sp>
+        <p:nvSpPr>
+          <p:cNvPr id="3" name="Espaço Reservado para Anotações 2">
+            <a:extLst>
+              <a:ext uri="{FF2B5EF4-FFF2-40B4-BE49-F238E27FC236}">
+                <a16:creationId xmlns:a16="http://schemas.microsoft.com/office/drawing/2014/main" id="{B2631F38-D93E-08E1-9A3E-047F5E3ECD7A}"/>
+              </a:ext>
+            </a:extLst>
+          </p:cNvPr>
+          <p:cNvSpPr>
+            <a:spLocks noGrp="1"/>
+          </p:cNvSpPr>
+          <p:nvPr>
+            <p:ph type="body" idx="1"/>
+          </p:nvPr>
+        </p:nvSpPr>
+        <p:spPr/>
+        <p:txBody>
+          <a:bodyPr/>
+          <a:lstStyle/>
+          <a:p>
+            <a:pPr marL="171450" indent="-171450">
+              <a:buFont typeface="Arial" panose="020B0604020202020204" pitchFamily="34" charset="0"/>
+              <a:buChar char="•"/>
+            </a:pPr>
+            <a:endParaRPr lang="pt-BR" b="0" dirty="0"/>
+          </a:p>
+        </p:txBody>
+      </p:sp>
+      <p:sp>
+        <p:nvSpPr>
+          <p:cNvPr id="4" name="Espaço Reservado para Número de Slide 3">
+            <a:extLst>
+              <a:ext uri="{FF2B5EF4-FFF2-40B4-BE49-F238E27FC236}">
+                <a16:creationId xmlns:a16="http://schemas.microsoft.com/office/drawing/2014/main" id="{FCD5006A-6E0B-C879-0759-99984EB3CB19}"/>
+              </a:ext>
+            </a:extLst>
+          </p:cNvPr>
+          <p:cNvSpPr>
+            <a:spLocks noGrp="1"/>
+          </p:cNvSpPr>
+          <p:nvPr>
+            <p:ph type="sldNum" sz="quarter" idx="5"/>
+          </p:nvPr>
+        </p:nvSpPr>
+        <p:spPr/>
+        <p:txBody>
+          <a:bodyPr/>
+          <a:lstStyle/>
+          <a:p>
+            <a:fld id="{80F36A49-A1DD-40F8-B8AD-E6F5365256CB}" type="slidenum">
+              <a:rPr lang="pt-BR" smtClean="0"/>
+              <a:t>13</a:t>
+            </a:fld>
+            <a:endParaRPr lang="pt-BR"/>
+          </a:p>
+        </p:txBody>
+      </p:sp>
+    </p:spTree>
+    <p:extLst>
+      <p:ext uri="{BB962C8B-B14F-4D97-AF65-F5344CB8AC3E}">
+        <p14:creationId xmlns:p14="http://schemas.microsoft.com/office/powerpoint/2010/main" val="4071675516"/>
+      </p:ext>
+    </p:extLst>
+  </p:cSld>
+  <p:clrMapOvr>
+    <a:masterClrMapping/>
+  </p:clrMapOvr>
+</p:notes>
+</file>
+
+<file path=ppt/notesSlides/notesSlide14.xml><?xml version="1.0" encoding="utf-8"?>
+<p:notes xmlns:a="http://schemas.openxmlformats.org/drawingml/2006/main" xmlns:r="http://schemas.openxmlformats.org/officeDocument/2006/relationships" xmlns:p="http://schemas.openxmlformats.org/presentationml/2006/main">
+  <p:cSld>
+    <p:spTree>
+      <p:nvGrpSpPr>
+        <p:cNvPr id="1" name="">
+          <a:extLst>
+            <a:ext uri="{FF2B5EF4-FFF2-40B4-BE49-F238E27FC236}">
+              <a16:creationId xmlns:a16="http://schemas.microsoft.com/office/drawing/2014/main" id="{74A5C360-550E-9FB3-1A3A-BC71BF580FAE}"/>
+            </a:ext>
+          </a:extLst>
+        </p:cNvPr>
+        <p:cNvGrpSpPr/>
+        <p:nvPr/>
+      </p:nvGrpSpPr>
+      <p:grpSpPr>
+        <a:xfrm>
+          <a:off x="0" y="0"/>
+          <a:ext cx="0" cy="0"/>
+          <a:chOff x="0" y="0"/>
+          <a:chExt cx="0" cy="0"/>
+        </a:xfrm>
+      </p:grpSpPr>
+      <p:sp>
+        <p:nvSpPr>
+          <p:cNvPr id="2" name="Espaço Reservado para Imagem de Slide 1">
+            <a:extLst>
+              <a:ext uri="{FF2B5EF4-FFF2-40B4-BE49-F238E27FC236}">
+                <a16:creationId xmlns:a16="http://schemas.microsoft.com/office/drawing/2014/main" id="{27C0C280-7148-5E6C-B9AF-AB85DEEC7BAE}"/>
+              </a:ext>
+            </a:extLst>
+          </p:cNvPr>
+          <p:cNvSpPr>
+            <a:spLocks noGrp="1" noRot="1" noChangeAspect="1"/>
+          </p:cNvSpPr>
+          <p:nvPr>
+            <p:ph type="sldImg"/>
+          </p:nvPr>
+        </p:nvSpPr>
+        <p:spPr/>
+        <p:txBody>
+          <a:bodyPr/>
+          <a:lstStyle/>
+          <a:p>
+            <a:endParaRPr lang="pt-BR"/>
+          </a:p>
+        </p:txBody>
+      </p:sp>
+      <p:sp>
+        <p:nvSpPr>
+          <p:cNvPr id="3" name="Espaço Reservado para Anotações 2">
+            <a:extLst>
+              <a:ext uri="{FF2B5EF4-FFF2-40B4-BE49-F238E27FC236}">
+                <a16:creationId xmlns:a16="http://schemas.microsoft.com/office/drawing/2014/main" id="{E88FBBC0-7830-DBBB-4669-E3997614961F}"/>
+              </a:ext>
+            </a:extLst>
+          </p:cNvPr>
+          <p:cNvSpPr>
+            <a:spLocks noGrp="1"/>
+          </p:cNvSpPr>
+          <p:nvPr>
+            <p:ph type="body" idx="1"/>
+          </p:nvPr>
+        </p:nvSpPr>
+        <p:spPr/>
+        <p:txBody>
+          <a:bodyPr/>
+          <a:lstStyle/>
+          <a:p>
+            <a:pPr marL="171450" indent="-171450">
+              <a:buFont typeface="Arial" panose="020B0604020202020204" pitchFamily="34" charset="0"/>
+              <a:buChar char="•"/>
+            </a:pPr>
+            <a:endParaRPr lang="pt-BR" b="0" dirty="0"/>
+          </a:p>
+        </p:txBody>
+      </p:sp>
+      <p:sp>
+        <p:nvSpPr>
+          <p:cNvPr id="4" name="Espaço Reservado para Número de Slide 3">
+            <a:extLst>
+              <a:ext uri="{FF2B5EF4-FFF2-40B4-BE49-F238E27FC236}">
+                <a16:creationId xmlns:a16="http://schemas.microsoft.com/office/drawing/2014/main" id="{AC686709-AB7A-4D59-5D31-9D391E91B556}"/>
+              </a:ext>
+            </a:extLst>
+          </p:cNvPr>
+          <p:cNvSpPr>
+            <a:spLocks noGrp="1"/>
+          </p:cNvSpPr>
+          <p:nvPr>
+            <p:ph type="sldNum" sz="quarter" idx="5"/>
+          </p:nvPr>
+        </p:nvSpPr>
+        <p:spPr/>
+        <p:txBody>
+          <a:bodyPr/>
+          <a:lstStyle/>
+          <a:p>
+            <a:fld id="{80F36A49-A1DD-40F8-B8AD-E6F5365256CB}" type="slidenum">
+              <a:rPr lang="pt-BR" smtClean="0"/>
+              <a:t>14</a:t>
+            </a:fld>
+            <a:endParaRPr lang="pt-BR"/>
+          </a:p>
+        </p:txBody>
+      </p:sp>
+    </p:spTree>
+    <p:extLst>
+      <p:ext uri="{BB962C8B-B14F-4D97-AF65-F5344CB8AC3E}">
+        <p14:creationId xmlns:p14="http://schemas.microsoft.com/office/powerpoint/2010/main" val="3533589809"/>
+      </p:ext>
+    </p:extLst>
+  </p:cSld>
+  <p:clrMapOvr>
+    <a:masterClrMapping/>
+  </p:clrMapOvr>
+</p:notes>
+</file>
+
+<file path=ppt/notesSlides/notesSlide15.xml><?xml version="1.0" encoding="utf-8"?>
+<p:notes xmlns:a="http://schemas.openxmlformats.org/drawingml/2006/main" xmlns:r="http://schemas.openxmlformats.org/officeDocument/2006/relationships" xmlns:p="http://schemas.openxmlformats.org/presentationml/2006/main">
+  <p:cSld>
+    <p:spTree>
+      <p:nvGrpSpPr>
+        <p:cNvPr id="1" name="">
+          <a:extLst>
+            <a:ext uri="{FF2B5EF4-FFF2-40B4-BE49-F238E27FC236}">
+              <a16:creationId xmlns:a16="http://schemas.microsoft.com/office/drawing/2014/main" id="{264946B4-C670-8DD0-DC71-9104A0D070D1}"/>
+            </a:ext>
+          </a:extLst>
+        </p:cNvPr>
+        <p:cNvGrpSpPr/>
+        <p:nvPr/>
+      </p:nvGrpSpPr>
+      <p:grpSpPr>
+        <a:xfrm>
+          <a:off x="0" y="0"/>
+          <a:ext cx="0" cy="0"/>
+          <a:chOff x="0" y="0"/>
+          <a:chExt cx="0" cy="0"/>
+        </a:xfrm>
+      </p:grpSpPr>
+      <p:sp>
+        <p:nvSpPr>
+          <p:cNvPr id="2" name="Espaço Reservado para Imagem de Slide 1">
+            <a:extLst>
+              <a:ext uri="{FF2B5EF4-FFF2-40B4-BE49-F238E27FC236}">
+                <a16:creationId xmlns:a16="http://schemas.microsoft.com/office/drawing/2014/main" id="{32959FB9-A454-F037-0FA6-19F6867C888E}"/>
+              </a:ext>
+            </a:extLst>
+          </p:cNvPr>
+          <p:cNvSpPr>
+            <a:spLocks noGrp="1" noRot="1" noChangeAspect="1"/>
+          </p:cNvSpPr>
+          <p:nvPr>
+            <p:ph type="sldImg"/>
+          </p:nvPr>
+        </p:nvSpPr>
+        <p:spPr/>
+        <p:txBody>
+          <a:bodyPr/>
+          <a:lstStyle/>
+          <a:p>
+            <a:endParaRPr lang="pt-BR"/>
+          </a:p>
+        </p:txBody>
+      </p:sp>
+      <p:sp>
+        <p:nvSpPr>
+          <p:cNvPr id="3" name="Espaço Reservado para Anotações 2">
+            <a:extLst>
+              <a:ext uri="{FF2B5EF4-FFF2-40B4-BE49-F238E27FC236}">
+                <a16:creationId xmlns:a16="http://schemas.microsoft.com/office/drawing/2014/main" id="{49C8DC5A-B39A-8EAE-05EC-AE9F021A4D99}"/>
+              </a:ext>
+            </a:extLst>
+          </p:cNvPr>
+          <p:cNvSpPr>
+            <a:spLocks noGrp="1"/>
+          </p:cNvSpPr>
+          <p:nvPr>
+            <p:ph type="body" idx="1"/>
+          </p:nvPr>
+        </p:nvSpPr>
+        <p:spPr/>
+        <p:txBody>
+          <a:bodyPr/>
+          <a:lstStyle/>
+          <a:p>
+            <a:pPr marL="171450" indent="-171450">
+              <a:buFont typeface="Arial" panose="020B0604020202020204" pitchFamily="34" charset="0"/>
+              <a:buChar char="•"/>
+            </a:pPr>
+            <a:endParaRPr lang="pt-BR" b="0" dirty="0"/>
+          </a:p>
+        </p:txBody>
+      </p:sp>
+      <p:sp>
+        <p:nvSpPr>
+          <p:cNvPr id="4" name="Espaço Reservado para Número de Slide 3">
+            <a:extLst>
+              <a:ext uri="{FF2B5EF4-FFF2-40B4-BE49-F238E27FC236}">
+                <a16:creationId xmlns:a16="http://schemas.microsoft.com/office/drawing/2014/main" id="{398E56A2-DEA2-56AE-5CA7-0EC9B78464E4}"/>
+              </a:ext>
+            </a:extLst>
+          </p:cNvPr>
+          <p:cNvSpPr>
+            <a:spLocks noGrp="1"/>
+          </p:cNvSpPr>
+          <p:nvPr>
+            <p:ph type="sldNum" sz="quarter" idx="5"/>
+          </p:nvPr>
+        </p:nvSpPr>
+        <p:spPr/>
+        <p:txBody>
+          <a:bodyPr/>
+          <a:lstStyle/>
+          <a:p>
+            <a:fld id="{80F36A49-A1DD-40F8-B8AD-E6F5365256CB}" type="slidenum">
+              <a:rPr lang="pt-BR" smtClean="0"/>
+              <a:t>15</a:t>
+            </a:fld>
+            <a:endParaRPr lang="pt-BR"/>
+          </a:p>
+        </p:txBody>
+      </p:sp>
+    </p:spTree>
+    <p:extLst>
+      <p:ext uri="{BB962C8B-B14F-4D97-AF65-F5344CB8AC3E}">
+        <p14:creationId xmlns:p14="http://schemas.microsoft.com/office/powerpoint/2010/main" val="323921774"/>
+      </p:ext>
+    </p:extLst>
+  </p:cSld>
+  <p:clrMapOvr>
+    <a:masterClrMapping/>
+  </p:clrMapOvr>
+</p:notes>
+</file>
+
+<file path=ppt/notesSlides/notesSlide16.xml><?xml version="1.0" encoding="utf-8"?>
+<p:notes xmlns:a="http://schemas.openxmlformats.org/drawingml/2006/main" xmlns:r="http://schemas.openxmlformats.org/officeDocument/2006/relationships" xmlns:p="http://schemas.openxmlformats.org/presentationml/2006/main">
+  <p:cSld>
+    <p:spTree>
+      <p:nvGrpSpPr>
+        <p:cNvPr id="1" name="">
+          <a:extLst>
+            <a:ext uri="{FF2B5EF4-FFF2-40B4-BE49-F238E27FC236}">
+              <a16:creationId xmlns:a16="http://schemas.microsoft.com/office/drawing/2014/main" id="{112E7515-22C7-AEBC-5BD4-45051BA758DC}"/>
+            </a:ext>
+          </a:extLst>
+        </p:cNvPr>
+        <p:cNvGrpSpPr/>
+        <p:nvPr/>
+      </p:nvGrpSpPr>
+      <p:grpSpPr>
+        <a:xfrm>
+          <a:off x="0" y="0"/>
+          <a:ext cx="0" cy="0"/>
+          <a:chOff x="0" y="0"/>
+          <a:chExt cx="0" cy="0"/>
+        </a:xfrm>
+      </p:grpSpPr>
+      <p:sp>
+        <p:nvSpPr>
+          <p:cNvPr id="2" name="Espaço Reservado para Imagem de Slide 1">
+            <a:extLst>
+              <a:ext uri="{FF2B5EF4-FFF2-40B4-BE49-F238E27FC236}">
+                <a16:creationId xmlns:a16="http://schemas.microsoft.com/office/drawing/2014/main" id="{140BCFEE-0700-65E7-F05C-8628A70ABFA6}"/>
+              </a:ext>
+            </a:extLst>
+          </p:cNvPr>
+          <p:cNvSpPr>
+            <a:spLocks noGrp="1" noRot="1" noChangeAspect="1"/>
+          </p:cNvSpPr>
+          <p:nvPr>
+            <p:ph type="sldImg"/>
+          </p:nvPr>
+        </p:nvSpPr>
+        <p:spPr/>
+        <p:txBody>
+          <a:bodyPr/>
+          <a:lstStyle/>
+          <a:p>
+            <a:endParaRPr lang="pt-BR"/>
+          </a:p>
+        </p:txBody>
+      </p:sp>
+      <p:sp>
+        <p:nvSpPr>
+          <p:cNvPr id="3" name="Espaço Reservado para Anotações 2">
+            <a:extLst>
+              <a:ext uri="{FF2B5EF4-FFF2-40B4-BE49-F238E27FC236}">
+                <a16:creationId xmlns:a16="http://schemas.microsoft.com/office/drawing/2014/main" id="{C6B259B3-1A59-7151-CFFB-D1F4D05B75B8}"/>
+              </a:ext>
+            </a:extLst>
+          </p:cNvPr>
+          <p:cNvSpPr>
+            <a:spLocks noGrp="1"/>
+          </p:cNvSpPr>
+          <p:nvPr>
+            <p:ph type="body" idx="1"/>
+          </p:nvPr>
+        </p:nvSpPr>
+        <p:spPr/>
+        <p:txBody>
+          <a:bodyPr/>
+          <a:lstStyle/>
+          <a:p>
+            <a:pPr marL="171450" indent="-171450">
+              <a:buFont typeface="Arial" panose="020B0604020202020204" pitchFamily="34" charset="0"/>
+              <a:buChar char="•"/>
+            </a:pPr>
+            <a:endParaRPr lang="pt-BR" b="0" dirty="0"/>
+          </a:p>
+        </p:txBody>
+      </p:sp>
+      <p:sp>
+        <p:nvSpPr>
+          <p:cNvPr id="4" name="Espaço Reservado para Número de Slide 3">
+            <a:extLst>
+              <a:ext uri="{FF2B5EF4-FFF2-40B4-BE49-F238E27FC236}">
+                <a16:creationId xmlns:a16="http://schemas.microsoft.com/office/drawing/2014/main" id="{5A5A256D-D287-FAAA-42D4-8BC3FAF228F1}"/>
+              </a:ext>
+            </a:extLst>
+          </p:cNvPr>
+          <p:cNvSpPr>
+            <a:spLocks noGrp="1"/>
+          </p:cNvSpPr>
+          <p:nvPr>
+            <p:ph type="sldNum" sz="quarter" idx="5"/>
+          </p:nvPr>
+        </p:nvSpPr>
+        <p:spPr/>
+        <p:txBody>
+          <a:bodyPr/>
+          <a:lstStyle/>
+          <a:p>
+            <a:fld id="{80F36A49-A1DD-40F8-B8AD-E6F5365256CB}" type="slidenum">
+              <a:rPr lang="pt-BR" smtClean="0"/>
+              <a:t>16</a:t>
+            </a:fld>
+            <a:endParaRPr lang="pt-BR"/>
+          </a:p>
+        </p:txBody>
+      </p:sp>
+    </p:spTree>
+    <p:extLst>
+      <p:ext uri="{BB962C8B-B14F-4D97-AF65-F5344CB8AC3E}">
+        <p14:creationId xmlns:p14="http://schemas.microsoft.com/office/powerpoint/2010/main" val="837864510"/>
+      </p:ext>
+    </p:extLst>
+  </p:cSld>
+  <p:clrMapOvr>
+    <a:masterClrMapping/>
+  </p:clrMapOvr>
+</p:notes>
+</file>
+
+<file path=ppt/notesSlides/notesSlide17.xml><?xml version="1.0" encoding="utf-8"?>
+<p:notes xmlns:a="http://schemas.openxmlformats.org/drawingml/2006/main" xmlns:r="http://schemas.openxmlformats.org/officeDocument/2006/relationships" xmlns:p="http://schemas.openxmlformats.org/presentationml/2006/main">
+  <p:cSld>
+    <p:spTree>
+      <p:nvGrpSpPr>
+        <p:cNvPr id="1" name="">
+          <a:extLst>
+            <a:ext uri="{FF2B5EF4-FFF2-40B4-BE49-F238E27FC236}">
+              <a16:creationId xmlns:a16="http://schemas.microsoft.com/office/drawing/2014/main" id="{A810D9CA-4A70-1F36-BF96-F0C9D746BD80}"/>
+            </a:ext>
+          </a:extLst>
+        </p:cNvPr>
+        <p:cNvGrpSpPr/>
+        <p:nvPr/>
+      </p:nvGrpSpPr>
+      <p:grpSpPr>
+        <a:xfrm>
+          <a:off x="0" y="0"/>
+          <a:ext cx="0" cy="0"/>
+          <a:chOff x="0" y="0"/>
+          <a:chExt cx="0" cy="0"/>
+        </a:xfrm>
+      </p:grpSpPr>
+      <p:sp>
+        <p:nvSpPr>
+          <p:cNvPr id="2" name="Espaço Reservado para Imagem de Slide 1">
+            <a:extLst>
+              <a:ext uri="{FF2B5EF4-FFF2-40B4-BE49-F238E27FC236}">
+                <a16:creationId xmlns:a16="http://schemas.microsoft.com/office/drawing/2014/main" id="{3E34EE22-ED3C-E771-5C42-6A3F6E5D9AEE}"/>
+              </a:ext>
+            </a:extLst>
+          </p:cNvPr>
+          <p:cNvSpPr>
+            <a:spLocks noGrp="1" noRot="1" noChangeAspect="1"/>
+          </p:cNvSpPr>
+          <p:nvPr>
+            <p:ph type="sldImg"/>
+          </p:nvPr>
+        </p:nvSpPr>
+        <p:spPr/>
+        <p:txBody>
+          <a:bodyPr/>
+          <a:lstStyle/>
+          <a:p>
+            <a:endParaRPr lang="pt-BR"/>
+          </a:p>
+        </p:txBody>
+      </p:sp>
+      <p:sp>
+        <p:nvSpPr>
+          <p:cNvPr id="3" name="Espaço Reservado para Anotações 2">
+            <a:extLst>
+              <a:ext uri="{FF2B5EF4-FFF2-40B4-BE49-F238E27FC236}">
+                <a16:creationId xmlns:a16="http://schemas.microsoft.com/office/drawing/2014/main" id="{54D65D94-E997-809F-2CF3-B511CBF7D1C8}"/>
+              </a:ext>
+            </a:extLst>
+          </p:cNvPr>
+          <p:cNvSpPr>
+            <a:spLocks noGrp="1"/>
+          </p:cNvSpPr>
+          <p:nvPr>
+            <p:ph type="body" idx="1"/>
+          </p:nvPr>
+        </p:nvSpPr>
+        <p:spPr/>
+        <p:txBody>
+          <a:bodyPr/>
+          <a:lstStyle/>
+          <a:p>
+            <a:pPr marL="171450" indent="-171450">
+              <a:buFont typeface="Arial" panose="020B0604020202020204" pitchFamily="34" charset="0"/>
+              <a:buChar char="•"/>
+            </a:pPr>
+            <a:r>
+              <a:rPr lang="pt-BR" dirty="0"/>
+              <a:t>O filtro Gaussiano pode ser entendido como uma </a:t>
+            </a:r>
+            <a:r>
+              <a:rPr lang="pt-BR" b="1" dirty="0"/>
+              <a:t>média ponderada</a:t>
+            </a:r>
+            <a:r>
+              <a:rPr lang="pt-BR" dirty="0"/>
+              <a:t>, na qual os pesos são definidos de acordo com uma função Gaussiana.</a:t>
+            </a:r>
+          </a:p>
+          <a:p>
+            <a:pPr marL="171450" indent="-171450">
+              <a:buFont typeface="Arial" panose="020B0604020202020204" pitchFamily="34" charset="0"/>
+              <a:buChar char="•"/>
+            </a:pPr>
+            <a:r>
+              <a:rPr lang="pt-BR" dirty="0"/>
+              <a:t>Uma média ponderada pode usar quaisquer pesos. O filtro Gaussiano utiliza pesos determinados pela distribuição Gaussiana.</a:t>
+            </a:r>
+            <a:endParaRPr lang="pt-BR" b="0" dirty="0"/>
+          </a:p>
+        </p:txBody>
+      </p:sp>
+      <p:sp>
+        <p:nvSpPr>
+          <p:cNvPr id="4" name="Espaço Reservado para Número de Slide 3">
+            <a:extLst>
+              <a:ext uri="{FF2B5EF4-FFF2-40B4-BE49-F238E27FC236}">
+                <a16:creationId xmlns:a16="http://schemas.microsoft.com/office/drawing/2014/main" id="{CCD46E3A-C4A1-8CF2-77A7-93B480EE990F}"/>
+              </a:ext>
+            </a:extLst>
+          </p:cNvPr>
+          <p:cNvSpPr>
+            <a:spLocks noGrp="1"/>
+          </p:cNvSpPr>
+          <p:nvPr>
+            <p:ph type="sldNum" sz="quarter" idx="5"/>
+          </p:nvPr>
+        </p:nvSpPr>
+        <p:spPr/>
+        <p:txBody>
+          <a:bodyPr/>
+          <a:lstStyle/>
+          <a:p>
+            <a:fld id="{80F36A49-A1DD-40F8-B8AD-E6F5365256CB}" type="slidenum">
+              <a:rPr lang="pt-BR" smtClean="0"/>
+              <a:t>17</a:t>
+            </a:fld>
+            <a:endParaRPr lang="pt-BR"/>
+          </a:p>
+        </p:txBody>
+      </p:sp>
+    </p:spTree>
+    <p:extLst>
+      <p:ext uri="{BB962C8B-B14F-4D97-AF65-F5344CB8AC3E}">
+        <p14:creationId xmlns:p14="http://schemas.microsoft.com/office/powerpoint/2010/main" val="4195257411"/>
+      </p:ext>
+    </p:extLst>
+  </p:cSld>
+  <p:clrMapOvr>
+    <a:masterClrMapping/>
+  </p:clrMapOvr>
+</p:notes>
+</file>
+
+<file path=ppt/notesSlides/notesSlide18.xml><?xml version="1.0" encoding="utf-8"?>
+<p:notes xmlns:a="http://schemas.openxmlformats.org/drawingml/2006/main" xmlns:r="http://schemas.openxmlformats.org/officeDocument/2006/relationships" xmlns:p="http://schemas.openxmlformats.org/presentationml/2006/main">
+  <p:cSld>
+    <p:spTree>
+      <p:nvGrpSpPr>
+        <p:cNvPr id="1" name="">
+          <a:extLst>
+            <a:ext uri="{FF2B5EF4-FFF2-40B4-BE49-F238E27FC236}">
+              <a16:creationId xmlns:a16="http://schemas.microsoft.com/office/drawing/2014/main" id="{CE7B4A93-CA8D-DDF3-F3A9-A4E2F3D23B43}"/>
+            </a:ext>
+          </a:extLst>
+        </p:cNvPr>
+        <p:cNvGrpSpPr/>
+        <p:nvPr/>
+      </p:nvGrpSpPr>
+      <p:grpSpPr>
+        <a:xfrm>
+          <a:off x="0" y="0"/>
+          <a:ext cx="0" cy="0"/>
+          <a:chOff x="0" y="0"/>
+          <a:chExt cx="0" cy="0"/>
+        </a:xfrm>
+      </p:grpSpPr>
+      <p:sp>
+        <p:nvSpPr>
+          <p:cNvPr id="2" name="Espaço Reservado para Imagem de Slide 1">
+            <a:extLst>
+              <a:ext uri="{FF2B5EF4-FFF2-40B4-BE49-F238E27FC236}">
+                <a16:creationId xmlns:a16="http://schemas.microsoft.com/office/drawing/2014/main" id="{7F1246DD-155A-0973-44DC-CAC0E7EF405C}"/>
+              </a:ext>
+            </a:extLst>
+          </p:cNvPr>
+          <p:cNvSpPr>
+            <a:spLocks noGrp="1" noRot="1" noChangeAspect="1"/>
+          </p:cNvSpPr>
+          <p:nvPr>
+            <p:ph type="sldImg"/>
+          </p:nvPr>
+        </p:nvSpPr>
+        <p:spPr/>
+        <p:txBody>
+          <a:bodyPr/>
+          <a:lstStyle/>
+          <a:p>
+            <a:endParaRPr lang="pt-BR"/>
+          </a:p>
+        </p:txBody>
+      </p:sp>
+      <p:sp>
+        <p:nvSpPr>
+          <p:cNvPr id="3" name="Espaço Reservado para Anotações 2">
+            <a:extLst>
+              <a:ext uri="{FF2B5EF4-FFF2-40B4-BE49-F238E27FC236}">
+                <a16:creationId xmlns:a16="http://schemas.microsoft.com/office/drawing/2014/main" id="{0EF8047F-B261-0CF4-92B9-FAF33A064BB2}"/>
+              </a:ext>
+            </a:extLst>
+          </p:cNvPr>
+          <p:cNvSpPr>
+            <a:spLocks noGrp="1"/>
+          </p:cNvSpPr>
+          <p:nvPr>
+            <p:ph type="body" idx="1"/>
+          </p:nvPr>
+        </p:nvSpPr>
+        <p:spPr/>
+        <p:txBody>
+          <a:bodyPr/>
+          <a:lstStyle/>
+          <a:p>
+            <a:pPr marL="171450" indent="-171450">
+              <a:buFont typeface="Arial" panose="020B0604020202020204" pitchFamily="34" charset="0"/>
+              <a:buChar char="•"/>
+            </a:pPr>
+            <a:r>
+              <a:rPr lang="pt-BR" dirty="0"/>
+              <a:t>O filtro Gaussiano pode ser entendido como uma </a:t>
+            </a:r>
+            <a:r>
+              <a:rPr lang="pt-BR" b="1" dirty="0"/>
+              <a:t>média ponderada</a:t>
+            </a:r>
+            <a:r>
+              <a:rPr lang="pt-BR" dirty="0"/>
+              <a:t>, na qual os pesos são definidos de acordo com uma função Gaussiana.</a:t>
+            </a:r>
+          </a:p>
+          <a:p>
+            <a:pPr marL="171450" indent="-171450">
+              <a:buFont typeface="Arial" panose="020B0604020202020204" pitchFamily="34" charset="0"/>
+              <a:buChar char="•"/>
+            </a:pPr>
+            <a:r>
+              <a:rPr lang="pt-BR" dirty="0"/>
+              <a:t>Uma média ponderada pode usar quaisquer pesos. O filtro Gaussiano utiliza pesos determinados pela distribuição Gaussiana.</a:t>
+            </a:r>
+            <a:endParaRPr lang="pt-BR" b="0" dirty="0"/>
+          </a:p>
+        </p:txBody>
+      </p:sp>
+      <p:sp>
+        <p:nvSpPr>
+          <p:cNvPr id="4" name="Espaço Reservado para Número de Slide 3">
+            <a:extLst>
+              <a:ext uri="{FF2B5EF4-FFF2-40B4-BE49-F238E27FC236}">
+                <a16:creationId xmlns:a16="http://schemas.microsoft.com/office/drawing/2014/main" id="{4F47E0F6-FDF7-8247-E1FB-836D26021E20}"/>
+              </a:ext>
+            </a:extLst>
+          </p:cNvPr>
+          <p:cNvSpPr>
+            <a:spLocks noGrp="1"/>
+          </p:cNvSpPr>
+          <p:nvPr>
+            <p:ph type="sldNum" sz="quarter" idx="5"/>
+          </p:nvPr>
+        </p:nvSpPr>
+        <p:spPr/>
+        <p:txBody>
+          <a:bodyPr/>
+          <a:lstStyle/>
+          <a:p>
+            <a:fld id="{80F36A49-A1DD-40F8-B8AD-E6F5365256CB}" type="slidenum">
+              <a:rPr lang="pt-BR" smtClean="0"/>
+              <a:t>18</a:t>
+            </a:fld>
+            <a:endParaRPr lang="pt-BR"/>
+          </a:p>
+        </p:txBody>
+      </p:sp>
+    </p:spTree>
+    <p:extLst>
+      <p:ext uri="{BB962C8B-B14F-4D97-AF65-F5344CB8AC3E}">
+        <p14:creationId xmlns:p14="http://schemas.microsoft.com/office/powerpoint/2010/main" val="214933299"/>
+      </p:ext>
+    </p:extLst>
+  </p:cSld>
+  <p:clrMapOvr>
+    <a:masterClrMapping/>
+  </p:clrMapOvr>
+</p:notes>
+</file>
+
+<file path=ppt/notesSlides/notesSlide19.xml><?xml version="1.0" encoding="utf-8"?>
+<p:notes xmlns:a="http://schemas.openxmlformats.org/drawingml/2006/main" xmlns:r="http://schemas.openxmlformats.org/officeDocument/2006/relationships" xmlns:p="http://schemas.openxmlformats.org/presentationml/2006/main">
+  <p:cSld>
+    <p:spTree>
+      <p:nvGrpSpPr>
+        <p:cNvPr id="1" name="">
+          <a:extLst>
+            <a:ext uri="{FF2B5EF4-FFF2-40B4-BE49-F238E27FC236}">
+              <a16:creationId xmlns:a16="http://schemas.microsoft.com/office/drawing/2014/main" id="{000B42C4-431E-CA8A-23DE-6498F4D83558}"/>
+            </a:ext>
+          </a:extLst>
+        </p:cNvPr>
+        <p:cNvGrpSpPr/>
+        <p:nvPr/>
+      </p:nvGrpSpPr>
+      <p:grpSpPr>
+        <a:xfrm>
+          <a:off x="0" y="0"/>
+          <a:ext cx="0" cy="0"/>
+          <a:chOff x="0" y="0"/>
+          <a:chExt cx="0" cy="0"/>
+        </a:xfrm>
+      </p:grpSpPr>
+      <p:sp>
+        <p:nvSpPr>
+          <p:cNvPr id="2" name="Espaço Reservado para Imagem de Slide 1">
+            <a:extLst>
+              <a:ext uri="{FF2B5EF4-FFF2-40B4-BE49-F238E27FC236}">
+                <a16:creationId xmlns:a16="http://schemas.microsoft.com/office/drawing/2014/main" id="{259ED421-08C0-D9A4-651F-3823CC6D0BDF}"/>
+              </a:ext>
+            </a:extLst>
+          </p:cNvPr>
+          <p:cNvSpPr>
+            <a:spLocks noGrp="1" noRot="1" noChangeAspect="1"/>
+          </p:cNvSpPr>
+          <p:nvPr>
+            <p:ph type="sldImg"/>
+          </p:nvPr>
+        </p:nvSpPr>
+        <p:spPr/>
+        <p:txBody>
+          <a:bodyPr/>
+          <a:lstStyle/>
+          <a:p>
+            <a:endParaRPr lang="pt-BR"/>
+          </a:p>
+        </p:txBody>
+      </p:sp>
+      <p:sp>
+        <p:nvSpPr>
+          <p:cNvPr id="3" name="Espaço Reservado para Anotações 2">
+            <a:extLst>
+              <a:ext uri="{FF2B5EF4-FFF2-40B4-BE49-F238E27FC236}">
+                <a16:creationId xmlns:a16="http://schemas.microsoft.com/office/drawing/2014/main" id="{F3ED1007-5669-C131-211F-186B8D88CBB8}"/>
+              </a:ext>
+            </a:extLst>
+          </p:cNvPr>
+          <p:cNvSpPr>
+            <a:spLocks noGrp="1"/>
+          </p:cNvSpPr>
+          <p:nvPr>
+            <p:ph type="body" idx="1"/>
+          </p:nvPr>
+        </p:nvSpPr>
+        <p:spPr/>
+        <p:txBody>
+          <a:bodyPr/>
+          <a:lstStyle/>
+          <a:p>
+            <a:pPr marL="171450" indent="-171450">
+              <a:buFont typeface="Arial" panose="020B0604020202020204" pitchFamily="34" charset="0"/>
+              <a:buChar char="•"/>
+            </a:pPr>
+            <a:endParaRPr lang="pt-BR" b="0" dirty="0"/>
+          </a:p>
+        </p:txBody>
+      </p:sp>
+      <p:sp>
+        <p:nvSpPr>
+          <p:cNvPr id="4" name="Espaço Reservado para Número de Slide 3">
+            <a:extLst>
+              <a:ext uri="{FF2B5EF4-FFF2-40B4-BE49-F238E27FC236}">
+                <a16:creationId xmlns:a16="http://schemas.microsoft.com/office/drawing/2014/main" id="{9FE6E353-7F23-2780-0E70-A379A6B82F44}"/>
+              </a:ext>
+            </a:extLst>
+          </p:cNvPr>
+          <p:cNvSpPr>
+            <a:spLocks noGrp="1"/>
+          </p:cNvSpPr>
+          <p:nvPr>
+            <p:ph type="sldNum" sz="quarter" idx="5"/>
+          </p:nvPr>
+        </p:nvSpPr>
+        <p:spPr/>
+        <p:txBody>
+          <a:bodyPr/>
+          <a:lstStyle/>
+          <a:p>
+            <a:fld id="{80F36A49-A1DD-40F8-B8AD-E6F5365256CB}" type="slidenum">
+              <a:rPr lang="pt-BR" smtClean="0"/>
+              <a:t>19</a:t>
+            </a:fld>
+            <a:endParaRPr lang="pt-BR"/>
+          </a:p>
+        </p:txBody>
+      </p:sp>
+    </p:spTree>
+    <p:extLst>
+      <p:ext uri="{BB962C8B-B14F-4D97-AF65-F5344CB8AC3E}">
+        <p14:creationId xmlns:p14="http://schemas.microsoft.com/office/powerpoint/2010/main" val="2181872485"/>
       </p:ext>
     </p:extLst>
   </p:cSld>
@@ -849,6 +1956,263 @@
     <p:extLst>
       <p:ext uri="{BB962C8B-B14F-4D97-AF65-F5344CB8AC3E}">
         <p14:creationId xmlns:p14="http://schemas.microsoft.com/office/powerpoint/2010/main" val="3950684297"/>
+      </p:ext>
+    </p:extLst>
+  </p:cSld>
+  <p:clrMapOvr>
+    <a:masterClrMapping/>
+  </p:clrMapOvr>
+</p:notes>
+</file>
+
+<file path=ppt/notesSlides/notesSlide20.xml><?xml version="1.0" encoding="utf-8"?>
+<p:notes xmlns:a="http://schemas.openxmlformats.org/drawingml/2006/main" xmlns:r="http://schemas.openxmlformats.org/officeDocument/2006/relationships" xmlns:p="http://schemas.openxmlformats.org/presentationml/2006/main">
+  <p:cSld>
+    <p:spTree>
+      <p:nvGrpSpPr>
+        <p:cNvPr id="1" name="">
+          <a:extLst>
+            <a:ext uri="{FF2B5EF4-FFF2-40B4-BE49-F238E27FC236}">
+              <a16:creationId xmlns:a16="http://schemas.microsoft.com/office/drawing/2014/main" id="{0DEA9004-E5D6-65C1-6EF4-9068A9C007F7}"/>
+            </a:ext>
+          </a:extLst>
+        </p:cNvPr>
+        <p:cNvGrpSpPr/>
+        <p:nvPr/>
+      </p:nvGrpSpPr>
+      <p:grpSpPr>
+        <a:xfrm>
+          <a:off x="0" y="0"/>
+          <a:ext cx="0" cy="0"/>
+          <a:chOff x="0" y="0"/>
+          <a:chExt cx="0" cy="0"/>
+        </a:xfrm>
+      </p:grpSpPr>
+      <p:sp>
+        <p:nvSpPr>
+          <p:cNvPr id="2" name="Espaço Reservado para Imagem de Slide 1">
+            <a:extLst>
+              <a:ext uri="{FF2B5EF4-FFF2-40B4-BE49-F238E27FC236}">
+                <a16:creationId xmlns:a16="http://schemas.microsoft.com/office/drawing/2014/main" id="{39B3A01F-D32E-E482-DDB6-D650C20E2215}"/>
+              </a:ext>
+            </a:extLst>
+          </p:cNvPr>
+          <p:cNvSpPr>
+            <a:spLocks noGrp="1" noRot="1" noChangeAspect="1"/>
+          </p:cNvSpPr>
+          <p:nvPr>
+            <p:ph type="sldImg"/>
+          </p:nvPr>
+        </p:nvSpPr>
+        <p:spPr/>
+        <p:txBody>
+          <a:bodyPr/>
+          <a:lstStyle/>
+          <a:p>
+            <a:endParaRPr lang="pt-BR"/>
+          </a:p>
+        </p:txBody>
+      </p:sp>
+      <p:sp>
+        <p:nvSpPr>
+          <p:cNvPr id="3" name="Espaço Reservado para Anotações 2">
+            <a:extLst>
+              <a:ext uri="{FF2B5EF4-FFF2-40B4-BE49-F238E27FC236}">
+                <a16:creationId xmlns:a16="http://schemas.microsoft.com/office/drawing/2014/main" id="{625328FE-63B7-F71D-7F93-2D76E48005D9}"/>
+              </a:ext>
+            </a:extLst>
+          </p:cNvPr>
+          <p:cNvSpPr>
+            <a:spLocks noGrp="1"/>
+          </p:cNvSpPr>
+          <p:nvPr>
+            <p:ph type="body" idx="1"/>
+          </p:nvPr>
+        </p:nvSpPr>
+        <p:spPr/>
+        <p:txBody>
+          <a:bodyPr/>
+          <a:lstStyle/>
+          <a:p>
+            <a:pPr marL="171450" indent="-171450">
+              <a:buFont typeface="Arial" panose="020B0604020202020204" pitchFamily="34" charset="0"/>
+              <a:buChar char="•"/>
+            </a:pPr>
+            <a:endParaRPr lang="pt-BR" b="0" dirty="0"/>
+          </a:p>
+        </p:txBody>
+      </p:sp>
+      <p:sp>
+        <p:nvSpPr>
+          <p:cNvPr id="4" name="Espaço Reservado para Número de Slide 3">
+            <a:extLst>
+              <a:ext uri="{FF2B5EF4-FFF2-40B4-BE49-F238E27FC236}">
+                <a16:creationId xmlns:a16="http://schemas.microsoft.com/office/drawing/2014/main" id="{45B26D32-56CD-E77F-E124-38525748200F}"/>
+              </a:ext>
+            </a:extLst>
+          </p:cNvPr>
+          <p:cNvSpPr>
+            <a:spLocks noGrp="1"/>
+          </p:cNvSpPr>
+          <p:nvPr>
+            <p:ph type="sldNum" sz="quarter" idx="5"/>
+          </p:nvPr>
+        </p:nvSpPr>
+        <p:spPr/>
+        <p:txBody>
+          <a:bodyPr/>
+          <a:lstStyle/>
+          <a:p>
+            <a:fld id="{80F36A49-A1DD-40F8-B8AD-E6F5365256CB}" type="slidenum">
+              <a:rPr lang="pt-BR" smtClean="0"/>
+              <a:t>20</a:t>
+            </a:fld>
+            <a:endParaRPr lang="pt-BR"/>
+          </a:p>
+        </p:txBody>
+      </p:sp>
+    </p:spTree>
+    <p:extLst>
+      <p:ext uri="{BB962C8B-B14F-4D97-AF65-F5344CB8AC3E}">
+        <p14:creationId xmlns:p14="http://schemas.microsoft.com/office/powerpoint/2010/main" val="2282789574"/>
+      </p:ext>
+    </p:extLst>
+  </p:cSld>
+  <p:clrMapOvr>
+    <a:masterClrMapping/>
+  </p:clrMapOvr>
+</p:notes>
+</file>
+
+<file path=ppt/notesSlides/notesSlide21.xml><?xml version="1.0" encoding="utf-8"?>
+<p:notes xmlns:a="http://schemas.openxmlformats.org/drawingml/2006/main" xmlns:r="http://schemas.openxmlformats.org/officeDocument/2006/relationships" xmlns:p="http://schemas.openxmlformats.org/presentationml/2006/main">
+  <p:cSld>
+    <p:spTree>
+      <p:nvGrpSpPr>
+        <p:cNvPr id="1" name="">
+          <a:extLst>
+            <a:ext uri="{FF2B5EF4-FFF2-40B4-BE49-F238E27FC236}">
+              <a16:creationId xmlns:a16="http://schemas.microsoft.com/office/drawing/2014/main" id="{781A5DBF-F087-D425-FE1F-C594C66B8E63}"/>
+            </a:ext>
+          </a:extLst>
+        </p:cNvPr>
+        <p:cNvGrpSpPr/>
+        <p:nvPr/>
+      </p:nvGrpSpPr>
+      <p:grpSpPr>
+        <a:xfrm>
+          <a:off x="0" y="0"/>
+          <a:ext cx="0" cy="0"/>
+          <a:chOff x="0" y="0"/>
+          <a:chExt cx="0" cy="0"/>
+        </a:xfrm>
+      </p:grpSpPr>
+      <p:sp>
+        <p:nvSpPr>
+          <p:cNvPr id="2" name="Espaço Reservado para Imagem de Slide 1">
+            <a:extLst>
+              <a:ext uri="{FF2B5EF4-FFF2-40B4-BE49-F238E27FC236}">
+                <a16:creationId xmlns:a16="http://schemas.microsoft.com/office/drawing/2014/main" id="{43E1EC70-E1DD-80B5-AE67-F989BC04FC2E}"/>
+              </a:ext>
+            </a:extLst>
+          </p:cNvPr>
+          <p:cNvSpPr>
+            <a:spLocks noGrp="1" noRot="1" noChangeAspect="1"/>
+          </p:cNvSpPr>
+          <p:nvPr>
+            <p:ph type="sldImg"/>
+          </p:nvPr>
+        </p:nvSpPr>
+        <p:spPr/>
+        <p:txBody>
+          <a:bodyPr/>
+          <a:lstStyle/>
+          <a:p>
+            <a:endParaRPr lang="pt-BR"/>
+          </a:p>
+        </p:txBody>
+      </p:sp>
+      <p:sp>
+        <p:nvSpPr>
+          <p:cNvPr id="3" name="Espaço Reservado para Anotações 2">
+            <a:extLst>
+              <a:ext uri="{FF2B5EF4-FFF2-40B4-BE49-F238E27FC236}">
+                <a16:creationId xmlns:a16="http://schemas.microsoft.com/office/drawing/2014/main" id="{B0ECADB7-139D-33D9-1BFF-A3158C9ACF0D}"/>
+              </a:ext>
+            </a:extLst>
+          </p:cNvPr>
+          <p:cNvSpPr>
+            <a:spLocks noGrp="1"/>
+          </p:cNvSpPr>
+          <p:nvPr>
+            <p:ph type="body" idx="1"/>
+          </p:nvPr>
+        </p:nvSpPr>
+        <p:spPr/>
+        <p:txBody>
+          <a:bodyPr/>
+          <a:lstStyle/>
+          <a:p>
+            <a:pPr marL="0" marR="0" lvl="0" indent="0" algn="l" defTabSz="914400" rtl="0" eaLnBrk="1" fontAlgn="auto" latinLnBrk="0" hangingPunct="1">
+              <a:lnSpc>
+                <a:spcPct val="100000"/>
+              </a:lnSpc>
+              <a:spcBef>
+                <a:spcPts val="0"/>
+              </a:spcBef>
+              <a:spcAft>
+                <a:spcPts val="0"/>
+              </a:spcAft>
+              <a:buClrTx/>
+              <a:buSzTx/>
+              <a:buFontTx/>
+              <a:buNone/>
+              <a:tabLst/>
+              <a:defRPr/>
+            </a:pPr>
+            <a:r>
+              <a:rPr lang="pt-BR" sz="1200" dirty="0"/>
+              <a:t>Etapas básicas para transformar um sinal contínuo (analógico) em um sinal digital</a:t>
+            </a:r>
+          </a:p>
+          <a:p>
+            <a:endParaRPr lang="pt-BR" b="1" dirty="0"/>
+          </a:p>
+        </p:txBody>
+      </p:sp>
+      <p:sp>
+        <p:nvSpPr>
+          <p:cNvPr id="4" name="Espaço Reservado para Número de Slide 3">
+            <a:extLst>
+              <a:ext uri="{FF2B5EF4-FFF2-40B4-BE49-F238E27FC236}">
+                <a16:creationId xmlns:a16="http://schemas.microsoft.com/office/drawing/2014/main" id="{7C5A10F7-6A75-1784-5EB0-733CDBEAF5FB}"/>
+              </a:ext>
+            </a:extLst>
+          </p:cNvPr>
+          <p:cNvSpPr>
+            <a:spLocks noGrp="1"/>
+          </p:cNvSpPr>
+          <p:nvPr>
+            <p:ph type="sldNum" sz="quarter" idx="5"/>
+          </p:nvPr>
+        </p:nvSpPr>
+        <p:spPr/>
+        <p:txBody>
+          <a:bodyPr/>
+          <a:lstStyle/>
+          <a:p>
+            <a:fld id="{80F36A49-A1DD-40F8-B8AD-E6F5365256CB}" type="slidenum">
+              <a:rPr lang="pt-BR" smtClean="0"/>
+              <a:t>21</a:t>
+            </a:fld>
+            <a:endParaRPr lang="pt-BR"/>
+          </a:p>
+        </p:txBody>
+      </p:sp>
+    </p:spTree>
+    <p:extLst>
+      <p:ext uri="{BB962C8B-B14F-4D97-AF65-F5344CB8AC3E}">
+        <p14:creationId xmlns:p14="http://schemas.microsoft.com/office/powerpoint/2010/main" val="445097786"/>
       </p:ext>
     </p:extLst>
   </p:cSld>
@@ -1841,7 +3205,7 @@
           <a:p>
             <a:fld id="{A87E3B6E-8316-4A1C-BADA-DB7F3456EEF1}" type="datetimeFigureOut">
               <a:rPr lang="pt-BR" smtClean="0"/>
-              <a:t>14/09/2026</a:t>
+              <a:t>15/09/2026</a:t>
             </a:fld>
             <a:endParaRPr lang="pt-BR"/>
           </a:p>
@@ -2039,7 +3403,7 @@
           <a:p>
             <a:fld id="{A87E3B6E-8316-4A1C-BADA-DB7F3456EEF1}" type="datetimeFigureOut">
               <a:rPr lang="pt-BR" smtClean="0"/>
-              <a:t>14/09/2026</a:t>
+              <a:t>15/09/2026</a:t>
             </a:fld>
             <a:endParaRPr lang="pt-BR"/>
           </a:p>
@@ -2247,7 +3611,7 @@
           <a:p>
             <a:fld id="{A87E3B6E-8316-4A1C-BADA-DB7F3456EEF1}" type="datetimeFigureOut">
               <a:rPr lang="pt-BR" smtClean="0"/>
-              <a:t>14/09/2026</a:t>
+              <a:t>15/09/2026</a:t>
             </a:fld>
             <a:endParaRPr lang="pt-BR"/>
           </a:p>
@@ -2483,7 +3847,7 @@
           <a:p>
             <a:fld id="{A87E3B6E-8316-4A1C-BADA-DB7F3456EEF1}" type="datetimeFigureOut">
               <a:rPr lang="pt-BR" smtClean="0"/>
-              <a:t>14/09/2026</a:t>
+              <a:t>15/09/2026</a:t>
             </a:fld>
             <a:endParaRPr lang="pt-BR"/>
           </a:p>
@@ -2653,7 +4017,7 @@
           <a:p>
             <a:fld id="{A87E3B6E-8316-4A1C-BADA-DB7F3456EEF1}" type="datetimeFigureOut">
               <a:rPr lang="pt-BR" smtClean="0"/>
-              <a:t>14/09/2026</a:t>
+              <a:t>15/09/2026</a:t>
             </a:fld>
             <a:endParaRPr lang="pt-BR"/>
           </a:p>
@@ -2921,7 +4285,7 @@
           <a:p>
             <a:fld id="{A87E3B6E-8316-4A1C-BADA-DB7F3456EEF1}" type="datetimeFigureOut">
               <a:rPr lang="pt-BR" smtClean="0"/>
-              <a:t>14/09/2026</a:t>
+              <a:t>15/09/2026</a:t>
             </a:fld>
             <a:endParaRPr lang="pt-BR"/>
           </a:p>
@@ -3153,7 +4517,7 @@
           <a:p>
             <a:fld id="{A87E3B6E-8316-4A1C-BADA-DB7F3456EEF1}" type="datetimeFigureOut">
               <a:rPr lang="pt-BR" smtClean="0"/>
-              <a:t>14/09/2026</a:t>
+              <a:t>15/09/2026</a:t>
             </a:fld>
             <a:endParaRPr lang="pt-BR"/>
           </a:p>
@@ -3508,7 +4872,7 @@
           <a:p>
             <a:fld id="{A87E3B6E-8316-4A1C-BADA-DB7F3456EEF1}" type="datetimeFigureOut">
               <a:rPr lang="pt-BR" smtClean="0"/>
-              <a:t>14/09/2026</a:t>
+              <a:t>15/09/2026</a:t>
             </a:fld>
             <a:endParaRPr lang="pt-BR"/>
           </a:p>
@@ -3649,7 +5013,7 @@
           <a:p>
             <a:fld id="{A87E3B6E-8316-4A1C-BADA-DB7F3456EEF1}" type="datetimeFigureOut">
               <a:rPr lang="pt-BR" smtClean="0"/>
-              <a:t>14/09/2026</a:t>
+              <a:t>15/09/2026</a:t>
             </a:fld>
             <a:endParaRPr lang="pt-BR"/>
           </a:p>
@@ -3744,7 +5108,7 @@
           <a:p>
             <a:fld id="{A87E3B6E-8316-4A1C-BADA-DB7F3456EEF1}" type="datetimeFigureOut">
               <a:rPr lang="pt-BR" smtClean="0"/>
-              <a:t>14/09/2026</a:t>
+              <a:t>15/09/2026</a:t>
             </a:fld>
             <a:endParaRPr lang="pt-BR"/>
           </a:p>
@@ -4108,7 +5472,7 @@
           <a:p>
             <a:fld id="{A87E3B6E-8316-4A1C-BADA-DB7F3456EEF1}" type="datetimeFigureOut">
               <a:rPr lang="pt-BR" smtClean="0"/>
-              <a:t>14/09/2026</a:t>
+              <a:t>15/09/2026</a:t>
             </a:fld>
             <a:endParaRPr lang="pt-BR"/>
           </a:p>
@@ -4309,7 +5673,7 @@
           <a:p>
             <a:fld id="{A87E3B6E-8316-4A1C-BADA-DB7F3456EEF1}" type="datetimeFigureOut">
               <a:rPr lang="pt-BR" smtClean="0"/>
-              <a:t>14/09/2026</a:t>
+              <a:t>15/09/2026</a:t>
             </a:fld>
             <a:endParaRPr lang="pt-BR"/>
           </a:p>
@@ -4669,7 +6033,7 @@
           <a:p>
             <a:fld id="{A87E3B6E-8316-4A1C-BADA-DB7F3456EEF1}" type="datetimeFigureOut">
               <a:rPr lang="pt-BR" smtClean="0"/>
-              <a:t>14/09/2026</a:t>
+              <a:t>15/09/2026</a:t>
             </a:fld>
             <a:endParaRPr lang="pt-BR"/>
           </a:p>
@@ -4854,7 +6218,7 @@
           <a:p>
             <a:fld id="{A87E3B6E-8316-4A1C-BADA-DB7F3456EEF1}" type="datetimeFigureOut">
               <a:rPr lang="pt-BR" smtClean="0"/>
-              <a:t>14/09/2026</a:t>
+              <a:t>15/09/2026</a:t>
             </a:fld>
             <a:endParaRPr lang="pt-BR"/>
           </a:p>
@@ -5034,7 +6398,7 @@
           <a:p>
             <a:fld id="{A87E3B6E-8316-4A1C-BADA-DB7F3456EEF1}" type="datetimeFigureOut">
               <a:rPr lang="pt-BR" smtClean="0"/>
-              <a:t>14/09/2026</a:t>
+              <a:t>15/09/2026</a:t>
             </a:fld>
             <a:endParaRPr lang="pt-BR"/>
           </a:p>
@@ -5297,7 +6661,7 @@
           <a:p>
             <a:fld id="{A87E3B6E-8316-4A1C-BADA-DB7F3456EEF1}" type="datetimeFigureOut">
               <a:rPr lang="pt-BR" smtClean="0"/>
-              <a:t>14/09/2026</a:t>
+              <a:t>15/09/2026</a:t>
             </a:fld>
             <a:endParaRPr lang="pt-BR"/>
           </a:p>
@@ -5562,7 +6926,7 @@
           <a:p>
             <a:fld id="{A87E3B6E-8316-4A1C-BADA-DB7F3456EEF1}" type="datetimeFigureOut">
               <a:rPr lang="pt-BR" smtClean="0"/>
-              <a:t>14/09/2026</a:t>
+              <a:t>15/09/2026</a:t>
             </a:fld>
             <a:endParaRPr lang="pt-BR"/>
           </a:p>
@@ -5974,7 +7338,7 @@
           <a:p>
             <a:fld id="{A87E3B6E-8316-4A1C-BADA-DB7F3456EEF1}" type="datetimeFigureOut">
               <a:rPr lang="pt-BR" smtClean="0"/>
-              <a:t>14/09/2026</a:t>
+              <a:t>15/09/2026</a:t>
             </a:fld>
             <a:endParaRPr lang="pt-BR"/>
           </a:p>
@@ -6115,7 +7479,7 @@
           <a:p>
             <a:fld id="{A87E3B6E-8316-4A1C-BADA-DB7F3456EEF1}" type="datetimeFigureOut">
               <a:rPr lang="pt-BR" smtClean="0"/>
-              <a:t>14/09/2026</a:t>
+              <a:t>15/09/2026</a:t>
             </a:fld>
             <a:endParaRPr lang="pt-BR"/>
           </a:p>
@@ -6228,7 +7592,7 @@
           <a:p>
             <a:fld id="{A87E3B6E-8316-4A1C-BADA-DB7F3456EEF1}" type="datetimeFigureOut">
               <a:rPr lang="pt-BR" smtClean="0"/>
-              <a:t>14/09/2026</a:t>
+              <a:t>15/09/2026</a:t>
             </a:fld>
             <a:endParaRPr lang="pt-BR"/>
           </a:p>
@@ -6539,7 +7903,7 @@
           <a:p>
             <a:fld id="{A87E3B6E-8316-4A1C-BADA-DB7F3456EEF1}" type="datetimeFigureOut">
               <a:rPr lang="pt-BR" smtClean="0"/>
-              <a:t>14/09/2026</a:t>
+              <a:t>15/09/2026</a:t>
             </a:fld>
             <a:endParaRPr lang="pt-BR"/>
           </a:p>
@@ -6827,7 +8191,7 @@
           <a:p>
             <a:fld id="{A87E3B6E-8316-4A1C-BADA-DB7F3456EEF1}" type="datetimeFigureOut">
               <a:rPr lang="pt-BR" smtClean="0"/>
-              <a:t>14/09/2026</a:t>
+              <a:t>15/09/2026</a:t>
             </a:fld>
             <a:endParaRPr lang="pt-BR"/>
           </a:p>
@@ -7068,7 +8432,7 @@
           <a:p>
             <a:fld id="{A87E3B6E-8316-4A1C-BADA-DB7F3456EEF1}" type="datetimeFigureOut">
               <a:rPr lang="pt-BR" smtClean="0"/>
-              <a:t>14/09/2026</a:t>
+              <a:t>15/09/2026</a:t>
             </a:fld>
             <a:endParaRPr lang="pt-BR"/>
           </a:p>
@@ -7632,7 +8996,7 @@
           <a:p>
             <a:fld id="{A87E3B6E-8316-4A1C-BADA-DB7F3456EEF1}" type="datetimeFigureOut">
               <a:rPr lang="pt-BR" smtClean="0"/>
-              <a:t>14/09/2026</a:t>
+              <a:t>15/09/2026</a:t>
             </a:fld>
             <a:endParaRPr lang="pt-BR"/>
           </a:p>
@@ -8240,6 +9604,3298 @@
         <p:cNvPr id="1" name="">
           <a:extLst>
             <a:ext uri="{FF2B5EF4-FFF2-40B4-BE49-F238E27FC236}">
+              <a16:creationId xmlns:a16="http://schemas.microsoft.com/office/drawing/2014/main" id="{5D5D4CB2-8C53-2F2D-796E-A380134A172D}"/>
+            </a:ext>
+          </a:extLst>
+        </p:cNvPr>
+        <p:cNvGrpSpPr/>
+        <p:nvPr/>
+      </p:nvGrpSpPr>
+      <p:grpSpPr>
+        <a:xfrm>
+          <a:off x="0" y="0"/>
+          <a:ext cx="0" cy="0"/>
+          <a:chOff x="0" y="0"/>
+          <a:chExt cx="0" cy="0"/>
+        </a:xfrm>
+      </p:grpSpPr>
+      <p:sp>
+        <p:nvSpPr>
+          <p:cNvPr id="5" name="Retângulo 4">
+            <a:extLst>
+              <a:ext uri="{FF2B5EF4-FFF2-40B4-BE49-F238E27FC236}">
+                <a16:creationId xmlns:a16="http://schemas.microsoft.com/office/drawing/2014/main" id="{84D2D4C6-A1F5-3077-A52A-A5E4C03C3EAE}"/>
+              </a:ext>
+            </a:extLst>
+          </p:cNvPr>
+          <p:cNvSpPr/>
+          <p:nvPr/>
+        </p:nvSpPr>
+        <p:spPr>
+          <a:xfrm>
+            <a:off x="0" y="-2"/>
+            <a:ext cx="12192000" cy="1325563"/>
+          </a:xfrm>
+          <a:prstGeom prst="rect">
+            <a:avLst/>
+          </a:prstGeom>
+          <a:solidFill>
+            <a:schemeClr val="accent2"/>
+          </a:solidFill>
+          <a:ln>
+            <a:solidFill>
+              <a:srgbClr val="418AB3"/>
+            </a:solidFill>
+          </a:ln>
+        </p:spPr>
+        <p:style>
+          <a:lnRef idx="2">
+            <a:schemeClr val="accent1">
+              <a:shade val="15000"/>
+            </a:schemeClr>
+          </a:lnRef>
+          <a:fillRef idx="1">
+            <a:schemeClr val="accent1"/>
+          </a:fillRef>
+          <a:effectRef idx="0">
+            <a:schemeClr val="accent1"/>
+          </a:effectRef>
+          <a:fontRef idx="minor">
+            <a:schemeClr val="lt1"/>
+          </a:fontRef>
+        </p:style>
+        <p:txBody>
+          <a:bodyPr rtlCol="0" anchor="ctr"/>
+          <a:lstStyle/>
+          <a:p>
+            <a:pPr algn="ctr"/>
+            <a:endParaRPr lang="pt-BR" dirty="0"/>
+          </a:p>
+        </p:txBody>
+      </p:sp>
+      <p:sp>
+        <p:nvSpPr>
+          <p:cNvPr id="2" name="Título 1">
+            <a:extLst>
+              <a:ext uri="{FF2B5EF4-FFF2-40B4-BE49-F238E27FC236}">
+                <a16:creationId xmlns:a16="http://schemas.microsoft.com/office/drawing/2014/main" id="{11634EE8-C3F1-B62E-A653-1DF6F96C9856}"/>
+              </a:ext>
+            </a:extLst>
+          </p:cNvPr>
+          <p:cNvSpPr>
+            <a:spLocks noGrp="1"/>
+          </p:cNvSpPr>
+          <p:nvPr>
+            <p:ph type="title"/>
+          </p:nvPr>
+        </p:nvSpPr>
+        <p:spPr>
+          <a:xfrm>
+            <a:off x="0" y="-1"/>
+            <a:ext cx="12192000" cy="1325563"/>
+          </a:xfrm>
+        </p:spPr>
+        <p:txBody>
+          <a:bodyPr/>
+          <a:lstStyle/>
+          <a:p>
+            <a:pPr algn="ctr"/>
+            <a:r>
+              <a:rPr lang="pt-BR" dirty="0">
+                <a:solidFill>
+                  <a:schemeClr val="bg1"/>
+                </a:solidFill>
+              </a:rPr>
+              <a:t>Problema das bordas</a:t>
+            </a:r>
+          </a:p>
+        </p:txBody>
+      </p:sp>
+      <p:sp>
+        <p:nvSpPr>
+          <p:cNvPr id="12" name="AutoShape 6" descr="Lógica Proposicional x Lógica de Argumento ⋆ Colaborae">
+            <a:extLst>
+              <a:ext uri="{FF2B5EF4-FFF2-40B4-BE49-F238E27FC236}">
+                <a16:creationId xmlns:a16="http://schemas.microsoft.com/office/drawing/2014/main" id="{E37DA572-CAEA-4D7E-9971-35222150EF2C}"/>
+              </a:ext>
+            </a:extLst>
+          </p:cNvPr>
+          <p:cNvSpPr>
+            <a:spLocks noChangeAspect="1" noChangeArrowheads="1"/>
+          </p:cNvSpPr>
+          <p:nvPr/>
+        </p:nvSpPr>
+        <p:spPr bwMode="auto">
+          <a:xfrm>
+            <a:off x="5943600" y="-1707776"/>
+            <a:ext cx="5289176" cy="5289176"/>
+          </a:xfrm>
+          <a:prstGeom prst="rect">
+            <a:avLst/>
+          </a:prstGeom>
+          <a:noFill/>
+          <a:extLst>
+            <a:ext uri="{909E8E84-426E-40DD-AFC4-6F175D3DCCD1}">
+              <a14:hiddenFill xmlns:a14="http://schemas.microsoft.com/office/drawing/2010/main">
+                <a:solidFill>
+                  <a:srgbClr val="FFFFFF"/>
+                </a:solidFill>
+              </a14:hiddenFill>
+            </a:ext>
+          </a:extLst>
+        </p:spPr>
+        <p:txBody>
+          <a:bodyPr vert="horz" wrap="square" lIns="91440" tIns="45720" rIns="91440" bIns="45720" numCol="1" anchor="t" anchorCtr="0" compatLnSpc="1">
+            <a:prstTxWarp prst="textNoShape">
+              <a:avLst/>
+            </a:prstTxWarp>
+          </a:bodyPr>
+          <a:lstStyle/>
+          <a:p>
+            <a:endParaRPr lang="pt-BR"/>
+          </a:p>
+        </p:txBody>
+      </p:sp>
+      <p:pic>
+        <p:nvPicPr>
+          <p:cNvPr id="4" name="Imagem 3">
+            <a:extLst>
+              <a:ext uri="{FF2B5EF4-FFF2-40B4-BE49-F238E27FC236}">
+                <a16:creationId xmlns:a16="http://schemas.microsoft.com/office/drawing/2014/main" id="{24C592EC-BC64-0B39-CD72-8A7BAF51421C}"/>
+              </a:ext>
+            </a:extLst>
+          </p:cNvPr>
+          <p:cNvPicPr>
+            <a:picLocks noChangeAspect="1"/>
+          </p:cNvPicPr>
+          <p:nvPr/>
+        </p:nvPicPr>
+        <p:blipFill>
+          <a:blip r:embed="rId3"/>
+          <a:stretch>
+            <a:fillRect/>
+          </a:stretch>
+        </p:blipFill>
+        <p:spPr>
+          <a:xfrm>
+            <a:off x="2032837" y="1865190"/>
+            <a:ext cx="8126325" cy="4461900"/>
+          </a:xfrm>
+          <a:prstGeom prst="rect">
+            <a:avLst/>
+          </a:prstGeom>
+        </p:spPr>
+      </p:pic>
+    </p:spTree>
+    <p:extLst>
+      <p:ext uri="{BB962C8B-B14F-4D97-AF65-F5344CB8AC3E}">
+        <p14:creationId xmlns:p14="http://schemas.microsoft.com/office/powerpoint/2010/main" val="2467322883"/>
+      </p:ext>
+    </p:extLst>
+  </p:cSld>
+  <p:clrMapOvr>
+    <a:masterClrMapping/>
+  </p:clrMapOvr>
+</p:sld>
+</file>
+
+<file path=ppt/slides/slide11.xml><?xml version="1.0" encoding="utf-8"?>
+<p:sld xmlns:a="http://schemas.openxmlformats.org/drawingml/2006/main" xmlns:r="http://schemas.openxmlformats.org/officeDocument/2006/relationships" xmlns:p="http://schemas.openxmlformats.org/presentationml/2006/main">
+  <p:cSld>
+    <p:spTree>
+      <p:nvGrpSpPr>
+        <p:cNvPr id="1" name="">
+          <a:extLst>
+            <a:ext uri="{FF2B5EF4-FFF2-40B4-BE49-F238E27FC236}">
+              <a16:creationId xmlns:a16="http://schemas.microsoft.com/office/drawing/2014/main" id="{9F77C687-5887-EB70-E94F-32C249EFE181}"/>
+            </a:ext>
+          </a:extLst>
+        </p:cNvPr>
+        <p:cNvGrpSpPr/>
+        <p:nvPr/>
+      </p:nvGrpSpPr>
+      <p:grpSpPr>
+        <a:xfrm>
+          <a:off x="0" y="0"/>
+          <a:ext cx="0" cy="0"/>
+          <a:chOff x="0" y="0"/>
+          <a:chExt cx="0" cy="0"/>
+        </a:xfrm>
+      </p:grpSpPr>
+      <p:sp>
+        <p:nvSpPr>
+          <p:cNvPr id="5" name="Retângulo 4">
+            <a:extLst>
+              <a:ext uri="{FF2B5EF4-FFF2-40B4-BE49-F238E27FC236}">
+                <a16:creationId xmlns:a16="http://schemas.microsoft.com/office/drawing/2014/main" id="{367892BC-9F19-887E-AAC4-C8893921867B}"/>
+              </a:ext>
+            </a:extLst>
+          </p:cNvPr>
+          <p:cNvSpPr/>
+          <p:nvPr/>
+        </p:nvSpPr>
+        <p:spPr>
+          <a:xfrm>
+            <a:off x="0" y="-2"/>
+            <a:ext cx="12192000" cy="1325563"/>
+          </a:xfrm>
+          <a:prstGeom prst="rect">
+            <a:avLst/>
+          </a:prstGeom>
+          <a:solidFill>
+            <a:schemeClr val="accent2"/>
+          </a:solidFill>
+          <a:ln>
+            <a:solidFill>
+              <a:srgbClr val="418AB3"/>
+            </a:solidFill>
+          </a:ln>
+        </p:spPr>
+        <p:style>
+          <a:lnRef idx="2">
+            <a:schemeClr val="accent1">
+              <a:shade val="15000"/>
+            </a:schemeClr>
+          </a:lnRef>
+          <a:fillRef idx="1">
+            <a:schemeClr val="accent1"/>
+          </a:fillRef>
+          <a:effectRef idx="0">
+            <a:schemeClr val="accent1"/>
+          </a:effectRef>
+          <a:fontRef idx="minor">
+            <a:schemeClr val="lt1"/>
+          </a:fontRef>
+        </p:style>
+        <p:txBody>
+          <a:bodyPr rtlCol="0" anchor="ctr"/>
+          <a:lstStyle/>
+          <a:p>
+            <a:pPr algn="ctr"/>
+            <a:endParaRPr lang="pt-BR" dirty="0"/>
+          </a:p>
+        </p:txBody>
+      </p:sp>
+      <p:sp>
+        <p:nvSpPr>
+          <p:cNvPr id="2" name="Título 1">
+            <a:extLst>
+              <a:ext uri="{FF2B5EF4-FFF2-40B4-BE49-F238E27FC236}">
+                <a16:creationId xmlns:a16="http://schemas.microsoft.com/office/drawing/2014/main" id="{43D66059-A074-CCCB-707E-C13DD9DEA842}"/>
+              </a:ext>
+            </a:extLst>
+          </p:cNvPr>
+          <p:cNvSpPr>
+            <a:spLocks noGrp="1"/>
+          </p:cNvSpPr>
+          <p:nvPr>
+            <p:ph type="title"/>
+          </p:nvPr>
+        </p:nvSpPr>
+        <p:spPr>
+          <a:xfrm>
+            <a:off x="0" y="-1"/>
+            <a:ext cx="12192000" cy="1325563"/>
+          </a:xfrm>
+        </p:spPr>
+        <p:txBody>
+          <a:bodyPr/>
+          <a:lstStyle/>
+          <a:p>
+            <a:pPr algn="ctr"/>
+            <a:r>
+              <a:rPr lang="pt-BR" dirty="0">
+                <a:solidFill>
+                  <a:schemeClr val="bg1"/>
+                </a:solidFill>
+              </a:rPr>
+              <a:t>Filtros de suavização</a:t>
+            </a:r>
+          </a:p>
+        </p:txBody>
+      </p:sp>
+      <p:sp>
+        <p:nvSpPr>
+          <p:cNvPr id="12" name="AutoShape 6" descr="Lógica Proposicional x Lógica de Argumento ⋆ Colaborae">
+            <a:extLst>
+              <a:ext uri="{FF2B5EF4-FFF2-40B4-BE49-F238E27FC236}">
+                <a16:creationId xmlns:a16="http://schemas.microsoft.com/office/drawing/2014/main" id="{A22E2B30-520F-B5D1-8BFA-0679BBF6BDD1}"/>
+              </a:ext>
+            </a:extLst>
+          </p:cNvPr>
+          <p:cNvSpPr>
+            <a:spLocks noChangeAspect="1" noChangeArrowheads="1"/>
+          </p:cNvSpPr>
+          <p:nvPr/>
+        </p:nvSpPr>
+        <p:spPr bwMode="auto">
+          <a:xfrm>
+            <a:off x="5943600" y="-1707776"/>
+            <a:ext cx="5289176" cy="5289176"/>
+          </a:xfrm>
+          <a:prstGeom prst="rect">
+            <a:avLst/>
+          </a:prstGeom>
+          <a:noFill/>
+          <a:extLst>
+            <a:ext uri="{909E8E84-426E-40DD-AFC4-6F175D3DCCD1}">
+              <a14:hiddenFill xmlns:a14="http://schemas.microsoft.com/office/drawing/2010/main">
+                <a:solidFill>
+                  <a:srgbClr val="FFFFFF"/>
+                </a:solidFill>
+              </a14:hiddenFill>
+            </a:ext>
+          </a:extLst>
+        </p:spPr>
+        <p:txBody>
+          <a:bodyPr vert="horz" wrap="square" lIns="91440" tIns="45720" rIns="91440" bIns="45720" numCol="1" anchor="t" anchorCtr="0" compatLnSpc="1">
+            <a:prstTxWarp prst="textNoShape">
+              <a:avLst/>
+            </a:prstTxWarp>
+          </a:bodyPr>
+          <a:lstStyle/>
+          <a:p>
+            <a:endParaRPr lang="pt-BR"/>
+          </a:p>
+        </p:txBody>
+      </p:sp>
+      <p:sp>
+        <p:nvSpPr>
+          <p:cNvPr id="6" name="Espaço Reservado para Conteúdo 5">
+            <a:extLst>
+              <a:ext uri="{FF2B5EF4-FFF2-40B4-BE49-F238E27FC236}">
+                <a16:creationId xmlns:a16="http://schemas.microsoft.com/office/drawing/2014/main" id="{EFD4E364-1591-57A2-8F62-86EAD6C884A0}"/>
+              </a:ext>
+            </a:extLst>
+          </p:cNvPr>
+          <p:cNvSpPr>
+            <a:spLocks noGrp="1"/>
+          </p:cNvSpPr>
+          <p:nvPr>
+            <p:ph idx="1"/>
+          </p:nvPr>
+        </p:nvSpPr>
+        <p:spPr>
+          <a:xfrm>
+            <a:off x="270958" y="2494254"/>
+            <a:ext cx="7196642" cy="3351376"/>
+          </a:xfrm>
+        </p:spPr>
+        <p:txBody>
+          <a:bodyPr>
+            <a:normAutofit/>
+          </a:bodyPr>
+          <a:lstStyle/>
+          <a:p>
+            <a:pPr algn="just"/>
+            <a:r>
+              <a:rPr lang="pt-BR" sz="2200" dirty="0"/>
+              <a:t>Filtros de suavização, ou passa-baixa (</a:t>
+            </a:r>
+            <a:r>
+              <a:rPr lang="pt-BR" sz="2200" dirty="0" err="1"/>
+              <a:t>low-pass</a:t>
+            </a:r>
+            <a:r>
+              <a:rPr lang="pt-BR" sz="2200" dirty="0"/>
+              <a:t>) tendem a suavizar detalhes e atenuar pequenas variações.</a:t>
+            </a:r>
+          </a:p>
+          <a:p>
+            <a:pPr algn="just"/>
+            <a:endParaRPr lang="pt-BR" sz="2200" dirty="0"/>
+          </a:p>
+          <a:p>
+            <a:pPr algn="just"/>
+            <a:r>
+              <a:rPr lang="pt-BR" sz="2200" dirty="0"/>
+              <a:t>O filtro passa-baixa atenua componentes de alta frequência (áreas com </a:t>
+            </a:r>
+            <a:r>
+              <a:rPr lang="pt-BR" sz="2400" dirty="0"/>
+              <a:t>mudanças bruscas de intensidade</a:t>
+            </a:r>
+            <a:r>
+              <a:rPr lang="pt-BR" sz="2200" dirty="0"/>
+              <a:t>)</a:t>
+            </a:r>
+          </a:p>
+          <a:p>
+            <a:pPr algn="just"/>
+            <a:endParaRPr lang="pt-BR" sz="2200" dirty="0"/>
+          </a:p>
+          <a:p>
+            <a:pPr algn="just"/>
+            <a:r>
+              <a:rPr lang="pt-BR" sz="2200" dirty="0"/>
+              <a:t>As baixas frequências representam áreas uniformes ou com transições suaves. Não sendo afetadas pelo filtro.</a:t>
+            </a:r>
+          </a:p>
+        </p:txBody>
+      </p:sp>
+      <p:pic>
+        <p:nvPicPr>
+          <p:cNvPr id="4" name="Imagem 3">
+            <a:extLst>
+              <a:ext uri="{FF2B5EF4-FFF2-40B4-BE49-F238E27FC236}">
+                <a16:creationId xmlns:a16="http://schemas.microsoft.com/office/drawing/2014/main" id="{FD19D069-C2AA-0C89-7632-00247CC85DA2}"/>
+              </a:ext>
+            </a:extLst>
+          </p:cNvPr>
+          <p:cNvPicPr>
+            <a:picLocks noChangeAspect="1"/>
+          </p:cNvPicPr>
+          <p:nvPr/>
+        </p:nvPicPr>
+        <p:blipFill>
+          <a:blip r:embed="rId3"/>
+          <a:srcRect l="3787" t="17033" r="57251" b="22345"/>
+          <a:stretch>
+            <a:fillRect/>
+          </a:stretch>
+        </p:blipFill>
+        <p:spPr>
+          <a:xfrm>
+            <a:off x="8588189" y="1521276"/>
+            <a:ext cx="2507725" cy="2530929"/>
+          </a:xfrm>
+          <a:prstGeom prst="rect">
+            <a:avLst/>
+          </a:prstGeom>
+        </p:spPr>
+      </p:pic>
+      <p:pic>
+        <p:nvPicPr>
+          <p:cNvPr id="7" name="Imagem 6">
+            <a:extLst>
+              <a:ext uri="{FF2B5EF4-FFF2-40B4-BE49-F238E27FC236}">
+                <a16:creationId xmlns:a16="http://schemas.microsoft.com/office/drawing/2014/main" id="{145E477D-DDB3-779D-0E83-382B6532CCA4}"/>
+              </a:ext>
+            </a:extLst>
+          </p:cNvPr>
+          <p:cNvPicPr>
+            <a:picLocks noChangeAspect="1"/>
+          </p:cNvPicPr>
+          <p:nvPr/>
+        </p:nvPicPr>
+        <p:blipFill>
+          <a:blip r:embed="rId3"/>
+          <a:srcRect l="47001" t="17033" r="14037" b="22345"/>
+          <a:stretch>
+            <a:fillRect/>
+          </a:stretch>
+        </p:blipFill>
+        <p:spPr>
+          <a:xfrm>
+            <a:off x="8588188" y="4169230"/>
+            <a:ext cx="2507726" cy="2530929"/>
+          </a:xfrm>
+          <a:prstGeom prst="rect">
+            <a:avLst/>
+          </a:prstGeom>
+        </p:spPr>
+      </p:pic>
+    </p:spTree>
+    <p:extLst>
+      <p:ext uri="{BB962C8B-B14F-4D97-AF65-F5344CB8AC3E}">
+        <p14:creationId xmlns:p14="http://schemas.microsoft.com/office/powerpoint/2010/main" val="1093713828"/>
+      </p:ext>
+    </p:extLst>
+  </p:cSld>
+  <p:clrMapOvr>
+    <a:masterClrMapping/>
+  </p:clrMapOvr>
+</p:sld>
+</file>
+
+<file path=ppt/slides/slide12.xml><?xml version="1.0" encoding="utf-8"?>
+<p:sld xmlns:a="http://schemas.openxmlformats.org/drawingml/2006/main" xmlns:r="http://schemas.openxmlformats.org/officeDocument/2006/relationships" xmlns:p="http://schemas.openxmlformats.org/presentationml/2006/main">
+  <p:cSld>
+    <p:spTree>
+      <p:nvGrpSpPr>
+        <p:cNvPr id="1" name="">
+          <a:extLst>
+            <a:ext uri="{FF2B5EF4-FFF2-40B4-BE49-F238E27FC236}">
+              <a16:creationId xmlns:a16="http://schemas.microsoft.com/office/drawing/2014/main" id="{8097CCB0-B48A-FB7D-702C-81A18D8F086E}"/>
+            </a:ext>
+          </a:extLst>
+        </p:cNvPr>
+        <p:cNvGrpSpPr/>
+        <p:nvPr/>
+      </p:nvGrpSpPr>
+      <p:grpSpPr>
+        <a:xfrm>
+          <a:off x="0" y="0"/>
+          <a:ext cx="0" cy="0"/>
+          <a:chOff x="0" y="0"/>
+          <a:chExt cx="0" cy="0"/>
+        </a:xfrm>
+      </p:grpSpPr>
+      <p:sp>
+        <p:nvSpPr>
+          <p:cNvPr id="5" name="Retângulo 4">
+            <a:extLst>
+              <a:ext uri="{FF2B5EF4-FFF2-40B4-BE49-F238E27FC236}">
+                <a16:creationId xmlns:a16="http://schemas.microsoft.com/office/drawing/2014/main" id="{C5E9DFB2-33E0-D754-8F7A-925B48D5FA7B}"/>
+              </a:ext>
+            </a:extLst>
+          </p:cNvPr>
+          <p:cNvSpPr/>
+          <p:nvPr/>
+        </p:nvSpPr>
+        <p:spPr>
+          <a:xfrm>
+            <a:off x="0" y="-2"/>
+            <a:ext cx="12192000" cy="1325563"/>
+          </a:xfrm>
+          <a:prstGeom prst="rect">
+            <a:avLst/>
+          </a:prstGeom>
+          <a:solidFill>
+            <a:schemeClr val="accent2"/>
+          </a:solidFill>
+          <a:ln>
+            <a:solidFill>
+              <a:srgbClr val="418AB3"/>
+            </a:solidFill>
+          </a:ln>
+        </p:spPr>
+        <p:style>
+          <a:lnRef idx="2">
+            <a:schemeClr val="accent1">
+              <a:shade val="15000"/>
+            </a:schemeClr>
+          </a:lnRef>
+          <a:fillRef idx="1">
+            <a:schemeClr val="accent1"/>
+          </a:fillRef>
+          <a:effectRef idx="0">
+            <a:schemeClr val="accent1"/>
+          </a:effectRef>
+          <a:fontRef idx="minor">
+            <a:schemeClr val="lt1"/>
+          </a:fontRef>
+        </p:style>
+        <p:txBody>
+          <a:bodyPr rtlCol="0" anchor="ctr"/>
+          <a:lstStyle/>
+          <a:p>
+            <a:pPr algn="ctr"/>
+            <a:endParaRPr lang="pt-BR" dirty="0"/>
+          </a:p>
+        </p:txBody>
+      </p:sp>
+      <p:sp>
+        <p:nvSpPr>
+          <p:cNvPr id="2" name="Título 1">
+            <a:extLst>
+              <a:ext uri="{FF2B5EF4-FFF2-40B4-BE49-F238E27FC236}">
+                <a16:creationId xmlns:a16="http://schemas.microsoft.com/office/drawing/2014/main" id="{28224E76-5298-3F8D-EEE6-2A8EFE3EB297}"/>
+              </a:ext>
+            </a:extLst>
+          </p:cNvPr>
+          <p:cNvSpPr>
+            <a:spLocks noGrp="1"/>
+          </p:cNvSpPr>
+          <p:nvPr>
+            <p:ph type="title"/>
+          </p:nvPr>
+        </p:nvSpPr>
+        <p:spPr>
+          <a:xfrm>
+            <a:off x="0" y="-1"/>
+            <a:ext cx="12192000" cy="1325563"/>
+          </a:xfrm>
+        </p:spPr>
+        <p:txBody>
+          <a:bodyPr/>
+          <a:lstStyle/>
+          <a:p>
+            <a:pPr algn="ctr"/>
+            <a:r>
+              <a:rPr lang="pt-BR" dirty="0">
+                <a:solidFill>
+                  <a:schemeClr val="bg1"/>
+                </a:solidFill>
+              </a:rPr>
+              <a:t>Filtro de média</a:t>
+            </a:r>
+          </a:p>
+        </p:txBody>
+      </p:sp>
+      <p:sp>
+        <p:nvSpPr>
+          <p:cNvPr id="12" name="AutoShape 6" descr="Lógica Proposicional x Lógica de Argumento ⋆ Colaborae">
+            <a:extLst>
+              <a:ext uri="{FF2B5EF4-FFF2-40B4-BE49-F238E27FC236}">
+                <a16:creationId xmlns:a16="http://schemas.microsoft.com/office/drawing/2014/main" id="{1E898622-CD65-B1A7-CD44-544047C270AF}"/>
+              </a:ext>
+            </a:extLst>
+          </p:cNvPr>
+          <p:cNvSpPr>
+            <a:spLocks noChangeAspect="1" noChangeArrowheads="1"/>
+          </p:cNvSpPr>
+          <p:nvPr/>
+        </p:nvSpPr>
+        <p:spPr bwMode="auto">
+          <a:xfrm>
+            <a:off x="5943600" y="-1707776"/>
+            <a:ext cx="5289176" cy="5289176"/>
+          </a:xfrm>
+          <a:prstGeom prst="rect">
+            <a:avLst/>
+          </a:prstGeom>
+          <a:noFill/>
+          <a:extLst>
+            <a:ext uri="{909E8E84-426E-40DD-AFC4-6F175D3DCCD1}">
+              <a14:hiddenFill xmlns:a14="http://schemas.microsoft.com/office/drawing/2010/main">
+                <a:solidFill>
+                  <a:srgbClr val="FFFFFF"/>
+                </a:solidFill>
+              </a14:hiddenFill>
+            </a:ext>
+          </a:extLst>
+        </p:spPr>
+        <p:txBody>
+          <a:bodyPr vert="horz" wrap="square" lIns="91440" tIns="45720" rIns="91440" bIns="45720" numCol="1" anchor="t" anchorCtr="0" compatLnSpc="1">
+            <a:prstTxWarp prst="textNoShape">
+              <a:avLst/>
+            </a:prstTxWarp>
+          </a:bodyPr>
+          <a:lstStyle/>
+          <a:p>
+            <a:endParaRPr lang="pt-BR"/>
+          </a:p>
+        </p:txBody>
+      </p:sp>
+      <p:sp>
+        <p:nvSpPr>
+          <p:cNvPr id="6" name="Espaço Reservado para Conteúdo 5">
+            <a:extLst>
+              <a:ext uri="{FF2B5EF4-FFF2-40B4-BE49-F238E27FC236}">
+                <a16:creationId xmlns:a16="http://schemas.microsoft.com/office/drawing/2014/main" id="{E10701FA-ABB4-29F8-F997-7300BEF0127D}"/>
+              </a:ext>
+            </a:extLst>
+          </p:cNvPr>
+          <p:cNvSpPr>
+            <a:spLocks noGrp="1"/>
+          </p:cNvSpPr>
+          <p:nvPr>
+            <p:ph idx="1"/>
+          </p:nvPr>
+        </p:nvSpPr>
+        <p:spPr>
+          <a:xfrm>
+            <a:off x="342129" y="2165429"/>
+            <a:ext cx="6080442" cy="4061199"/>
+          </a:xfrm>
+        </p:spPr>
+        <p:txBody>
+          <a:bodyPr>
+            <a:normAutofit/>
+          </a:bodyPr>
+          <a:lstStyle/>
+          <a:p>
+            <a:pPr algn="just"/>
+            <a:r>
+              <a:rPr lang="pt-BR" sz="2200" dirty="0"/>
+              <a:t>Define o valor de pixel central de acordo com a média aritmética dos seus vizinhos.</a:t>
+            </a:r>
+          </a:p>
+          <a:p>
+            <a:pPr algn="just"/>
+            <a:endParaRPr lang="pt-BR" sz="2200" dirty="0"/>
+          </a:p>
+          <a:p>
+            <a:pPr algn="just"/>
+            <a:r>
+              <a:rPr lang="pt-BR" sz="2200" dirty="0"/>
+              <a:t>Atenua ruídos leves e suaviza contrastes, porém gera um efeito mais forte de borramento.</a:t>
+            </a:r>
+          </a:p>
+          <a:p>
+            <a:pPr marL="0" indent="0" algn="just">
+              <a:buNone/>
+            </a:pPr>
+            <a:endParaRPr lang="pt-BR" sz="2200" dirty="0"/>
+          </a:p>
+          <a:p>
+            <a:pPr algn="just"/>
+            <a:r>
+              <a:rPr lang="pt-BR" sz="2200" dirty="0"/>
+              <a:t>A principal desvantagem esta relacionada  ao fato de que todos os pixels possuem o mesmo peso.</a:t>
+            </a:r>
+          </a:p>
+          <a:p>
+            <a:pPr marL="0" indent="0" algn="just">
+              <a:buNone/>
+            </a:pPr>
+            <a:endParaRPr lang="pt-BR" sz="2200" dirty="0"/>
+          </a:p>
+        </p:txBody>
+      </p:sp>
+      <p:pic>
+        <p:nvPicPr>
+          <p:cNvPr id="8" name="Imagem 7">
+            <a:extLst>
+              <a:ext uri="{FF2B5EF4-FFF2-40B4-BE49-F238E27FC236}">
+                <a16:creationId xmlns:a16="http://schemas.microsoft.com/office/drawing/2014/main" id="{A34C386C-6EB1-1F4B-5F51-77DA74F7ABD8}"/>
+              </a:ext>
+            </a:extLst>
+          </p:cNvPr>
+          <p:cNvPicPr>
+            <a:picLocks noChangeAspect="1"/>
+          </p:cNvPicPr>
+          <p:nvPr/>
+        </p:nvPicPr>
+        <p:blipFill>
+          <a:blip r:embed="rId3"/>
+          <a:stretch>
+            <a:fillRect/>
+          </a:stretch>
+        </p:blipFill>
+        <p:spPr>
+          <a:xfrm>
+            <a:off x="6856722" y="3766457"/>
+            <a:ext cx="4993149" cy="2844356"/>
+          </a:xfrm>
+          <a:prstGeom prst="rect">
+            <a:avLst/>
+          </a:prstGeom>
+        </p:spPr>
+      </p:pic>
+      <p:pic>
+        <p:nvPicPr>
+          <p:cNvPr id="10" name="Imagem 9">
+            <a:extLst>
+              <a:ext uri="{FF2B5EF4-FFF2-40B4-BE49-F238E27FC236}">
+                <a16:creationId xmlns:a16="http://schemas.microsoft.com/office/drawing/2014/main" id="{224E4956-587D-D803-44F1-6C29A9336498}"/>
+              </a:ext>
+            </a:extLst>
+          </p:cNvPr>
+          <p:cNvPicPr>
+            <a:picLocks noChangeAspect="1"/>
+          </p:cNvPicPr>
+          <p:nvPr/>
+        </p:nvPicPr>
+        <p:blipFill>
+          <a:blip r:embed="rId4"/>
+          <a:srcRect l="25866" r="51867"/>
+          <a:stretch>
+            <a:fillRect/>
+          </a:stretch>
+        </p:blipFill>
+        <p:spPr>
+          <a:xfrm>
+            <a:off x="8444339" y="1952399"/>
+            <a:ext cx="1817914" cy="1629002"/>
+          </a:xfrm>
+          <a:prstGeom prst="rect">
+            <a:avLst/>
+          </a:prstGeom>
+        </p:spPr>
+      </p:pic>
+      <p:sp>
+        <p:nvSpPr>
+          <p:cNvPr id="11" name="CaixaDeTexto 10">
+            <a:extLst>
+              <a:ext uri="{FF2B5EF4-FFF2-40B4-BE49-F238E27FC236}">
+                <a16:creationId xmlns:a16="http://schemas.microsoft.com/office/drawing/2014/main" id="{466D0D03-57CD-C8B4-2022-0C92DE03EB7C}"/>
+              </a:ext>
+            </a:extLst>
+          </p:cNvPr>
+          <p:cNvSpPr txBox="1"/>
+          <p:nvPr/>
+        </p:nvSpPr>
+        <p:spPr>
+          <a:xfrm>
+            <a:off x="8871856" y="1679061"/>
+            <a:ext cx="1172757" cy="369332"/>
+          </a:xfrm>
+          <a:prstGeom prst="rect">
+            <a:avLst/>
+          </a:prstGeom>
+          <a:noFill/>
+        </p:spPr>
+        <p:txBody>
+          <a:bodyPr wrap="none" rtlCol="0">
+            <a:spAutoFit/>
+          </a:bodyPr>
+          <a:lstStyle/>
+          <a:p>
+            <a:r>
+              <a:rPr lang="pt-BR" dirty="0"/>
+              <a:t>Kernel 3x3</a:t>
+            </a:r>
+          </a:p>
+        </p:txBody>
+      </p:sp>
+    </p:spTree>
+    <p:extLst>
+      <p:ext uri="{BB962C8B-B14F-4D97-AF65-F5344CB8AC3E}">
+        <p14:creationId xmlns:p14="http://schemas.microsoft.com/office/powerpoint/2010/main" val="1607442038"/>
+      </p:ext>
+    </p:extLst>
+  </p:cSld>
+  <p:clrMapOvr>
+    <a:masterClrMapping/>
+  </p:clrMapOvr>
+</p:sld>
+</file>
+
+<file path=ppt/slides/slide13.xml><?xml version="1.0" encoding="utf-8"?>
+<p:sld xmlns:a="http://schemas.openxmlformats.org/drawingml/2006/main" xmlns:r="http://schemas.openxmlformats.org/officeDocument/2006/relationships" xmlns:p="http://schemas.openxmlformats.org/presentationml/2006/main">
+  <p:cSld>
+    <p:spTree>
+      <p:nvGrpSpPr>
+        <p:cNvPr id="1" name="">
+          <a:extLst>
+            <a:ext uri="{FF2B5EF4-FFF2-40B4-BE49-F238E27FC236}">
+              <a16:creationId xmlns:a16="http://schemas.microsoft.com/office/drawing/2014/main" id="{8763B251-70B5-0B34-FE04-862ADCEE1407}"/>
+            </a:ext>
+          </a:extLst>
+        </p:cNvPr>
+        <p:cNvGrpSpPr/>
+        <p:nvPr/>
+      </p:nvGrpSpPr>
+      <p:grpSpPr>
+        <a:xfrm>
+          <a:off x="0" y="0"/>
+          <a:ext cx="0" cy="0"/>
+          <a:chOff x="0" y="0"/>
+          <a:chExt cx="0" cy="0"/>
+        </a:xfrm>
+      </p:grpSpPr>
+      <p:sp>
+        <p:nvSpPr>
+          <p:cNvPr id="5" name="Retângulo 4">
+            <a:extLst>
+              <a:ext uri="{FF2B5EF4-FFF2-40B4-BE49-F238E27FC236}">
+                <a16:creationId xmlns:a16="http://schemas.microsoft.com/office/drawing/2014/main" id="{2F3D68E6-2A5F-EBC2-77A9-75306AA9DE14}"/>
+              </a:ext>
+            </a:extLst>
+          </p:cNvPr>
+          <p:cNvSpPr/>
+          <p:nvPr/>
+        </p:nvSpPr>
+        <p:spPr>
+          <a:xfrm>
+            <a:off x="0" y="-2"/>
+            <a:ext cx="12192000" cy="1325563"/>
+          </a:xfrm>
+          <a:prstGeom prst="rect">
+            <a:avLst/>
+          </a:prstGeom>
+          <a:solidFill>
+            <a:schemeClr val="accent2"/>
+          </a:solidFill>
+          <a:ln>
+            <a:solidFill>
+              <a:srgbClr val="418AB3"/>
+            </a:solidFill>
+          </a:ln>
+        </p:spPr>
+        <p:style>
+          <a:lnRef idx="2">
+            <a:schemeClr val="accent1">
+              <a:shade val="15000"/>
+            </a:schemeClr>
+          </a:lnRef>
+          <a:fillRef idx="1">
+            <a:schemeClr val="accent1"/>
+          </a:fillRef>
+          <a:effectRef idx="0">
+            <a:schemeClr val="accent1"/>
+          </a:effectRef>
+          <a:fontRef idx="minor">
+            <a:schemeClr val="lt1"/>
+          </a:fontRef>
+        </p:style>
+        <p:txBody>
+          <a:bodyPr rtlCol="0" anchor="ctr"/>
+          <a:lstStyle/>
+          <a:p>
+            <a:pPr algn="ctr"/>
+            <a:endParaRPr lang="pt-BR" dirty="0"/>
+          </a:p>
+        </p:txBody>
+      </p:sp>
+      <p:sp>
+        <p:nvSpPr>
+          <p:cNvPr id="2" name="Título 1">
+            <a:extLst>
+              <a:ext uri="{FF2B5EF4-FFF2-40B4-BE49-F238E27FC236}">
+                <a16:creationId xmlns:a16="http://schemas.microsoft.com/office/drawing/2014/main" id="{32393900-152D-6838-BF67-B94655119F72}"/>
+              </a:ext>
+            </a:extLst>
+          </p:cNvPr>
+          <p:cNvSpPr>
+            <a:spLocks noGrp="1"/>
+          </p:cNvSpPr>
+          <p:nvPr>
+            <p:ph type="title"/>
+          </p:nvPr>
+        </p:nvSpPr>
+        <p:spPr>
+          <a:xfrm>
+            <a:off x="0" y="-1"/>
+            <a:ext cx="12192000" cy="1325563"/>
+          </a:xfrm>
+        </p:spPr>
+        <p:txBody>
+          <a:bodyPr/>
+          <a:lstStyle/>
+          <a:p>
+            <a:pPr algn="ctr"/>
+            <a:r>
+              <a:rPr lang="pt-BR" dirty="0">
+                <a:solidFill>
+                  <a:schemeClr val="bg1"/>
+                </a:solidFill>
+              </a:rPr>
+              <a:t>Filtros de média</a:t>
+            </a:r>
+          </a:p>
+        </p:txBody>
+      </p:sp>
+      <p:sp>
+        <p:nvSpPr>
+          <p:cNvPr id="12" name="AutoShape 6" descr="Lógica Proposicional x Lógica de Argumento ⋆ Colaborae">
+            <a:extLst>
+              <a:ext uri="{FF2B5EF4-FFF2-40B4-BE49-F238E27FC236}">
+                <a16:creationId xmlns:a16="http://schemas.microsoft.com/office/drawing/2014/main" id="{0BA914C1-B688-BE9E-00F0-52D1217A2676}"/>
+              </a:ext>
+            </a:extLst>
+          </p:cNvPr>
+          <p:cNvSpPr>
+            <a:spLocks noChangeAspect="1" noChangeArrowheads="1"/>
+          </p:cNvSpPr>
+          <p:nvPr/>
+        </p:nvSpPr>
+        <p:spPr bwMode="auto">
+          <a:xfrm>
+            <a:off x="5943600" y="-1707776"/>
+            <a:ext cx="5289176" cy="5289176"/>
+          </a:xfrm>
+          <a:prstGeom prst="rect">
+            <a:avLst/>
+          </a:prstGeom>
+          <a:noFill/>
+          <a:extLst>
+            <a:ext uri="{909E8E84-426E-40DD-AFC4-6F175D3DCCD1}">
+              <a14:hiddenFill xmlns:a14="http://schemas.microsoft.com/office/drawing/2010/main">
+                <a:solidFill>
+                  <a:srgbClr val="FFFFFF"/>
+                </a:solidFill>
+              </a14:hiddenFill>
+            </a:ext>
+          </a:extLst>
+        </p:spPr>
+        <p:txBody>
+          <a:bodyPr vert="horz" wrap="square" lIns="91440" tIns="45720" rIns="91440" bIns="45720" numCol="1" anchor="t" anchorCtr="0" compatLnSpc="1">
+            <a:prstTxWarp prst="textNoShape">
+              <a:avLst/>
+            </a:prstTxWarp>
+          </a:bodyPr>
+          <a:lstStyle/>
+          <a:p>
+            <a:endParaRPr lang="pt-BR"/>
+          </a:p>
+        </p:txBody>
+      </p:sp>
+      <p:sp>
+        <p:nvSpPr>
+          <p:cNvPr id="6" name="Espaço Reservado para Conteúdo 5">
+            <a:extLst>
+              <a:ext uri="{FF2B5EF4-FFF2-40B4-BE49-F238E27FC236}">
+                <a16:creationId xmlns:a16="http://schemas.microsoft.com/office/drawing/2014/main" id="{86A12AE6-3E05-02C4-8602-5D138C385456}"/>
+              </a:ext>
+            </a:extLst>
+          </p:cNvPr>
+          <p:cNvSpPr>
+            <a:spLocks noGrp="1"/>
+          </p:cNvSpPr>
+          <p:nvPr>
+            <p:ph idx="1"/>
+          </p:nvPr>
+        </p:nvSpPr>
+        <p:spPr>
+          <a:xfrm>
+            <a:off x="2626139" y="1839685"/>
+            <a:ext cx="6939722" cy="1089705"/>
+          </a:xfrm>
+        </p:spPr>
+        <p:txBody>
+          <a:bodyPr>
+            <a:normAutofit/>
+          </a:bodyPr>
+          <a:lstStyle/>
+          <a:p>
+            <a:pPr algn="just"/>
+            <a:r>
+              <a:rPr lang="pt-BR" sz="2200" dirty="0"/>
+              <a:t>Exemplo de aplicação do filtro de média.</a:t>
+            </a:r>
+          </a:p>
+          <a:p>
+            <a:pPr algn="just"/>
+            <a:r>
+              <a:rPr lang="pt-BR" sz="2200" dirty="0"/>
+              <a:t>Kernel 5x5</a:t>
+            </a:r>
+          </a:p>
+        </p:txBody>
+      </p:sp>
+      <p:pic>
+        <p:nvPicPr>
+          <p:cNvPr id="4" name="Picture 10">
+            <a:extLst>
+              <a:ext uri="{FF2B5EF4-FFF2-40B4-BE49-F238E27FC236}">
+                <a16:creationId xmlns:a16="http://schemas.microsoft.com/office/drawing/2014/main" id="{43CA4A30-6696-66FB-FDB9-FA85CF71E067}"/>
+              </a:ext>
+            </a:extLst>
+          </p:cNvPr>
+          <p:cNvPicPr>
+            <a:picLocks noChangeAspect="1" noChangeArrowheads="1"/>
+          </p:cNvPicPr>
+          <p:nvPr/>
+        </p:nvPicPr>
+        <p:blipFill>
+          <a:blip r:embed="rId3">
+            <a:extLst>
+              <a:ext uri="{28A0092B-C50C-407E-A947-70E740481C1C}">
+                <a14:useLocalDpi xmlns:a14="http://schemas.microsoft.com/office/drawing/2010/main" val="0"/>
+              </a:ext>
+            </a:extLst>
+          </a:blip>
+          <a:srcRect/>
+          <a:stretch>
+            <a:fillRect/>
+          </a:stretch>
+        </p:blipFill>
+        <p:spPr bwMode="auto">
+          <a:xfrm>
+            <a:off x="2576099" y="2929390"/>
+            <a:ext cx="3171825" cy="3184525"/>
+          </a:xfrm>
+          <a:prstGeom prst="rect">
+            <a:avLst/>
+          </a:prstGeom>
+          <a:noFill/>
+          <a:ln>
+            <a:noFill/>
+          </a:ln>
+          <a:extLst>
+            <a:ext uri="{909E8E84-426E-40DD-AFC4-6F175D3DCCD1}">
+              <a14:hiddenFill xmlns:a14="http://schemas.microsoft.com/office/drawing/2010/main">
+                <a:solidFill>
+                  <a:srgbClr val="FFFFFF"/>
+                </a:solidFill>
+              </a14:hiddenFill>
+            </a:ext>
+            <a:ext uri="{91240B29-F687-4F45-9708-019B960494DF}">
+              <a14:hiddenLine xmlns:a14="http://schemas.microsoft.com/office/drawing/2010/main" w="9525">
+                <a:solidFill>
+                  <a:srgbClr val="000000"/>
+                </a:solidFill>
+                <a:miter lim="800000"/>
+                <a:headEnd/>
+                <a:tailEnd/>
+              </a14:hiddenLine>
+            </a:ext>
+          </a:extLst>
+        </p:spPr>
+      </p:pic>
+      <p:pic>
+        <p:nvPicPr>
+          <p:cNvPr id="7" name="Picture 11">
+            <a:extLst>
+              <a:ext uri="{FF2B5EF4-FFF2-40B4-BE49-F238E27FC236}">
+                <a16:creationId xmlns:a16="http://schemas.microsoft.com/office/drawing/2014/main" id="{CCB1D7E1-6CAB-4F7B-4619-ECF946817953}"/>
+              </a:ext>
+            </a:extLst>
+          </p:cNvPr>
+          <p:cNvPicPr>
+            <a:picLocks noChangeAspect="1" noChangeArrowheads="1"/>
+          </p:cNvPicPr>
+          <p:nvPr/>
+        </p:nvPicPr>
+        <p:blipFill>
+          <a:blip r:embed="rId4">
+            <a:extLst>
+              <a:ext uri="{28A0092B-C50C-407E-A947-70E740481C1C}">
+                <a14:useLocalDpi xmlns:a14="http://schemas.microsoft.com/office/drawing/2010/main" val="0"/>
+              </a:ext>
+            </a:extLst>
+          </a:blip>
+          <a:srcRect/>
+          <a:stretch>
+            <a:fillRect/>
+          </a:stretch>
+        </p:blipFill>
+        <p:spPr bwMode="auto">
+          <a:xfrm>
+            <a:off x="6433724" y="2929390"/>
+            <a:ext cx="3132137" cy="3144838"/>
+          </a:xfrm>
+          <a:prstGeom prst="rect">
+            <a:avLst/>
+          </a:prstGeom>
+          <a:noFill/>
+          <a:ln>
+            <a:noFill/>
+          </a:ln>
+          <a:extLst>
+            <a:ext uri="{909E8E84-426E-40DD-AFC4-6F175D3DCCD1}">
+              <a14:hiddenFill xmlns:a14="http://schemas.microsoft.com/office/drawing/2010/main">
+                <a:solidFill>
+                  <a:srgbClr val="FFFFFF"/>
+                </a:solidFill>
+              </a14:hiddenFill>
+            </a:ext>
+            <a:ext uri="{91240B29-F687-4F45-9708-019B960494DF}">
+              <a14:hiddenLine xmlns:a14="http://schemas.microsoft.com/office/drawing/2010/main" w="9525">
+                <a:solidFill>
+                  <a:srgbClr val="000000"/>
+                </a:solidFill>
+                <a:miter lim="800000"/>
+                <a:headEnd/>
+                <a:tailEnd/>
+              </a14:hiddenLine>
+            </a:ext>
+          </a:extLst>
+        </p:spPr>
+      </p:pic>
+    </p:spTree>
+    <p:extLst>
+      <p:ext uri="{BB962C8B-B14F-4D97-AF65-F5344CB8AC3E}">
+        <p14:creationId xmlns:p14="http://schemas.microsoft.com/office/powerpoint/2010/main" val="781745425"/>
+      </p:ext>
+    </p:extLst>
+  </p:cSld>
+  <p:clrMapOvr>
+    <a:masterClrMapping/>
+  </p:clrMapOvr>
+</p:sld>
+</file>
+
+<file path=ppt/slides/slide14.xml><?xml version="1.0" encoding="utf-8"?>
+<p:sld xmlns:a="http://schemas.openxmlformats.org/drawingml/2006/main" xmlns:r="http://schemas.openxmlformats.org/officeDocument/2006/relationships" xmlns:p="http://schemas.openxmlformats.org/presentationml/2006/main">
+  <p:cSld>
+    <p:spTree>
+      <p:nvGrpSpPr>
+        <p:cNvPr id="1" name="">
+          <a:extLst>
+            <a:ext uri="{FF2B5EF4-FFF2-40B4-BE49-F238E27FC236}">
+              <a16:creationId xmlns:a16="http://schemas.microsoft.com/office/drawing/2014/main" id="{1E28E59E-4AB8-A27E-525F-249771163F5B}"/>
+            </a:ext>
+          </a:extLst>
+        </p:cNvPr>
+        <p:cNvGrpSpPr/>
+        <p:nvPr/>
+      </p:nvGrpSpPr>
+      <p:grpSpPr>
+        <a:xfrm>
+          <a:off x="0" y="0"/>
+          <a:ext cx="0" cy="0"/>
+          <a:chOff x="0" y="0"/>
+          <a:chExt cx="0" cy="0"/>
+        </a:xfrm>
+      </p:grpSpPr>
+      <p:sp>
+        <p:nvSpPr>
+          <p:cNvPr id="5" name="Retângulo 4">
+            <a:extLst>
+              <a:ext uri="{FF2B5EF4-FFF2-40B4-BE49-F238E27FC236}">
+                <a16:creationId xmlns:a16="http://schemas.microsoft.com/office/drawing/2014/main" id="{AD28307E-D57C-A5D2-2AA5-71D56D73BD94}"/>
+              </a:ext>
+            </a:extLst>
+          </p:cNvPr>
+          <p:cNvSpPr/>
+          <p:nvPr/>
+        </p:nvSpPr>
+        <p:spPr>
+          <a:xfrm>
+            <a:off x="0" y="-2"/>
+            <a:ext cx="12192000" cy="1325563"/>
+          </a:xfrm>
+          <a:prstGeom prst="rect">
+            <a:avLst/>
+          </a:prstGeom>
+          <a:solidFill>
+            <a:schemeClr val="accent2"/>
+          </a:solidFill>
+          <a:ln>
+            <a:solidFill>
+              <a:srgbClr val="418AB3"/>
+            </a:solidFill>
+          </a:ln>
+        </p:spPr>
+        <p:style>
+          <a:lnRef idx="2">
+            <a:schemeClr val="accent1">
+              <a:shade val="15000"/>
+            </a:schemeClr>
+          </a:lnRef>
+          <a:fillRef idx="1">
+            <a:schemeClr val="accent1"/>
+          </a:fillRef>
+          <a:effectRef idx="0">
+            <a:schemeClr val="accent1"/>
+          </a:effectRef>
+          <a:fontRef idx="minor">
+            <a:schemeClr val="lt1"/>
+          </a:fontRef>
+        </p:style>
+        <p:txBody>
+          <a:bodyPr rtlCol="0" anchor="ctr"/>
+          <a:lstStyle/>
+          <a:p>
+            <a:pPr algn="ctr"/>
+            <a:endParaRPr lang="pt-BR" dirty="0"/>
+          </a:p>
+        </p:txBody>
+      </p:sp>
+      <p:sp>
+        <p:nvSpPr>
+          <p:cNvPr id="2" name="Título 1">
+            <a:extLst>
+              <a:ext uri="{FF2B5EF4-FFF2-40B4-BE49-F238E27FC236}">
+                <a16:creationId xmlns:a16="http://schemas.microsoft.com/office/drawing/2014/main" id="{ECFB7573-FF34-FF9C-54B8-7A0783112C80}"/>
+              </a:ext>
+            </a:extLst>
+          </p:cNvPr>
+          <p:cNvSpPr>
+            <a:spLocks noGrp="1"/>
+          </p:cNvSpPr>
+          <p:nvPr>
+            <p:ph type="title"/>
+          </p:nvPr>
+        </p:nvSpPr>
+        <p:spPr>
+          <a:xfrm>
+            <a:off x="0" y="-1"/>
+            <a:ext cx="12192000" cy="1325563"/>
+          </a:xfrm>
+        </p:spPr>
+        <p:txBody>
+          <a:bodyPr/>
+          <a:lstStyle/>
+          <a:p>
+            <a:pPr algn="ctr"/>
+            <a:r>
+              <a:rPr lang="pt-BR" dirty="0">
+                <a:solidFill>
+                  <a:schemeClr val="bg1"/>
+                </a:solidFill>
+              </a:rPr>
+              <a:t>Filtros de média</a:t>
+            </a:r>
+          </a:p>
+        </p:txBody>
+      </p:sp>
+      <p:sp>
+        <p:nvSpPr>
+          <p:cNvPr id="12" name="AutoShape 6" descr="Lógica Proposicional x Lógica de Argumento ⋆ Colaborae">
+            <a:extLst>
+              <a:ext uri="{FF2B5EF4-FFF2-40B4-BE49-F238E27FC236}">
+                <a16:creationId xmlns:a16="http://schemas.microsoft.com/office/drawing/2014/main" id="{8B75BE3B-A909-F7C6-99E5-7D288417FD33}"/>
+              </a:ext>
+            </a:extLst>
+          </p:cNvPr>
+          <p:cNvSpPr>
+            <a:spLocks noChangeAspect="1" noChangeArrowheads="1"/>
+          </p:cNvSpPr>
+          <p:nvPr/>
+        </p:nvSpPr>
+        <p:spPr bwMode="auto">
+          <a:xfrm>
+            <a:off x="5943600" y="-1707776"/>
+            <a:ext cx="5289176" cy="5289176"/>
+          </a:xfrm>
+          <a:prstGeom prst="rect">
+            <a:avLst/>
+          </a:prstGeom>
+          <a:noFill/>
+          <a:extLst>
+            <a:ext uri="{909E8E84-426E-40DD-AFC4-6F175D3DCCD1}">
+              <a14:hiddenFill xmlns:a14="http://schemas.microsoft.com/office/drawing/2010/main">
+                <a:solidFill>
+                  <a:srgbClr val="FFFFFF"/>
+                </a:solidFill>
+              </a14:hiddenFill>
+            </a:ext>
+          </a:extLst>
+        </p:spPr>
+        <p:txBody>
+          <a:bodyPr vert="horz" wrap="square" lIns="91440" tIns="45720" rIns="91440" bIns="45720" numCol="1" anchor="t" anchorCtr="0" compatLnSpc="1">
+            <a:prstTxWarp prst="textNoShape">
+              <a:avLst/>
+            </a:prstTxWarp>
+          </a:bodyPr>
+          <a:lstStyle/>
+          <a:p>
+            <a:endParaRPr lang="pt-BR"/>
+          </a:p>
+        </p:txBody>
+      </p:sp>
+      <p:sp>
+        <p:nvSpPr>
+          <p:cNvPr id="6" name="Espaço Reservado para Conteúdo 5">
+            <a:extLst>
+              <a:ext uri="{FF2B5EF4-FFF2-40B4-BE49-F238E27FC236}">
+                <a16:creationId xmlns:a16="http://schemas.microsoft.com/office/drawing/2014/main" id="{DDB536B7-D5C6-94CB-18B4-211CB1ACE78F}"/>
+              </a:ext>
+            </a:extLst>
+          </p:cNvPr>
+          <p:cNvSpPr>
+            <a:spLocks noGrp="1"/>
+          </p:cNvSpPr>
+          <p:nvPr>
+            <p:ph idx="1"/>
+          </p:nvPr>
+        </p:nvSpPr>
+        <p:spPr>
+          <a:xfrm>
+            <a:off x="2775264" y="1641817"/>
+            <a:ext cx="6641472" cy="2113754"/>
+          </a:xfrm>
+        </p:spPr>
+        <p:txBody>
+          <a:bodyPr>
+            <a:normAutofit/>
+          </a:bodyPr>
+          <a:lstStyle/>
+          <a:p>
+            <a:pPr algn="just"/>
+            <a:r>
+              <a:rPr lang="pt-BR" sz="2200" dirty="0"/>
+              <a:t>Os valores do filtro podem assumir valores distintos para o caso de uma média ponderada.</a:t>
+            </a:r>
+          </a:p>
+          <a:p>
+            <a:pPr algn="just"/>
+            <a:endParaRPr lang="pt-BR" sz="2200" dirty="0"/>
+          </a:p>
+          <a:p>
+            <a:pPr algn="just"/>
+            <a:r>
+              <a:rPr lang="pt-BR" sz="2200" dirty="0"/>
+              <a:t>Deste modo, é possível definir o grau de contribuição dos pixels vizinhos.</a:t>
+            </a:r>
+          </a:p>
+        </p:txBody>
+      </p:sp>
+      <p:pic>
+        <p:nvPicPr>
+          <p:cNvPr id="10" name="Imagem 9">
+            <a:extLst>
+              <a:ext uri="{FF2B5EF4-FFF2-40B4-BE49-F238E27FC236}">
+                <a16:creationId xmlns:a16="http://schemas.microsoft.com/office/drawing/2014/main" id="{7D0E5F83-0549-6ED0-E26D-EE1C153F8051}"/>
+              </a:ext>
+            </a:extLst>
+          </p:cNvPr>
+          <p:cNvPicPr>
+            <a:picLocks noChangeAspect="1"/>
+          </p:cNvPicPr>
+          <p:nvPr/>
+        </p:nvPicPr>
+        <p:blipFill>
+          <a:blip r:embed="rId3"/>
+          <a:stretch>
+            <a:fillRect/>
+          </a:stretch>
+        </p:blipFill>
+        <p:spPr>
+          <a:xfrm>
+            <a:off x="865077" y="4071826"/>
+            <a:ext cx="10157045" cy="2026668"/>
+          </a:xfrm>
+          <a:prstGeom prst="rect">
+            <a:avLst/>
+          </a:prstGeom>
+        </p:spPr>
+      </p:pic>
+    </p:spTree>
+    <p:extLst>
+      <p:ext uri="{BB962C8B-B14F-4D97-AF65-F5344CB8AC3E}">
+        <p14:creationId xmlns:p14="http://schemas.microsoft.com/office/powerpoint/2010/main" val="1672106882"/>
+      </p:ext>
+    </p:extLst>
+  </p:cSld>
+  <p:clrMapOvr>
+    <a:masterClrMapping/>
+  </p:clrMapOvr>
+</p:sld>
+</file>
+
+<file path=ppt/slides/slide15.xml><?xml version="1.0" encoding="utf-8"?>
+<p:sld xmlns:a="http://schemas.openxmlformats.org/drawingml/2006/main" xmlns:r="http://schemas.openxmlformats.org/officeDocument/2006/relationships" xmlns:p="http://schemas.openxmlformats.org/presentationml/2006/main">
+  <p:cSld>
+    <p:spTree>
+      <p:nvGrpSpPr>
+        <p:cNvPr id="1" name="">
+          <a:extLst>
+            <a:ext uri="{FF2B5EF4-FFF2-40B4-BE49-F238E27FC236}">
+              <a16:creationId xmlns:a16="http://schemas.microsoft.com/office/drawing/2014/main" id="{0B5B9D5F-9CF3-41C2-0A75-D829817A0A95}"/>
+            </a:ext>
+          </a:extLst>
+        </p:cNvPr>
+        <p:cNvGrpSpPr/>
+        <p:nvPr/>
+      </p:nvGrpSpPr>
+      <p:grpSpPr>
+        <a:xfrm>
+          <a:off x="0" y="0"/>
+          <a:ext cx="0" cy="0"/>
+          <a:chOff x="0" y="0"/>
+          <a:chExt cx="0" cy="0"/>
+        </a:xfrm>
+      </p:grpSpPr>
+      <p:sp>
+        <p:nvSpPr>
+          <p:cNvPr id="5" name="Retângulo 4">
+            <a:extLst>
+              <a:ext uri="{FF2B5EF4-FFF2-40B4-BE49-F238E27FC236}">
+                <a16:creationId xmlns:a16="http://schemas.microsoft.com/office/drawing/2014/main" id="{C6C920C2-5B3C-4E87-7414-DF371BABC15B}"/>
+              </a:ext>
+            </a:extLst>
+          </p:cNvPr>
+          <p:cNvSpPr/>
+          <p:nvPr/>
+        </p:nvSpPr>
+        <p:spPr>
+          <a:xfrm>
+            <a:off x="0" y="-2"/>
+            <a:ext cx="12192000" cy="1325563"/>
+          </a:xfrm>
+          <a:prstGeom prst="rect">
+            <a:avLst/>
+          </a:prstGeom>
+          <a:solidFill>
+            <a:schemeClr val="accent2"/>
+          </a:solidFill>
+          <a:ln>
+            <a:solidFill>
+              <a:srgbClr val="418AB3"/>
+            </a:solidFill>
+          </a:ln>
+        </p:spPr>
+        <p:style>
+          <a:lnRef idx="2">
+            <a:schemeClr val="accent1">
+              <a:shade val="15000"/>
+            </a:schemeClr>
+          </a:lnRef>
+          <a:fillRef idx="1">
+            <a:schemeClr val="accent1"/>
+          </a:fillRef>
+          <a:effectRef idx="0">
+            <a:schemeClr val="accent1"/>
+          </a:effectRef>
+          <a:fontRef idx="minor">
+            <a:schemeClr val="lt1"/>
+          </a:fontRef>
+        </p:style>
+        <p:txBody>
+          <a:bodyPr rtlCol="0" anchor="ctr"/>
+          <a:lstStyle/>
+          <a:p>
+            <a:pPr algn="ctr"/>
+            <a:endParaRPr lang="pt-BR" dirty="0"/>
+          </a:p>
+        </p:txBody>
+      </p:sp>
+      <p:sp>
+        <p:nvSpPr>
+          <p:cNvPr id="2" name="Título 1">
+            <a:extLst>
+              <a:ext uri="{FF2B5EF4-FFF2-40B4-BE49-F238E27FC236}">
+                <a16:creationId xmlns:a16="http://schemas.microsoft.com/office/drawing/2014/main" id="{DD7E2395-7AB0-1876-2081-27435DCA0B5B}"/>
+              </a:ext>
+            </a:extLst>
+          </p:cNvPr>
+          <p:cNvSpPr>
+            <a:spLocks noGrp="1"/>
+          </p:cNvSpPr>
+          <p:nvPr>
+            <p:ph type="title"/>
+          </p:nvPr>
+        </p:nvSpPr>
+        <p:spPr>
+          <a:xfrm>
+            <a:off x="0" y="-1"/>
+            <a:ext cx="12192000" cy="1325563"/>
+          </a:xfrm>
+        </p:spPr>
+        <p:txBody>
+          <a:bodyPr/>
+          <a:lstStyle/>
+          <a:p>
+            <a:pPr algn="ctr"/>
+            <a:r>
+              <a:rPr lang="pt-BR" dirty="0">
+                <a:solidFill>
+                  <a:schemeClr val="bg1"/>
+                </a:solidFill>
+              </a:rPr>
+              <a:t>Filtro de mediana</a:t>
+            </a:r>
+          </a:p>
+        </p:txBody>
+      </p:sp>
+      <p:sp>
+        <p:nvSpPr>
+          <p:cNvPr id="12" name="AutoShape 6" descr="Lógica Proposicional x Lógica de Argumento ⋆ Colaborae">
+            <a:extLst>
+              <a:ext uri="{FF2B5EF4-FFF2-40B4-BE49-F238E27FC236}">
+                <a16:creationId xmlns:a16="http://schemas.microsoft.com/office/drawing/2014/main" id="{C165CB2C-240E-74A5-A531-05192C3AFA4C}"/>
+              </a:ext>
+            </a:extLst>
+          </p:cNvPr>
+          <p:cNvSpPr>
+            <a:spLocks noChangeAspect="1" noChangeArrowheads="1"/>
+          </p:cNvSpPr>
+          <p:nvPr/>
+        </p:nvSpPr>
+        <p:spPr bwMode="auto">
+          <a:xfrm>
+            <a:off x="5943600" y="-1707776"/>
+            <a:ext cx="5289176" cy="5289176"/>
+          </a:xfrm>
+          <a:prstGeom prst="rect">
+            <a:avLst/>
+          </a:prstGeom>
+          <a:noFill/>
+          <a:extLst>
+            <a:ext uri="{909E8E84-426E-40DD-AFC4-6F175D3DCCD1}">
+              <a14:hiddenFill xmlns:a14="http://schemas.microsoft.com/office/drawing/2010/main">
+                <a:solidFill>
+                  <a:srgbClr val="FFFFFF"/>
+                </a:solidFill>
+              </a14:hiddenFill>
+            </a:ext>
+          </a:extLst>
+        </p:spPr>
+        <p:txBody>
+          <a:bodyPr vert="horz" wrap="square" lIns="91440" tIns="45720" rIns="91440" bIns="45720" numCol="1" anchor="t" anchorCtr="0" compatLnSpc="1">
+            <a:prstTxWarp prst="textNoShape">
+              <a:avLst/>
+            </a:prstTxWarp>
+          </a:bodyPr>
+          <a:lstStyle/>
+          <a:p>
+            <a:endParaRPr lang="pt-BR"/>
+          </a:p>
+        </p:txBody>
+      </p:sp>
+      <p:sp>
+        <p:nvSpPr>
+          <p:cNvPr id="6" name="Espaço Reservado para Conteúdo 5">
+            <a:extLst>
+              <a:ext uri="{FF2B5EF4-FFF2-40B4-BE49-F238E27FC236}">
+                <a16:creationId xmlns:a16="http://schemas.microsoft.com/office/drawing/2014/main" id="{1AD13F31-7E3A-B9AA-A771-3EBC8BB6F6E8}"/>
+              </a:ext>
+            </a:extLst>
+          </p:cNvPr>
+          <p:cNvSpPr>
+            <a:spLocks noGrp="1"/>
+          </p:cNvSpPr>
+          <p:nvPr>
+            <p:ph idx="1"/>
+          </p:nvPr>
+        </p:nvSpPr>
+        <p:spPr>
+          <a:xfrm>
+            <a:off x="1968759" y="1762656"/>
+            <a:ext cx="8254479" cy="4061199"/>
+          </a:xfrm>
+        </p:spPr>
+        <p:txBody>
+          <a:bodyPr>
+            <a:normAutofit/>
+          </a:bodyPr>
+          <a:lstStyle/>
+          <a:p>
+            <a:pPr algn="just"/>
+            <a:r>
+              <a:rPr lang="pt-BR" sz="2200" dirty="0"/>
+              <a:t>Define o valor de pixel central de acordo com a mediana dos seus vizinhos.</a:t>
+            </a:r>
+          </a:p>
+          <a:p>
+            <a:pPr algn="just"/>
+            <a:endParaRPr lang="pt-BR" sz="2200" dirty="0"/>
+          </a:p>
+          <a:p>
+            <a:pPr algn="just"/>
+            <a:r>
+              <a:rPr lang="pt-BR" sz="2200" dirty="0"/>
+              <a:t>Diferente do filtro de média, o filtro da mediana consegue eliminar o ruído enquanto mantém as bordas e contornos relativamente nítidos</a:t>
+            </a:r>
+          </a:p>
+        </p:txBody>
+      </p:sp>
+      <p:pic>
+        <p:nvPicPr>
+          <p:cNvPr id="7" name="Imagem 6">
+            <a:extLst>
+              <a:ext uri="{FF2B5EF4-FFF2-40B4-BE49-F238E27FC236}">
+                <a16:creationId xmlns:a16="http://schemas.microsoft.com/office/drawing/2014/main" id="{3EE41594-0DA2-E582-DEC5-A81A5670A587}"/>
+              </a:ext>
+            </a:extLst>
+          </p:cNvPr>
+          <p:cNvPicPr>
+            <a:picLocks noChangeAspect="1"/>
+          </p:cNvPicPr>
+          <p:nvPr/>
+        </p:nvPicPr>
+        <p:blipFill>
+          <a:blip r:embed="rId3"/>
+          <a:stretch>
+            <a:fillRect/>
+          </a:stretch>
+        </p:blipFill>
+        <p:spPr>
+          <a:xfrm>
+            <a:off x="2661939" y="4170895"/>
+            <a:ext cx="6868117" cy="2198235"/>
+          </a:xfrm>
+          <a:prstGeom prst="rect">
+            <a:avLst/>
+          </a:prstGeom>
+        </p:spPr>
+      </p:pic>
+    </p:spTree>
+    <p:extLst>
+      <p:ext uri="{BB962C8B-B14F-4D97-AF65-F5344CB8AC3E}">
+        <p14:creationId xmlns:p14="http://schemas.microsoft.com/office/powerpoint/2010/main" val="2333184307"/>
+      </p:ext>
+    </p:extLst>
+  </p:cSld>
+  <p:clrMapOvr>
+    <a:masterClrMapping/>
+  </p:clrMapOvr>
+</p:sld>
+</file>
+
+<file path=ppt/slides/slide16.xml><?xml version="1.0" encoding="utf-8"?>
+<p:sld xmlns:a="http://schemas.openxmlformats.org/drawingml/2006/main" xmlns:r="http://schemas.openxmlformats.org/officeDocument/2006/relationships" xmlns:p="http://schemas.openxmlformats.org/presentationml/2006/main">
+  <p:cSld>
+    <p:spTree>
+      <p:nvGrpSpPr>
+        <p:cNvPr id="1" name="">
+          <a:extLst>
+            <a:ext uri="{FF2B5EF4-FFF2-40B4-BE49-F238E27FC236}">
+              <a16:creationId xmlns:a16="http://schemas.microsoft.com/office/drawing/2014/main" id="{9A6FEC45-2A50-CF83-5010-15C21F865887}"/>
+            </a:ext>
+          </a:extLst>
+        </p:cNvPr>
+        <p:cNvGrpSpPr/>
+        <p:nvPr/>
+      </p:nvGrpSpPr>
+      <p:grpSpPr>
+        <a:xfrm>
+          <a:off x="0" y="0"/>
+          <a:ext cx="0" cy="0"/>
+          <a:chOff x="0" y="0"/>
+          <a:chExt cx="0" cy="0"/>
+        </a:xfrm>
+      </p:grpSpPr>
+      <p:sp>
+        <p:nvSpPr>
+          <p:cNvPr id="5" name="Retângulo 4">
+            <a:extLst>
+              <a:ext uri="{FF2B5EF4-FFF2-40B4-BE49-F238E27FC236}">
+                <a16:creationId xmlns:a16="http://schemas.microsoft.com/office/drawing/2014/main" id="{AA5011A5-9856-9803-76CA-EF92D9D3E9FC}"/>
+              </a:ext>
+            </a:extLst>
+          </p:cNvPr>
+          <p:cNvSpPr/>
+          <p:nvPr/>
+        </p:nvSpPr>
+        <p:spPr>
+          <a:xfrm>
+            <a:off x="0" y="-2"/>
+            <a:ext cx="12192000" cy="1325563"/>
+          </a:xfrm>
+          <a:prstGeom prst="rect">
+            <a:avLst/>
+          </a:prstGeom>
+          <a:solidFill>
+            <a:schemeClr val="accent2"/>
+          </a:solidFill>
+          <a:ln>
+            <a:solidFill>
+              <a:srgbClr val="418AB3"/>
+            </a:solidFill>
+          </a:ln>
+        </p:spPr>
+        <p:style>
+          <a:lnRef idx="2">
+            <a:schemeClr val="accent1">
+              <a:shade val="15000"/>
+            </a:schemeClr>
+          </a:lnRef>
+          <a:fillRef idx="1">
+            <a:schemeClr val="accent1"/>
+          </a:fillRef>
+          <a:effectRef idx="0">
+            <a:schemeClr val="accent1"/>
+          </a:effectRef>
+          <a:fontRef idx="minor">
+            <a:schemeClr val="lt1"/>
+          </a:fontRef>
+        </p:style>
+        <p:txBody>
+          <a:bodyPr rtlCol="0" anchor="ctr"/>
+          <a:lstStyle/>
+          <a:p>
+            <a:pPr algn="ctr"/>
+            <a:endParaRPr lang="pt-BR" dirty="0"/>
+          </a:p>
+        </p:txBody>
+      </p:sp>
+      <p:sp>
+        <p:nvSpPr>
+          <p:cNvPr id="2" name="Título 1">
+            <a:extLst>
+              <a:ext uri="{FF2B5EF4-FFF2-40B4-BE49-F238E27FC236}">
+                <a16:creationId xmlns:a16="http://schemas.microsoft.com/office/drawing/2014/main" id="{AF3AB404-02D7-213D-0911-94EFC6FA0046}"/>
+              </a:ext>
+            </a:extLst>
+          </p:cNvPr>
+          <p:cNvSpPr>
+            <a:spLocks noGrp="1"/>
+          </p:cNvSpPr>
+          <p:nvPr>
+            <p:ph type="title"/>
+          </p:nvPr>
+        </p:nvSpPr>
+        <p:spPr>
+          <a:xfrm>
+            <a:off x="0" y="-1"/>
+            <a:ext cx="12192000" cy="1325563"/>
+          </a:xfrm>
+        </p:spPr>
+        <p:txBody>
+          <a:bodyPr/>
+          <a:lstStyle/>
+          <a:p>
+            <a:pPr algn="ctr"/>
+            <a:r>
+              <a:rPr lang="pt-BR" dirty="0">
+                <a:solidFill>
+                  <a:schemeClr val="bg1"/>
+                </a:solidFill>
+              </a:rPr>
+              <a:t>Filtros de mediana</a:t>
+            </a:r>
+          </a:p>
+        </p:txBody>
+      </p:sp>
+      <p:sp>
+        <p:nvSpPr>
+          <p:cNvPr id="12" name="AutoShape 6" descr="Lógica Proposicional x Lógica de Argumento ⋆ Colaborae">
+            <a:extLst>
+              <a:ext uri="{FF2B5EF4-FFF2-40B4-BE49-F238E27FC236}">
+                <a16:creationId xmlns:a16="http://schemas.microsoft.com/office/drawing/2014/main" id="{828F4059-4B8B-E8BE-9D1C-DA258CE42A2F}"/>
+              </a:ext>
+            </a:extLst>
+          </p:cNvPr>
+          <p:cNvSpPr>
+            <a:spLocks noChangeAspect="1" noChangeArrowheads="1"/>
+          </p:cNvSpPr>
+          <p:nvPr/>
+        </p:nvSpPr>
+        <p:spPr bwMode="auto">
+          <a:xfrm>
+            <a:off x="5943600" y="-1707776"/>
+            <a:ext cx="5289176" cy="5289176"/>
+          </a:xfrm>
+          <a:prstGeom prst="rect">
+            <a:avLst/>
+          </a:prstGeom>
+          <a:noFill/>
+          <a:extLst>
+            <a:ext uri="{909E8E84-426E-40DD-AFC4-6F175D3DCCD1}">
+              <a14:hiddenFill xmlns:a14="http://schemas.microsoft.com/office/drawing/2010/main">
+                <a:solidFill>
+                  <a:srgbClr val="FFFFFF"/>
+                </a:solidFill>
+              </a14:hiddenFill>
+            </a:ext>
+          </a:extLst>
+        </p:spPr>
+        <p:txBody>
+          <a:bodyPr vert="horz" wrap="square" lIns="91440" tIns="45720" rIns="91440" bIns="45720" numCol="1" anchor="t" anchorCtr="0" compatLnSpc="1">
+            <a:prstTxWarp prst="textNoShape">
+              <a:avLst/>
+            </a:prstTxWarp>
+          </a:bodyPr>
+          <a:lstStyle/>
+          <a:p>
+            <a:endParaRPr lang="pt-BR"/>
+          </a:p>
+        </p:txBody>
+      </p:sp>
+      <p:sp>
+        <p:nvSpPr>
+          <p:cNvPr id="6" name="Espaço Reservado para Conteúdo 5">
+            <a:extLst>
+              <a:ext uri="{FF2B5EF4-FFF2-40B4-BE49-F238E27FC236}">
+                <a16:creationId xmlns:a16="http://schemas.microsoft.com/office/drawing/2014/main" id="{788B7BCF-4396-B7CC-5E71-820EA2B55BE6}"/>
+              </a:ext>
+            </a:extLst>
+          </p:cNvPr>
+          <p:cNvSpPr>
+            <a:spLocks noGrp="1"/>
+          </p:cNvSpPr>
+          <p:nvPr>
+            <p:ph idx="1"/>
+          </p:nvPr>
+        </p:nvSpPr>
+        <p:spPr>
+          <a:xfrm>
+            <a:off x="2626139" y="1839685"/>
+            <a:ext cx="6939722" cy="1089705"/>
+          </a:xfrm>
+        </p:spPr>
+        <p:txBody>
+          <a:bodyPr>
+            <a:normAutofit/>
+          </a:bodyPr>
+          <a:lstStyle/>
+          <a:p>
+            <a:pPr algn="just"/>
+            <a:r>
+              <a:rPr lang="pt-BR" sz="2200" dirty="0"/>
+              <a:t>Exemplo de aplicação do filtro de mediana.</a:t>
+            </a:r>
+          </a:p>
+          <a:p>
+            <a:pPr algn="just"/>
+            <a:r>
+              <a:rPr lang="pt-BR" sz="2200" dirty="0"/>
+              <a:t>Comumente usado para eliminar ruído “Sal e Pimenta”</a:t>
+            </a:r>
+          </a:p>
+        </p:txBody>
+      </p:sp>
+      <p:pic>
+        <p:nvPicPr>
+          <p:cNvPr id="9" name="Imagem 8">
+            <a:extLst>
+              <a:ext uri="{FF2B5EF4-FFF2-40B4-BE49-F238E27FC236}">
+                <a16:creationId xmlns:a16="http://schemas.microsoft.com/office/drawing/2014/main" id="{6433D8B0-CFB6-BEB2-5950-6A639C03ACC6}"/>
+              </a:ext>
+            </a:extLst>
+          </p:cNvPr>
+          <p:cNvPicPr>
+            <a:picLocks noChangeAspect="1"/>
+          </p:cNvPicPr>
+          <p:nvPr/>
+        </p:nvPicPr>
+        <p:blipFill>
+          <a:blip r:embed="rId3"/>
+          <a:stretch>
+            <a:fillRect/>
+          </a:stretch>
+        </p:blipFill>
+        <p:spPr>
+          <a:xfrm>
+            <a:off x="2381250" y="3173186"/>
+            <a:ext cx="7429500" cy="3619500"/>
+          </a:xfrm>
+          <a:prstGeom prst="rect">
+            <a:avLst/>
+          </a:prstGeom>
+        </p:spPr>
+      </p:pic>
+    </p:spTree>
+    <p:extLst>
+      <p:ext uri="{BB962C8B-B14F-4D97-AF65-F5344CB8AC3E}">
+        <p14:creationId xmlns:p14="http://schemas.microsoft.com/office/powerpoint/2010/main" val="3199585603"/>
+      </p:ext>
+    </p:extLst>
+  </p:cSld>
+  <p:clrMapOvr>
+    <a:masterClrMapping/>
+  </p:clrMapOvr>
+</p:sld>
+</file>
+
+<file path=ppt/slides/slide17.xml><?xml version="1.0" encoding="utf-8"?>
+<p:sld xmlns:a="http://schemas.openxmlformats.org/drawingml/2006/main" xmlns:r="http://schemas.openxmlformats.org/officeDocument/2006/relationships" xmlns:p="http://schemas.openxmlformats.org/presentationml/2006/main">
+  <p:cSld>
+    <p:spTree>
+      <p:nvGrpSpPr>
+        <p:cNvPr id="1" name="">
+          <a:extLst>
+            <a:ext uri="{FF2B5EF4-FFF2-40B4-BE49-F238E27FC236}">
+              <a16:creationId xmlns:a16="http://schemas.microsoft.com/office/drawing/2014/main" id="{34849A93-959F-44A4-FDB5-DBA13327D3F7}"/>
+            </a:ext>
+          </a:extLst>
+        </p:cNvPr>
+        <p:cNvGrpSpPr/>
+        <p:nvPr/>
+      </p:nvGrpSpPr>
+      <p:grpSpPr>
+        <a:xfrm>
+          <a:off x="0" y="0"/>
+          <a:ext cx="0" cy="0"/>
+          <a:chOff x="0" y="0"/>
+          <a:chExt cx="0" cy="0"/>
+        </a:xfrm>
+      </p:grpSpPr>
+      <p:sp>
+        <p:nvSpPr>
+          <p:cNvPr id="5" name="Retângulo 4">
+            <a:extLst>
+              <a:ext uri="{FF2B5EF4-FFF2-40B4-BE49-F238E27FC236}">
+                <a16:creationId xmlns:a16="http://schemas.microsoft.com/office/drawing/2014/main" id="{E19915EC-B8F1-6AF5-1622-FCD5DD6C74C6}"/>
+              </a:ext>
+            </a:extLst>
+          </p:cNvPr>
+          <p:cNvSpPr/>
+          <p:nvPr/>
+        </p:nvSpPr>
+        <p:spPr>
+          <a:xfrm>
+            <a:off x="0" y="-2"/>
+            <a:ext cx="12192000" cy="1325563"/>
+          </a:xfrm>
+          <a:prstGeom prst="rect">
+            <a:avLst/>
+          </a:prstGeom>
+          <a:solidFill>
+            <a:schemeClr val="accent2"/>
+          </a:solidFill>
+          <a:ln>
+            <a:solidFill>
+              <a:srgbClr val="418AB3"/>
+            </a:solidFill>
+          </a:ln>
+        </p:spPr>
+        <p:style>
+          <a:lnRef idx="2">
+            <a:schemeClr val="accent1">
+              <a:shade val="15000"/>
+            </a:schemeClr>
+          </a:lnRef>
+          <a:fillRef idx="1">
+            <a:schemeClr val="accent1"/>
+          </a:fillRef>
+          <a:effectRef idx="0">
+            <a:schemeClr val="accent1"/>
+          </a:effectRef>
+          <a:fontRef idx="minor">
+            <a:schemeClr val="lt1"/>
+          </a:fontRef>
+        </p:style>
+        <p:txBody>
+          <a:bodyPr rtlCol="0" anchor="ctr"/>
+          <a:lstStyle/>
+          <a:p>
+            <a:pPr algn="ctr"/>
+            <a:endParaRPr lang="pt-BR" dirty="0"/>
+          </a:p>
+        </p:txBody>
+      </p:sp>
+      <p:sp>
+        <p:nvSpPr>
+          <p:cNvPr id="2" name="Título 1">
+            <a:extLst>
+              <a:ext uri="{FF2B5EF4-FFF2-40B4-BE49-F238E27FC236}">
+                <a16:creationId xmlns:a16="http://schemas.microsoft.com/office/drawing/2014/main" id="{1E1BC5B7-C893-6F3C-EDAD-6C5644BC0CD6}"/>
+              </a:ext>
+            </a:extLst>
+          </p:cNvPr>
+          <p:cNvSpPr>
+            <a:spLocks noGrp="1"/>
+          </p:cNvSpPr>
+          <p:nvPr>
+            <p:ph type="title"/>
+          </p:nvPr>
+        </p:nvSpPr>
+        <p:spPr>
+          <a:xfrm>
+            <a:off x="0" y="-1"/>
+            <a:ext cx="12192000" cy="1325563"/>
+          </a:xfrm>
+        </p:spPr>
+        <p:txBody>
+          <a:bodyPr/>
+          <a:lstStyle/>
+          <a:p>
+            <a:pPr algn="ctr"/>
+            <a:r>
+              <a:rPr lang="pt-BR" dirty="0">
+                <a:solidFill>
+                  <a:schemeClr val="bg1"/>
+                </a:solidFill>
+              </a:rPr>
+              <a:t>Filtro Gaussiano</a:t>
+            </a:r>
+          </a:p>
+        </p:txBody>
+      </p:sp>
+      <p:sp>
+        <p:nvSpPr>
+          <p:cNvPr id="12" name="AutoShape 6" descr="Lógica Proposicional x Lógica de Argumento ⋆ Colaborae">
+            <a:extLst>
+              <a:ext uri="{FF2B5EF4-FFF2-40B4-BE49-F238E27FC236}">
+                <a16:creationId xmlns:a16="http://schemas.microsoft.com/office/drawing/2014/main" id="{1E4A2817-895C-DC5D-B5A1-47E43B0F6B44}"/>
+              </a:ext>
+            </a:extLst>
+          </p:cNvPr>
+          <p:cNvSpPr>
+            <a:spLocks noChangeAspect="1" noChangeArrowheads="1"/>
+          </p:cNvSpPr>
+          <p:nvPr/>
+        </p:nvSpPr>
+        <p:spPr bwMode="auto">
+          <a:xfrm>
+            <a:off x="5943600" y="-1707776"/>
+            <a:ext cx="5289176" cy="5289176"/>
+          </a:xfrm>
+          <a:prstGeom prst="rect">
+            <a:avLst/>
+          </a:prstGeom>
+          <a:noFill/>
+          <a:extLst>
+            <a:ext uri="{909E8E84-426E-40DD-AFC4-6F175D3DCCD1}">
+              <a14:hiddenFill xmlns:a14="http://schemas.microsoft.com/office/drawing/2010/main">
+                <a:solidFill>
+                  <a:srgbClr val="FFFFFF"/>
+                </a:solidFill>
+              </a14:hiddenFill>
+            </a:ext>
+          </a:extLst>
+        </p:spPr>
+        <p:txBody>
+          <a:bodyPr vert="horz" wrap="square" lIns="91440" tIns="45720" rIns="91440" bIns="45720" numCol="1" anchor="t" anchorCtr="0" compatLnSpc="1">
+            <a:prstTxWarp prst="textNoShape">
+              <a:avLst/>
+            </a:prstTxWarp>
+          </a:bodyPr>
+          <a:lstStyle/>
+          <a:p>
+            <a:endParaRPr lang="pt-BR"/>
+          </a:p>
+        </p:txBody>
+      </p:sp>
+      <p:sp>
+        <p:nvSpPr>
+          <p:cNvPr id="6" name="Espaço Reservado para Conteúdo 5">
+            <a:extLst>
+              <a:ext uri="{FF2B5EF4-FFF2-40B4-BE49-F238E27FC236}">
+                <a16:creationId xmlns:a16="http://schemas.microsoft.com/office/drawing/2014/main" id="{377BDD44-FF48-F62D-BFBF-7746A5DFF14B}"/>
+              </a:ext>
+            </a:extLst>
+          </p:cNvPr>
+          <p:cNvSpPr>
+            <a:spLocks noGrp="1"/>
+          </p:cNvSpPr>
+          <p:nvPr>
+            <p:ph idx="1"/>
+          </p:nvPr>
+        </p:nvSpPr>
+        <p:spPr>
+          <a:xfrm>
+            <a:off x="1968759" y="1762656"/>
+            <a:ext cx="8829870" cy="4061199"/>
+          </a:xfrm>
+        </p:spPr>
+        <p:txBody>
+          <a:bodyPr>
+            <a:normAutofit/>
+          </a:bodyPr>
+          <a:lstStyle/>
+          <a:p>
+            <a:pPr algn="just"/>
+            <a:r>
+              <a:rPr lang="pt-BR" sz="2200" dirty="0"/>
+              <a:t>O filtro utiliza uma matriz de pesos baseada em uma função matemática gaussiana bidimensional.</a:t>
+            </a:r>
+          </a:p>
+          <a:p>
+            <a:pPr algn="just"/>
+            <a:endParaRPr lang="pt-BR" sz="2400" dirty="0"/>
+          </a:p>
+          <a:p>
+            <a:pPr algn="just"/>
+            <a:r>
+              <a:rPr lang="pt-BR" sz="2200" dirty="0"/>
+              <a:t>O pixel do centro recebe o maior peso, enquanto os pixels vizinhos recebem pesos menores de acordo com a distância em relação ao centro.</a:t>
+            </a:r>
+          </a:p>
+          <a:p>
+            <a:pPr algn="just"/>
+            <a:endParaRPr lang="pt-BR" sz="2200" dirty="0"/>
+          </a:p>
+          <a:p>
+            <a:pPr marL="0" indent="0" algn="just">
+              <a:buNone/>
+            </a:pPr>
+            <a:endParaRPr lang="pt-BR" sz="2200" dirty="0"/>
+          </a:p>
+        </p:txBody>
+      </p:sp>
+      <p:pic>
+        <p:nvPicPr>
+          <p:cNvPr id="3" name="Imagem 2">
+            <a:extLst>
+              <a:ext uri="{FF2B5EF4-FFF2-40B4-BE49-F238E27FC236}">
+                <a16:creationId xmlns:a16="http://schemas.microsoft.com/office/drawing/2014/main" id="{41E07CFF-24CA-EFF9-1A46-6F596ECA79AE}"/>
+              </a:ext>
+            </a:extLst>
+          </p:cNvPr>
+          <p:cNvPicPr>
+            <a:picLocks noChangeAspect="1"/>
+          </p:cNvPicPr>
+          <p:nvPr/>
+        </p:nvPicPr>
+        <p:blipFill>
+          <a:blip r:embed="rId3"/>
+          <a:stretch>
+            <a:fillRect/>
+          </a:stretch>
+        </p:blipFill>
+        <p:spPr>
+          <a:xfrm>
+            <a:off x="2286274" y="3969092"/>
+            <a:ext cx="8096250" cy="2771775"/>
+          </a:xfrm>
+          <a:prstGeom prst="rect">
+            <a:avLst/>
+          </a:prstGeom>
+        </p:spPr>
+      </p:pic>
+    </p:spTree>
+    <p:extLst>
+      <p:ext uri="{BB962C8B-B14F-4D97-AF65-F5344CB8AC3E}">
+        <p14:creationId xmlns:p14="http://schemas.microsoft.com/office/powerpoint/2010/main" val="550374296"/>
+      </p:ext>
+    </p:extLst>
+  </p:cSld>
+  <p:clrMapOvr>
+    <a:masterClrMapping/>
+  </p:clrMapOvr>
+</p:sld>
+</file>
+
+<file path=ppt/slides/slide18.xml><?xml version="1.0" encoding="utf-8"?>
+<p:sld xmlns:a="http://schemas.openxmlformats.org/drawingml/2006/main" xmlns:r="http://schemas.openxmlformats.org/officeDocument/2006/relationships" xmlns:p="http://schemas.openxmlformats.org/presentationml/2006/main">
+  <p:cSld>
+    <p:spTree>
+      <p:nvGrpSpPr>
+        <p:cNvPr id="1" name="">
+          <a:extLst>
+            <a:ext uri="{FF2B5EF4-FFF2-40B4-BE49-F238E27FC236}">
+              <a16:creationId xmlns:a16="http://schemas.microsoft.com/office/drawing/2014/main" id="{468774F6-2FE2-C557-2302-5B07E9657C05}"/>
+            </a:ext>
+          </a:extLst>
+        </p:cNvPr>
+        <p:cNvGrpSpPr/>
+        <p:nvPr/>
+      </p:nvGrpSpPr>
+      <p:grpSpPr>
+        <a:xfrm>
+          <a:off x="0" y="0"/>
+          <a:ext cx="0" cy="0"/>
+          <a:chOff x="0" y="0"/>
+          <a:chExt cx="0" cy="0"/>
+        </a:xfrm>
+      </p:grpSpPr>
+      <p:sp>
+        <p:nvSpPr>
+          <p:cNvPr id="5" name="Retângulo 4">
+            <a:extLst>
+              <a:ext uri="{FF2B5EF4-FFF2-40B4-BE49-F238E27FC236}">
+                <a16:creationId xmlns:a16="http://schemas.microsoft.com/office/drawing/2014/main" id="{4BEE8742-19E6-450D-17A7-68BC885EA194}"/>
+              </a:ext>
+            </a:extLst>
+          </p:cNvPr>
+          <p:cNvSpPr/>
+          <p:nvPr/>
+        </p:nvSpPr>
+        <p:spPr>
+          <a:xfrm>
+            <a:off x="0" y="-2"/>
+            <a:ext cx="12192000" cy="1325563"/>
+          </a:xfrm>
+          <a:prstGeom prst="rect">
+            <a:avLst/>
+          </a:prstGeom>
+          <a:solidFill>
+            <a:schemeClr val="accent2"/>
+          </a:solidFill>
+          <a:ln>
+            <a:solidFill>
+              <a:srgbClr val="418AB3"/>
+            </a:solidFill>
+          </a:ln>
+        </p:spPr>
+        <p:style>
+          <a:lnRef idx="2">
+            <a:schemeClr val="accent1">
+              <a:shade val="15000"/>
+            </a:schemeClr>
+          </a:lnRef>
+          <a:fillRef idx="1">
+            <a:schemeClr val="accent1"/>
+          </a:fillRef>
+          <a:effectRef idx="0">
+            <a:schemeClr val="accent1"/>
+          </a:effectRef>
+          <a:fontRef idx="minor">
+            <a:schemeClr val="lt1"/>
+          </a:fontRef>
+        </p:style>
+        <p:txBody>
+          <a:bodyPr rtlCol="0" anchor="ctr"/>
+          <a:lstStyle/>
+          <a:p>
+            <a:pPr algn="ctr"/>
+            <a:endParaRPr lang="pt-BR" dirty="0"/>
+          </a:p>
+        </p:txBody>
+      </p:sp>
+      <p:sp>
+        <p:nvSpPr>
+          <p:cNvPr id="2" name="Título 1">
+            <a:extLst>
+              <a:ext uri="{FF2B5EF4-FFF2-40B4-BE49-F238E27FC236}">
+                <a16:creationId xmlns:a16="http://schemas.microsoft.com/office/drawing/2014/main" id="{E06540AA-4350-DC44-DBAB-61DF5D12A9DA}"/>
+              </a:ext>
+            </a:extLst>
+          </p:cNvPr>
+          <p:cNvSpPr>
+            <a:spLocks noGrp="1"/>
+          </p:cNvSpPr>
+          <p:nvPr>
+            <p:ph type="title"/>
+          </p:nvPr>
+        </p:nvSpPr>
+        <p:spPr>
+          <a:xfrm>
+            <a:off x="0" y="-1"/>
+            <a:ext cx="12192000" cy="1325563"/>
+          </a:xfrm>
+        </p:spPr>
+        <p:txBody>
+          <a:bodyPr/>
+          <a:lstStyle/>
+          <a:p>
+            <a:pPr algn="ctr"/>
+            <a:r>
+              <a:rPr lang="pt-BR" dirty="0">
+                <a:solidFill>
+                  <a:schemeClr val="bg1"/>
+                </a:solidFill>
+              </a:rPr>
+              <a:t>Filtro Gaussiano</a:t>
+            </a:r>
+          </a:p>
+        </p:txBody>
+      </p:sp>
+      <p:sp>
+        <p:nvSpPr>
+          <p:cNvPr id="12" name="AutoShape 6" descr="Lógica Proposicional x Lógica de Argumento ⋆ Colaborae">
+            <a:extLst>
+              <a:ext uri="{FF2B5EF4-FFF2-40B4-BE49-F238E27FC236}">
+                <a16:creationId xmlns:a16="http://schemas.microsoft.com/office/drawing/2014/main" id="{9B926DED-0437-5798-25CF-78BA314839F6}"/>
+              </a:ext>
+            </a:extLst>
+          </p:cNvPr>
+          <p:cNvSpPr>
+            <a:spLocks noChangeAspect="1" noChangeArrowheads="1"/>
+          </p:cNvSpPr>
+          <p:nvPr/>
+        </p:nvSpPr>
+        <p:spPr bwMode="auto">
+          <a:xfrm>
+            <a:off x="5943600" y="-1707776"/>
+            <a:ext cx="5289176" cy="5289176"/>
+          </a:xfrm>
+          <a:prstGeom prst="rect">
+            <a:avLst/>
+          </a:prstGeom>
+          <a:noFill/>
+          <a:extLst>
+            <a:ext uri="{909E8E84-426E-40DD-AFC4-6F175D3DCCD1}">
+              <a14:hiddenFill xmlns:a14="http://schemas.microsoft.com/office/drawing/2010/main">
+                <a:solidFill>
+                  <a:srgbClr val="FFFFFF"/>
+                </a:solidFill>
+              </a14:hiddenFill>
+            </a:ext>
+          </a:extLst>
+        </p:spPr>
+        <p:txBody>
+          <a:bodyPr vert="horz" wrap="square" lIns="91440" tIns="45720" rIns="91440" bIns="45720" numCol="1" anchor="t" anchorCtr="0" compatLnSpc="1">
+            <a:prstTxWarp prst="textNoShape">
+              <a:avLst/>
+            </a:prstTxWarp>
+          </a:bodyPr>
+          <a:lstStyle/>
+          <a:p>
+            <a:endParaRPr lang="pt-BR"/>
+          </a:p>
+        </p:txBody>
+      </p:sp>
+      <p:sp>
+        <p:nvSpPr>
+          <p:cNvPr id="6" name="Espaço Reservado para Conteúdo 5">
+            <a:extLst>
+              <a:ext uri="{FF2B5EF4-FFF2-40B4-BE49-F238E27FC236}">
+                <a16:creationId xmlns:a16="http://schemas.microsoft.com/office/drawing/2014/main" id="{809C0C7C-465A-8105-A5EA-F11560664965}"/>
+              </a:ext>
+            </a:extLst>
+          </p:cNvPr>
+          <p:cNvSpPr>
+            <a:spLocks noGrp="1"/>
+          </p:cNvSpPr>
+          <p:nvPr>
+            <p:ph idx="1"/>
+          </p:nvPr>
+        </p:nvSpPr>
+        <p:spPr>
+          <a:xfrm>
+            <a:off x="1968759" y="1762656"/>
+            <a:ext cx="8318241" cy="4061199"/>
+          </a:xfrm>
+        </p:spPr>
+        <p:txBody>
+          <a:bodyPr>
+            <a:normAutofit/>
+          </a:bodyPr>
+          <a:lstStyle/>
+          <a:p>
+            <a:pPr algn="just"/>
+            <a:r>
+              <a:rPr lang="pt-BR" sz="2200" dirty="0"/>
+              <a:t>O filtro Gaussiano pode ser entendido como uma média ponderada, na qual os pesos são definidos de acordo com uma função Gaussiana.</a:t>
+            </a:r>
+          </a:p>
+          <a:p>
+            <a:pPr algn="just"/>
+            <a:endParaRPr lang="pt-BR" sz="2400" dirty="0"/>
+          </a:p>
+          <a:p>
+            <a:pPr algn="just"/>
+            <a:r>
+              <a:rPr lang="pt-BR" sz="2200" dirty="0"/>
+              <a:t>Uma média ponderada pode usar quaisquer pesos, já o filtro Gaussiano utiliza pesos determinados pela </a:t>
+            </a:r>
+            <a:r>
+              <a:rPr lang="pt-BR" sz="2200" b="1" dirty="0"/>
+              <a:t>distribuição Gaussiana</a:t>
+            </a:r>
+            <a:r>
+              <a:rPr lang="pt-BR" sz="2200" dirty="0"/>
+              <a:t>.</a:t>
+            </a:r>
+          </a:p>
+          <a:p>
+            <a:pPr algn="just"/>
+            <a:endParaRPr lang="pt-BR" sz="2200" dirty="0"/>
+          </a:p>
+          <a:p>
+            <a:pPr marL="0" indent="0" algn="just">
+              <a:buNone/>
+            </a:pPr>
+            <a:endParaRPr lang="pt-BR" sz="2200" dirty="0"/>
+          </a:p>
+        </p:txBody>
+      </p:sp>
+      <p:pic>
+        <p:nvPicPr>
+          <p:cNvPr id="8196" name="Picture 4" descr="Gaussian Blurring — A Gentle Introduction | Towards AI">
+            <a:extLst>
+              <a:ext uri="{FF2B5EF4-FFF2-40B4-BE49-F238E27FC236}">
+                <a16:creationId xmlns:a16="http://schemas.microsoft.com/office/drawing/2014/main" id="{E908E848-23C4-4827-7C08-B5AD50F03F0A}"/>
+              </a:ext>
+            </a:extLst>
+          </p:cNvPr>
+          <p:cNvPicPr>
+            <a:picLocks noChangeAspect="1" noChangeArrowheads="1"/>
+          </p:cNvPicPr>
+          <p:nvPr/>
+        </p:nvPicPr>
+        <p:blipFill>
+          <a:blip r:embed="rId3">
+            <a:extLst>
+              <a:ext uri="{28A0092B-C50C-407E-A947-70E740481C1C}">
+                <a14:useLocalDpi xmlns:a14="http://schemas.microsoft.com/office/drawing/2010/main" val="0"/>
+              </a:ext>
+            </a:extLst>
+          </a:blip>
+          <a:srcRect/>
+          <a:stretch>
+            <a:fillRect/>
+          </a:stretch>
+        </p:blipFill>
+        <p:spPr bwMode="auto">
+          <a:xfrm>
+            <a:off x="3387136" y="4018494"/>
+            <a:ext cx="5112928" cy="2728843"/>
+          </a:xfrm>
+          <a:prstGeom prst="rect">
+            <a:avLst/>
+          </a:prstGeom>
+          <a:noFill/>
+          <a:extLst>
+            <a:ext uri="{909E8E84-426E-40DD-AFC4-6F175D3DCCD1}">
+              <a14:hiddenFill xmlns:a14="http://schemas.microsoft.com/office/drawing/2010/main">
+                <a:solidFill>
+                  <a:srgbClr val="FFFFFF"/>
+                </a:solidFill>
+              </a14:hiddenFill>
+            </a:ext>
+          </a:extLst>
+        </p:spPr>
+      </p:pic>
+    </p:spTree>
+    <p:extLst>
+      <p:ext uri="{BB962C8B-B14F-4D97-AF65-F5344CB8AC3E}">
+        <p14:creationId xmlns:p14="http://schemas.microsoft.com/office/powerpoint/2010/main" val="1351133379"/>
+      </p:ext>
+    </p:extLst>
+  </p:cSld>
+  <p:clrMapOvr>
+    <a:masterClrMapping/>
+  </p:clrMapOvr>
+</p:sld>
+</file>
+
+<file path=ppt/slides/slide19.xml><?xml version="1.0" encoding="utf-8"?>
+<p:sld xmlns:a="http://schemas.openxmlformats.org/drawingml/2006/main" xmlns:r="http://schemas.openxmlformats.org/officeDocument/2006/relationships" xmlns:p="http://schemas.openxmlformats.org/presentationml/2006/main">
+  <p:cSld>
+    <p:spTree>
+      <p:nvGrpSpPr>
+        <p:cNvPr id="1" name="">
+          <a:extLst>
+            <a:ext uri="{FF2B5EF4-FFF2-40B4-BE49-F238E27FC236}">
+              <a16:creationId xmlns:a16="http://schemas.microsoft.com/office/drawing/2014/main" id="{A1CDDD6A-F527-BCA9-4537-0866E741ABBE}"/>
+            </a:ext>
+          </a:extLst>
+        </p:cNvPr>
+        <p:cNvGrpSpPr/>
+        <p:nvPr/>
+      </p:nvGrpSpPr>
+      <p:grpSpPr>
+        <a:xfrm>
+          <a:off x="0" y="0"/>
+          <a:ext cx="0" cy="0"/>
+          <a:chOff x="0" y="0"/>
+          <a:chExt cx="0" cy="0"/>
+        </a:xfrm>
+      </p:grpSpPr>
+      <p:sp>
+        <p:nvSpPr>
+          <p:cNvPr id="5" name="Retângulo 4">
+            <a:extLst>
+              <a:ext uri="{FF2B5EF4-FFF2-40B4-BE49-F238E27FC236}">
+                <a16:creationId xmlns:a16="http://schemas.microsoft.com/office/drawing/2014/main" id="{9D1F797D-91A4-D47F-E8B1-8DD7078ECE79}"/>
+              </a:ext>
+            </a:extLst>
+          </p:cNvPr>
+          <p:cNvSpPr/>
+          <p:nvPr/>
+        </p:nvSpPr>
+        <p:spPr>
+          <a:xfrm>
+            <a:off x="0" y="-2"/>
+            <a:ext cx="12192000" cy="1325563"/>
+          </a:xfrm>
+          <a:prstGeom prst="rect">
+            <a:avLst/>
+          </a:prstGeom>
+          <a:solidFill>
+            <a:schemeClr val="accent2"/>
+          </a:solidFill>
+          <a:ln>
+            <a:solidFill>
+              <a:srgbClr val="418AB3"/>
+            </a:solidFill>
+          </a:ln>
+        </p:spPr>
+        <p:style>
+          <a:lnRef idx="2">
+            <a:schemeClr val="accent1">
+              <a:shade val="15000"/>
+            </a:schemeClr>
+          </a:lnRef>
+          <a:fillRef idx="1">
+            <a:schemeClr val="accent1"/>
+          </a:fillRef>
+          <a:effectRef idx="0">
+            <a:schemeClr val="accent1"/>
+          </a:effectRef>
+          <a:fontRef idx="minor">
+            <a:schemeClr val="lt1"/>
+          </a:fontRef>
+        </p:style>
+        <p:txBody>
+          <a:bodyPr rtlCol="0" anchor="ctr"/>
+          <a:lstStyle/>
+          <a:p>
+            <a:pPr algn="ctr"/>
+            <a:endParaRPr lang="pt-BR" dirty="0"/>
+          </a:p>
+        </p:txBody>
+      </p:sp>
+      <p:sp>
+        <p:nvSpPr>
+          <p:cNvPr id="2" name="Título 1">
+            <a:extLst>
+              <a:ext uri="{FF2B5EF4-FFF2-40B4-BE49-F238E27FC236}">
+                <a16:creationId xmlns:a16="http://schemas.microsoft.com/office/drawing/2014/main" id="{B07C25E9-9CCD-DB0C-027A-33B540593945}"/>
+              </a:ext>
+            </a:extLst>
+          </p:cNvPr>
+          <p:cNvSpPr>
+            <a:spLocks noGrp="1"/>
+          </p:cNvSpPr>
+          <p:nvPr>
+            <p:ph type="title"/>
+          </p:nvPr>
+        </p:nvSpPr>
+        <p:spPr>
+          <a:xfrm>
+            <a:off x="0" y="-1"/>
+            <a:ext cx="12192000" cy="1325563"/>
+          </a:xfrm>
+        </p:spPr>
+        <p:txBody>
+          <a:bodyPr/>
+          <a:lstStyle/>
+          <a:p>
+            <a:pPr algn="ctr"/>
+            <a:r>
+              <a:rPr lang="pt-BR" dirty="0">
+                <a:solidFill>
+                  <a:schemeClr val="bg1"/>
+                </a:solidFill>
+              </a:rPr>
+              <a:t>Filtro Gaussiano</a:t>
+            </a:r>
+          </a:p>
+        </p:txBody>
+      </p:sp>
+      <p:sp>
+        <p:nvSpPr>
+          <p:cNvPr id="12" name="AutoShape 6" descr="Lógica Proposicional x Lógica de Argumento ⋆ Colaborae">
+            <a:extLst>
+              <a:ext uri="{FF2B5EF4-FFF2-40B4-BE49-F238E27FC236}">
+                <a16:creationId xmlns:a16="http://schemas.microsoft.com/office/drawing/2014/main" id="{F327A825-733C-61A6-3960-FF116761FA72}"/>
+              </a:ext>
+            </a:extLst>
+          </p:cNvPr>
+          <p:cNvSpPr>
+            <a:spLocks noChangeAspect="1" noChangeArrowheads="1"/>
+          </p:cNvSpPr>
+          <p:nvPr/>
+        </p:nvSpPr>
+        <p:spPr bwMode="auto">
+          <a:xfrm>
+            <a:off x="5943600" y="-1707776"/>
+            <a:ext cx="5289176" cy="5289176"/>
+          </a:xfrm>
+          <a:prstGeom prst="rect">
+            <a:avLst/>
+          </a:prstGeom>
+          <a:noFill/>
+          <a:extLst>
+            <a:ext uri="{909E8E84-426E-40DD-AFC4-6F175D3DCCD1}">
+              <a14:hiddenFill xmlns:a14="http://schemas.microsoft.com/office/drawing/2010/main">
+                <a:solidFill>
+                  <a:srgbClr val="FFFFFF"/>
+                </a:solidFill>
+              </a14:hiddenFill>
+            </a:ext>
+          </a:extLst>
+        </p:spPr>
+        <p:txBody>
+          <a:bodyPr vert="horz" wrap="square" lIns="91440" tIns="45720" rIns="91440" bIns="45720" numCol="1" anchor="t" anchorCtr="0" compatLnSpc="1">
+            <a:prstTxWarp prst="textNoShape">
+              <a:avLst/>
+            </a:prstTxWarp>
+          </a:bodyPr>
+          <a:lstStyle/>
+          <a:p>
+            <a:endParaRPr lang="pt-BR"/>
+          </a:p>
+        </p:txBody>
+      </p:sp>
+      <p:sp>
+        <p:nvSpPr>
+          <p:cNvPr id="6" name="Espaço Reservado para Conteúdo 5">
+            <a:extLst>
+              <a:ext uri="{FF2B5EF4-FFF2-40B4-BE49-F238E27FC236}">
+                <a16:creationId xmlns:a16="http://schemas.microsoft.com/office/drawing/2014/main" id="{3C17CBF4-38E0-A11D-3D21-0DB7698D4A02}"/>
+              </a:ext>
+            </a:extLst>
+          </p:cNvPr>
+          <p:cNvSpPr>
+            <a:spLocks noGrp="1"/>
+          </p:cNvSpPr>
+          <p:nvPr>
+            <p:ph idx="1"/>
+          </p:nvPr>
+        </p:nvSpPr>
+        <p:spPr>
+          <a:xfrm>
+            <a:off x="1413586" y="1550801"/>
+            <a:ext cx="9364827" cy="2030599"/>
+          </a:xfrm>
+        </p:spPr>
+        <p:txBody>
+          <a:bodyPr>
+            <a:normAutofit/>
+          </a:bodyPr>
+          <a:lstStyle/>
+          <a:p>
+            <a:pPr algn="just"/>
+            <a:r>
+              <a:rPr lang="pt-BR" sz="2200" dirty="0"/>
+              <a:t>O filtro gaussiano apresenta um parâmetro extra que controla o desvio padrão da curva (sigma), ou seja, o quanto o filtro "espalha" a influência dos pixels.</a:t>
+            </a:r>
+          </a:p>
+          <a:p>
+            <a:pPr algn="just"/>
+            <a:endParaRPr lang="pt-BR" sz="2200" dirty="0"/>
+          </a:p>
+          <a:p>
+            <a:pPr algn="just"/>
+            <a:r>
+              <a:rPr lang="pt-BR" sz="2200" dirty="0"/>
+              <a:t>Um σ menor mantém o filtro concentrado (desfoque leve), enquanto um σ maior espalha os pesos, gerando um desfoque mais forte.</a:t>
+            </a:r>
+          </a:p>
+          <a:p>
+            <a:pPr algn="just"/>
+            <a:endParaRPr lang="pt-BR" sz="2200" dirty="0"/>
+          </a:p>
+        </p:txBody>
+      </p:sp>
+      <p:pic>
+        <p:nvPicPr>
+          <p:cNvPr id="3" name="Imagem 2">
+            <a:extLst>
+              <a:ext uri="{FF2B5EF4-FFF2-40B4-BE49-F238E27FC236}">
+                <a16:creationId xmlns:a16="http://schemas.microsoft.com/office/drawing/2014/main" id="{C0389407-CF5E-CBE9-7940-11BE4DA726BA}"/>
+              </a:ext>
+            </a:extLst>
+          </p:cNvPr>
+          <p:cNvPicPr>
+            <a:picLocks noChangeAspect="1"/>
+          </p:cNvPicPr>
+          <p:nvPr/>
+        </p:nvPicPr>
+        <p:blipFill>
+          <a:blip r:embed="rId3"/>
+          <a:stretch>
+            <a:fillRect/>
+          </a:stretch>
+        </p:blipFill>
+        <p:spPr>
+          <a:xfrm>
+            <a:off x="2572307" y="3641342"/>
+            <a:ext cx="6742585" cy="3167601"/>
+          </a:xfrm>
+          <a:prstGeom prst="rect">
+            <a:avLst/>
+          </a:prstGeom>
+        </p:spPr>
+      </p:pic>
+    </p:spTree>
+    <p:extLst>
+      <p:ext uri="{BB962C8B-B14F-4D97-AF65-F5344CB8AC3E}">
+        <p14:creationId xmlns:p14="http://schemas.microsoft.com/office/powerpoint/2010/main" val="747261239"/>
+      </p:ext>
+    </p:extLst>
+  </p:cSld>
+  <p:clrMapOvr>
+    <a:masterClrMapping/>
+  </p:clrMapOvr>
+</p:sld>
+</file>
+
+<file path=ppt/slides/slide2.xml><?xml version="1.0" encoding="utf-8"?>
+<p:sld xmlns:a="http://schemas.openxmlformats.org/drawingml/2006/main" xmlns:r="http://schemas.openxmlformats.org/officeDocument/2006/relationships" xmlns:p="http://schemas.openxmlformats.org/presentationml/2006/main">
+  <p:cSld>
+    <p:spTree>
+      <p:nvGrpSpPr>
+        <p:cNvPr id="1" name="">
+          <a:extLst>
+            <a:ext uri="{FF2B5EF4-FFF2-40B4-BE49-F238E27FC236}">
+              <a16:creationId xmlns:a16="http://schemas.microsoft.com/office/drawing/2014/main" id="{10A33180-53BA-21BF-A84E-968241FBE5AD}"/>
+            </a:ext>
+          </a:extLst>
+        </p:cNvPr>
+        <p:cNvGrpSpPr/>
+        <p:nvPr/>
+      </p:nvGrpSpPr>
+      <p:grpSpPr>
+        <a:xfrm>
+          <a:off x="0" y="0"/>
+          <a:ext cx="0" cy="0"/>
+          <a:chOff x="0" y="0"/>
+          <a:chExt cx="0" cy="0"/>
+        </a:xfrm>
+      </p:grpSpPr>
+      <p:sp>
+        <p:nvSpPr>
+          <p:cNvPr id="5" name="Retângulo 4">
+            <a:extLst>
+              <a:ext uri="{FF2B5EF4-FFF2-40B4-BE49-F238E27FC236}">
+                <a16:creationId xmlns:a16="http://schemas.microsoft.com/office/drawing/2014/main" id="{71CB63AC-F956-699C-AFCE-3540DB296449}"/>
+              </a:ext>
+            </a:extLst>
+          </p:cNvPr>
+          <p:cNvSpPr/>
+          <p:nvPr/>
+        </p:nvSpPr>
+        <p:spPr>
+          <a:xfrm>
+            <a:off x="0" y="-2"/>
+            <a:ext cx="12192000" cy="1325563"/>
+          </a:xfrm>
+          <a:prstGeom prst="rect">
+            <a:avLst/>
+          </a:prstGeom>
+          <a:solidFill>
+            <a:schemeClr val="accent2"/>
+          </a:solidFill>
+          <a:ln>
+            <a:solidFill>
+              <a:srgbClr val="418AB3"/>
+            </a:solidFill>
+          </a:ln>
+        </p:spPr>
+        <p:style>
+          <a:lnRef idx="2">
+            <a:schemeClr val="accent1">
+              <a:shade val="15000"/>
+            </a:schemeClr>
+          </a:lnRef>
+          <a:fillRef idx="1">
+            <a:schemeClr val="accent1"/>
+          </a:fillRef>
+          <a:effectRef idx="0">
+            <a:schemeClr val="accent1"/>
+          </a:effectRef>
+          <a:fontRef idx="minor">
+            <a:schemeClr val="lt1"/>
+          </a:fontRef>
+        </p:style>
+        <p:txBody>
+          <a:bodyPr rtlCol="0" anchor="ctr"/>
+          <a:lstStyle/>
+          <a:p>
+            <a:pPr algn="ctr"/>
+            <a:endParaRPr lang="pt-BR" dirty="0"/>
+          </a:p>
+        </p:txBody>
+      </p:sp>
+      <p:sp>
+        <p:nvSpPr>
+          <p:cNvPr id="2" name="Título 1">
+            <a:extLst>
+              <a:ext uri="{FF2B5EF4-FFF2-40B4-BE49-F238E27FC236}">
+                <a16:creationId xmlns:a16="http://schemas.microsoft.com/office/drawing/2014/main" id="{288A14FC-38B0-0F3B-A145-7298E588FB15}"/>
+              </a:ext>
+            </a:extLst>
+          </p:cNvPr>
+          <p:cNvSpPr>
+            <a:spLocks noGrp="1"/>
+          </p:cNvSpPr>
+          <p:nvPr>
+            <p:ph type="title"/>
+          </p:nvPr>
+        </p:nvSpPr>
+        <p:spPr>
+          <a:xfrm>
+            <a:off x="0" y="-1"/>
+            <a:ext cx="12192000" cy="1325563"/>
+          </a:xfrm>
+        </p:spPr>
+        <p:txBody>
+          <a:bodyPr/>
+          <a:lstStyle/>
+          <a:p>
+            <a:pPr algn="ctr"/>
+            <a:r>
+              <a:rPr lang="pt-BR" dirty="0">
+                <a:solidFill>
+                  <a:schemeClr val="bg1"/>
+                </a:solidFill>
+              </a:rPr>
+              <a:t>Convolução</a:t>
+            </a:r>
+          </a:p>
+        </p:txBody>
+      </p:sp>
+      <p:sp>
+        <p:nvSpPr>
+          <p:cNvPr id="12" name="AutoShape 6" descr="Lógica Proposicional x Lógica de Argumento ⋆ Colaborae">
+            <a:extLst>
+              <a:ext uri="{FF2B5EF4-FFF2-40B4-BE49-F238E27FC236}">
+                <a16:creationId xmlns:a16="http://schemas.microsoft.com/office/drawing/2014/main" id="{60650552-5CD6-0B48-6261-174CD00E30C9}"/>
+              </a:ext>
+            </a:extLst>
+          </p:cNvPr>
+          <p:cNvSpPr>
+            <a:spLocks noChangeAspect="1" noChangeArrowheads="1"/>
+          </p:cNvSpPr>
+          <p:nvPr/>
+        </p:nvSpPr>
+        <p:spPr bwMode="auto">
+          <a:xfrm>
+            <a:off x="5943600" y="-1707776"/>
+            <a:ext cx="5289176" cy="5289176"/>
+          </a:xfrm>
+          <a:prstGeom prst="rect">
+            <a:avLst/>
+          </a:prstGeom>
+          <a:noFill/>
+          <a:extLst>
+            <a:ext uri="{909E8E84-426E-40DD-AFC4-6F175D3DCCD1}">
+              <a14:hiddenFill xmlns:a14="http://schemas.microsoft.com/office/drawing/2010/main">
+                <a:solidFill>
+                  <a:srgbClr val="FFFFFF"/>
+                </a:solidFill>
+              </a14:hiddenFill>
+            </a:ext>
+          </a:extLst>
+        </p:spPr>
+        <p:txBody>
+          <a:bodyPr vert="horz" wrap="square" lIns="91440" tIns="45720" rIns="91440" bIns="45720" numCol="1" anchor="t" anchorCtr="0" compatLnSpc="1">
+            <a:prstTxWarp prst="textNoShape">
+              <a:avLst/>
+            </a:prstTxWarp>
+          </a:bodyPr>
+          <a:lstStyle/>
+          <a:p>
+            <a:endParaRPr lang="pt-BR"/>
+          </a:p>
+        </p:txBody>
+      </p:sp>
+      <p:sp>
+        <p:nvSpPr>
+          <p:cNvPr id="6" name="Espaço Reservado para Conteúdo 5">
+            <a:extLst>
+              <a:ext uri="{FF2B5EF4-FFF2-40B4-BE49-F238E27FC236}">
+                <a16:creationId xmlns:a16="http://schemas.microsoft.com/office/drawing/2014/main" id="{C05AC19E-EA79-E17E-B527-D6B35B7B2D7C}"/>
+              </a:ext>
+            </a:extLst>
+          </p:cNvPr>
+          <p:cNvSpPr>
+            <a:spLocks noGrp="1"/>
+          </p:cNvSpPr>
+          <p:nvPr>
+            <p:ph idx="1"/>
+          </p:nvPr>
+        </p:nvSpPr>
+        <p:spPr>
+          <a:xfrm>
+            <a:off x="304338" y="1559906"/>
+            <a:ext cx="6115710" cy="5004177"/>
+          </a:xfrm>
+        </p:spPr>
+        <p:txBody>
+          <a:bodyPr>
+            <a:normAutofit/>
+          </a:bodyPr>
+          <a:lstStyle/>
+          <a:p>
+            <a:r>
+              <a:rPr lang="pt-BR" sz="2200" dirty="0"/>
+              <a:t>Operação matemática capaz de modificar ou extrair características da imagem.</a:t>
+            </a:r>
+          </a:p>
+          <a:p>
+            <a:endParaRPr lang="pt-BR" sz="2200" dirty="0"/>
+          </a:p>
+          <a:p>
+            <a:r>
+              <a:rPr lang="pt-BR" sz="2200" dirty="0"/>
+              <a:t>Utiliza um filtro convolucional (kernel),para ser  deslocado sobre a imagem principal.</a:t>
+            </a:r>
+          </a:p>
+          <a:p>
+            <a:endParaRPr lang="pt-BR" sz="2400" dirty="0"/>
+          </a:p>
+          <a:p>
+            <a:r>
+              <a:rPr lang="pt-BR" sz="2200" dirty="0"/>
+              <a:t>Principais aplicações:</a:t>
+            </a:r>
+          </a:p>
+          <a:p>
+            <a:pPr lvl="1"/>
+            <a:endParaRPr lang="pt-BR" sz="2000" dirty="0"/>
+          </a:p>
+          <a:p>
+            <a:pPr lvl="1">
+              <a:buFont typeface="Courier New" panose="02070309020205020404" pitchFamily="49" charset="0"/>
+              <a:buChar char="o"/>
+            </a:pPr>
+            <a:r>
+              <a:rPr lang="pt-BR" sz="2000" dirty="0"/>
+              <a:t>Desfoque e suavização.</a:t>
+            </a:r>
+          </a:p>
+          <a:p>
+            <a:pPr lvl="1">
+              <a:buFont typeface="Courier New" panose="02070309020205020404" pitchFamily="49" charset="0"/>
+              <a:buChar char="o"/>
+            </a:pPr>
+            <a:r>
+              <a:rPr lang="pt-BR" sz="2000" dirty="0"/>
+              <a:t>Remoção de ruídos.</a:t>
+            </a:r>
+          </a:p>
+          <a:p>
+            <a:pPr lvl="1">
+              <a:buFont typeface="Courier New" panose="02070309020205020404" pitchFamily="49" charset="0"/>
+              <a:buChar char="o"/>
+            </a:pPr>
+            <a:r>
+              <a:rPr lang="pt-BR" sz="2000" dirty="0"/>
+              <a:t>Detecção de bordas.</a:t>
+            </a:r>
+          </a:p>
+          <a:p>
+            <a:pPr lvl="1">
+              <a:buFont typeface="Courier New" panose="02070309020205020404" pitchFamily="49" charset="0"/>
+              <a:buChar char="o"/>
+            </a:pPr>
+            <a:r>
+              <a:rPr lang="pt-BR" sz="2000" dirty="0"/>
+              <a:t>Realce de Imagem.</a:t>
+            </a:r>
+          </a:p>
+          <a:p>
+            <a:pPr lvl="1">
+              <a:buFont typeface="Courier New" panose="02070309020205020404" pitchFamily="49" charset="0"/>
+              <a:buChar char="o"/>
+            </a:pPr>
+            <a:r>
+              <a:rPr lang="pt-BR" sz="2000" dirty="0"/>
+              <a:t>etc. </a:t>
+            </a:r>
+          </a:p>
+          <a:p>
+            <a:pPr lvl="1">
+              <a:buFont typeface="Courier New" panose="02070309020205020404" pitchFamily="49" charset="0"/>
+              <a:buChar char="o"/>
+            </a:pPr>
+            <a:endParaRPr lang="pt-BR" sz="2000" i="1" dirty="0"/>
+          </a:p>
+          <a:p>
+            <a:pPr>
+              <a:buFont typeface="Courier New" panose="02070309020205020404" pitchFamily="49" charset="0"/>
+              <a:buChar char="o"/>
+            </a:pPr>
+            <a:endParaRPr lang="pt-BR" sz="2400" i="1" dirty="0"/>
+          </a:p>
+        </p:txBody>
+      </p:sp>
+      <p:pic>
+        <p:nvPicPr>
+          <p:cNvPr id="3" name="Imagem 2">
+            <a:extLst>
+              <a:ext uri="{FF2B5EF4-FFF2-40B4-BE49-F238E27FC236}">
+                <a16:creationId xmlns:a16="http://schemas.microsoft.com/office/drawing/2014/main" id="{0F1FDE0C-7D89-B369-D77B-04963F1C10CA}"/>
+              </a:ext>
+            </a:extLst>
+          </p:cNvPr>
+          <p:cNvPicPr>
+            <a:picLocks noChangeAspect="1"/>
+          </p:cNvPicPr>
+          <p:nvPr/>
+        </p:nvPicPr>
+        <p:blipFill>
+          <a:blip r:embed="rId3"/>
+          <a:stretch>
+            <a:fillRect/>
+          </a:stretch>
+        </p:blipFill>
+        <p:spPr>
+          <a:xfrm>
+            <a:off x="6420048" y="2146356"/>
+            <a:ext cx="5593108" cy="3831279"/>
+          </a:xfrm>
+          <a:prstGeom prst="rect">
+            <a:avLst/>
+          </a:prstGeom>
+        </p:spPr>
+      </p:pic>
+    </p:spTree>
+    <p:extLst>
+      <p:ext uri="{BB962C8B-B14F-4D97-AF65-F5344CB8AC3E}">
+        <p14:creationId xmlns:p14="http://schemas.microsoft.com/office/powerpoint/2010/main" val="454732246"/>
+      </p:ext>
+    </p:extLst>
+  </p:cSld>
+  <p:clrMapOvr>
+    <a:masterClrMapping/>
+  </p:clrMapOvr>
+</p:sld>
+</file>
+
+<file path=ppt/slides/slide20.xml><?xml version="1.0" encoding="utf-8"?>
+<p:sld xmlns:a="http://schemas.openxmlformats.org/drawingml/2006/main" xmlns:r="http://schemas.openxmlformats.org/officeDocument/2006/relationships" xmlns:p="http://schemas.openxmlformats.org/presentationml/2006/main">
+  <p:cSld>
+    <p:spTree>
+      <p:nvGrpSpPr>
+        <p:cNvPr id="1" name="">
+          <a:extLst>
+            <a:ext uri="{FF2B5EF4-FFF2-40B4-BE49-F238E27FC236}">
+              <a16:creationId xmlns:a16="http://schemas.microsoft.com/office/drawing/2014/main" id="{2CA6D976-2380-3C02-FE12-5BA1D7A966C2}"/>
+            </a:ext>
+          </a:extLst>
+        </p:cNvPr>
+        <p:cNvGrpSpPr/>
+        <p:nvPr/>
+      </p:nvGrpSpPr>
+      <p:grpSpPr>
+        <a:xfrm>
+          <a:off x="0" y="0"/>
+          <a:ext cx="0" cy="0"/>
+          <a:chOff x="0" y="0"/>
+          <a:chExt cx="0" cy="0"/>
+        </a:xfrm>
+      </p:grpSpPr>
+      <p:sp>
+        <p:nvSpPr>
+          <p:cNvPr id="5" name="Retângulo 4">
+            <a:extLst>
+              <a:ext uri="{FF2B5EF4-FFF2-40B4-BE49-F238E27FC236}">
+                <a16:creationId xmlns:a16="http://schemas.microsoft.com/office/drawing/2014/main" id="{EE375733-A8AF-8853-07DC-6575D9221684}"/>
+              </a:ext>
+            </a:extLst>
+          </p:cNvPr>
+          <p:cNvSpPr/>
+          <p:nvPr/>
+        </p:nvSpPr>
+        <p:spPr>
+          <a:xfrm>
+            <a:off x="0" y="-2"/>
+            <a:ext cx="12192000" cy="1325563"/>
+          </a:xfrm>
+          <a:prstGeom prst="rect">
+            <a:avLst/>
+          </a:prstGeom>
+          <a:solidFill>
+            <a:schemeClr val="accent2"/>
+          </a:solidFill>
+          <a:ln>
+            <a:solidFill>
+              <a:srgbClr val="418AB3"/>
+            </a:solidFill>
+          </a:ln>
+        </p:spPr>
+        <p:style>
+          <a:lnRef idx="2">
+            <a:schemeClr val="accent1">
+              <a:shade val="15000"/>
+            </a:schemeClr>
+          </a:lnRef>
+          <a:fillRef idx="1">
+            <a:schemeClr val="accent1"/>
+          </a:fillRef>
+          <a:effectRef idx="0">
+            <a:schemeClr val="accent1"/>
+          </a:effectRef>
+          <a:fontRef idx="minor">
+            <a:schemeClr val="lt1"/>
+          </a:fontRef>
+        </p:style>
+        <p:txBody>
+          <a:bodyPr rtlCol="0" anchor="ctr"/>
+          <a:lstStyle/>
+          <a:p>
+            <a:pPr algn="ctr"/>
+            <a:endParaRPr lang="pt-BR" dirty="0"/>
+          </a:p>
+        </p:txBody>
+      </p:sp>
+      <p:sp>
+        <p:nvSpPr>
+          <p:cNvPr id="2" name="Título 1">
+            <a:extLst>
+              <a:ext uri="{FF2B5EF4-FFF2-40B4-BE49-F238E27FC236}">
+                <a16:creationId xmlns:a16="http://schemas.microsoft.com/office/drawing/2014/main" id="{F40424B0-0F53-1203-B4C1-F6A967D6F6C2}"/>
+              </a:ext>
+            </a:extLst>
+          </p:cNvPr>
+          <p:cNvSpPr>
+            <a:spLocks noGrp="1"/>
+          </p:cNvSpPr>
+          <p:nvPr>
+            <p:ph type="title"/>
+          </p:nvPr>
+        </p:nvSpPr>
+        <p:spPr>
+          <a:xfrm>
+            <a:off x="0" y="-1"/>
+            <a:ext cx="12192000" cy="1325563"/>
+          </a:xfrm>
+        </p:spPr>
+        <p:txBody>
+          <a:bodyPr/>
+          <a:lstStyle/>
+          <a:p>
+            <a:pPr algn="ctr"/>
+            <a:r>
+              <a:rPr lang="pt-BR" dirty="0">
+                <a:solidFill>
+                  <a:schemeClr val="bg1"/>
+                </a:solidFill>
+              </a:rPr>
+              <a:t>Filtros Gaussiano</a:t>
+            </a:r>
+          </a:p>
+        </p:txBody>
+      </p:sp>
+      <p:sp>
+        <p:nvSpPr>
+          <p:cNvPr id="12" name="AutoShape 6" descr="Lógica Proposicional x Lógica de Argumento ⋆ Colaborae">
+            <a:extLst>
+              <a:ext uri="{FF2B5EF4-FFF2-40B4-BE49-F238E27FC236}">
+                <a16:creationId xmlns:a16="http://schemas.microsoft.com/office/drawing/2014/main" id="{11108A94-BA09-3BFA-6914-B5E3052CF6EB}"/>
+              </a:ext>
+            </a:extLst>
+          </p:cNvPr>
+          <p:cNvSpPr>
+            <a:spLocks noChangeAspect="1" noChangeArrowheads="1"/>
+          </p:cNvSpPr>
+          <p:nvPr/>
+        </p:nvSpPr>
+        <p:spPr bwMode="auto">
+          <a:xfrm>
+            <a:off x="5943600" y="-1707776"/>
+            <a:ext cx="5289176" cy="5289176"/>
+          </a:xfrm>
+          <a:prstGeom prst="rect">
+            <a:avLst/>
+          </a:prstGeom>
+          <a:noFill/>
+          <a:extLst>
+            <a:ext uri="{909E8E84-426E-40DD-AFC4-6F175D3DCCD1}">
+              <a14:hiddenFill xmlns:a14="http://schemas.microsoft.com/office/drawing/2010/main">
+                <a:solidFill>
+                  <a:srgbClr val="FFFFFF"/>
+                </a:solidFill>
+              </a14:hiddenFill>
+            </a:ext>
+          </a:extLst>
+        </p:spPr>
+        <p:txBody>
+          <a:bodyPr vert="horz" wrap="square" lIns="91440" tIns="45720" rIns="91440" bIns="45720" numCol="1" anchor="t" anchorCtr="0" compatLnSpc="1">
+            <a:prstTxWarp prst="textNoShape">
+              <a:avLst/>
+            </a:prstTxWarp>
+          </a:bodyPr>
+          <a:lstStyle/>
+          <a:p>
+            <a:endParaRPr lang="pt-BR"/>
+          </a:p>
+        </p:txBody>
+      </p:sp>
+      <p:sp>
+        <p:nvSpPr>
+          <p:cNvPr id="6" name="Espaço Reservado para Conteúdo 5">
+            <a:extLst>
+              <a:ext uri="{FF2B5EF4-FFF2-40B4-BE49-F238E27FC236}">
+                <a16:creationId xmlns:a16="http://schemas.microsoft.com/office/drawing/2014/main" id="{4B2DF126-1E04-4BBE-4142-5F8F21E942F4}"/>
+              </a:ext>
+            </a:extLst>
+          </p:cNvPr>
+          <p:cNvSpPr>
+            <a:spLocks noGrp="1"/>
+          </p:cNvSpPr>
+          <p:nvPr>
+            <p:ph idx="1"/>
+          </p:nvPr>
+        </p:nvSpPr>
+        <p:spPr>
+          <a:xfrm>
+            <a:off x="3408569" y="1692726"/>
+            <a:ext cx="5070062" cy="576944"/>
+          </a:xfrm>
+        </p:spPr>
+        <p:txBody>
+          <a:bodyPr>
+            <a:normAutofit/>
+          </a:bodyPr>
+          <a:lstStyle/>
+          <a:p>
+            <a:pPr algn="just"/>
+            <a:r>
+              <a:rPr lang="pt-BR" sz="2200" dirty="0"/>
+              <a:t>Exemplo de aplicação do filtro gaussiano</a:t>
+            </a:r>
+          </a:p>
+        </p:txBody>
+      </p:sp>
+      <p:pic>
+        <p:nvPicPr>
+          <p:cNvPr id="3" name="Imagem 2">
+            <a:extLst>
+              <a:ext uri="{FF2B5EF4-FFF2-40B4-BE49-F238E27FC236}">
+                <a16:creationId xmlns:a16="http://schemas.microsoft.com/office/drawing/2014/main" id="{50DC7989-8D1D-1336-CD30-F79C5D1DFD78}"/>
+              </a:ext>
+            </a:extLst>
+          </p:cNvPr>
+          <p:cNvPicPr>
+            <a:picLocks noChangeAspect="1"/>
+          </p:cNvPicPr>
+          <p:nvPr/>
+        </p:nvPicPr>
+        <p:blipFill>
+          <a:blip r:embed="rId3"/>
+          <a:srcRect b="5537"/>
+          <a:stretch>
+            <a:fillRect/>
+          </a:stretch>
+        </p:blipFill>
+        <p:spPr>
+          <a:xfrm>
+            <a:off x="2008897" y="2269671"/>
+            <a:ext cx="8174206" cy="4343400"/>
+          </a:xfrm>
+          <a:prstGeom prst="rect">
+            <a:avLst/>
+          </a:prstGeom>
+        </p:spPr>
+      </p:pic>
+    </p:spTree>
+    <p:extLst>
+      <p:ext uri="{BB962C8B-B14F-4D97-AF65-F5344CB8AC3E}">
+        <p14:creationId xmlns:p14="http://schemas.microsoft.com/office/powerpoint/2010/main" val="3602043186"/>
+      </p:ext>
+    </p:extLst>
+  </p:cSld>
+  <p:clrMapOvr>
+    <a:masterClrMapping/>
+  </p:clrMapOvr>
+</p:sld>
+</file>
+
+<file path=ppt/slides/slide21.xml><?xml version="1.0" encoding="utf-8"?>
+<p:sld xmlns:a="http://schemas.openxmlformats.org/drawingml/2006/main" xmlns:r="http://schemas.openxmlformats.org/officeDocument/2006/relationships" xmlns:p="http://schemas.openxmlformats.org/presentationml/2006/main">
+  <p:cSld>
+    <p:spTree>
+      <p:nvGrpSpPr>
+        <p:cNvPr id="1" name="">
+          <a:extLst>
+            <a:ext uri="{FF2B5EF4-FFF2-40B4-BE49-F238E27FC236}">
               <a16:creationId xmlns:a16="http://schemas.microsoft.com/office/drawing/2014/main" id="{C21AD763-5C16-ED3F-77AE-36B7AAE0E5D1}"/>
             </a:ext>
           </a:extLst>
@@ -8401,330 +13057,6 @@
     <p:extLst>
       <p:ext uri="{BB962C8B-B14F-4D97-AF65-F5344CB8AC3E}">
         <p14:creationId xmlns:p14="http://schemas.microsoft.com/office/powerpoint/2010/main" val="2807016704"/>
-      </p:ext>
-    </p:extLst>
-  </p:cSld>
-  <p:clrMapOvr>
-    <a:masterClrMapping/>
-  </p:clrMapOvr>
-</p:sld>
-</file>
-
-<file path=ppt/slides/slide2.xml><?xml version="1.0" encoding="utf-8"?>
-<p:sld xmlns:a="http://schemas.openxmlformats.org/drawingml/2006/main" xmlns:r="http://schemas.openxmlformats.org/officeDocument/2006/relationships" xmlns:p="http://schemas.openxmlformats.org/presentationml/2006/main">
-  <p:cSld>
-    <p:spTree>
-      <p:nvGrpSpPr>
-        <p:cNvPr id="1" name="">
-          <a:extLst>
-            <a:ext uri="{FF2B5EF4-FFF2-40B4-BE49-F238E27FC236}">
-              <a16:creationId xmlns:a16="http://schemas.microsoft.com/office/drawing/2014/main" id="{10A33180-53BA-21BF-A84E-968241FBE5AD}"/>
-            </a:ext>
-          </a:extLst>
-        </p:cNvPr>
-        <p:cNvGrpSpPr/>
-        <p:nvPr/>
-      </p:nvGrpSpPr>
-      <p:grpSpPr>
-        <a:xfrm>
-          <a:off x="0" y="0"/>
-          <a:ext cx="0" cy="0"/>
-          <a:chOff x="0" y="0"/>
-          <a:chExt cx="0" cy="0"/>
-        </a:xfrm>
-      </p:grpSpPr>
-      <p:sp>
-        <p:nvSpPr>
-          <p:cNvPr id="5" name="Retângulo 4">
-            <a:extLst>
-              <a:ext uri="{FF2B5EF4-FFF2-40B4-BE49-F238E27FC236}">
-                <a16:creationId xmlns:a16="http://schemas.microsoft.com/office/drawing/2014/main" id="{71CB63AC-F956-699C-AFCE-3540DB296449}"/>
-              </a:ext>
-            </a:extLst>
-          </p:cNvPr>
-          <p:cNvSpPr/>
-          <p:nvPr/>
-        </p:nvSpPr>
-        <p:spPr>
-          <a:xfrm>
-            <a:off x="0" y="-2"/>
-            <a:ext cx="12192000" cy="1325563"/>
-          </a:xfrm>
-          <a:prstGeom prst="rect">
-            <a:avLst/>
-          </a:prstGeom>
-          <a:solidFill>
-            <a:schemeClr val="accent2"/>
-          </a:solidFill>
-          <a:ln>
-            <a:solidFill>
-              <a:srgbClr val="418AB3"/>
-            </a:solidFill>
-          </a:ln>
-        </p:spPr>
-        <p:style>
-          <a:lnRef idx="2">
-            <a:schemeClr val="accent1">
-              <a:shade val="15000"/>
-            </a:schemeClr>
-          </a:lnRef>
-          <a:fillRef idx="1">
-            <a:schemeClr val="accent1"/>
-          </a:fillRef>
-          <a:effectRef idx="0">
-            <a:schemeClr val="accent1"/>
-          </a:effectRef>
-          <a:fontRef idx="minor">
-            <a:schemeClr val="lt1"/>
-          </a:fontRef>
-        </p:style>
-        <p:txBody>
-          <a:bodyPr rtlCol="0" anchor="ctr"/>
-          <a:lstStyle/>
-          <a:p>
-            <a:pPr algn="ctr"/>
-            <a:endParaRPr lang="pt-BR" dirty="0"/>
-          </a:p>
-        </p:txBody>
-      </p:sp>
-      <p:sp>
-        <p:nvSpPr>
-          <p:cNvPr id="2" name="Título 1">
-            <a:extLst>
-              <a:ext uri="{FF2B5EF4-FFF2-40B4-BE49-F238E27FC236}">
-                <a16:creationId xmlns:a16="http://schemas.microsoft.com/office/drawing/2014/main" id="{288A14FC-38B0-0F3B-A145-7298E588FB15}"/>
-              </a:ext>
-            </a:extLst>
-          </p:cNvPr>
-          <p:cNvSpPr>
-            <a:spLocks noGrp="1"/>
-          </p:cNvSpPr>
-          <p:nvPr>
-            <p:ph type="title"/>
-          </p:nvPr>
-        </p:nvSpPr>
-        <p:spPr>
-          <a:xfrm>
-            <a:off x="0" y="-1"/>
-            <a:ext cx="12192000" cy="1325563"/>
-          </a:xfrm>
-        </p:spPr>
-        <p:txBody>
-          <a:bodyPr/>
-          <a:lstStyle/>
-          <a:p>
-            <a:pPr algn="ctr"/>
-            <a:r>
-              <a:rPr lang="pt-BR" dirty="0">
-                <a:solidFill>
-                  <a:schemeClr val="bg1"/>
-                </a:solidFill>
-              </a:rPr>
-              <a:t>Convolução</a:t>
-            </a:r>
-          </a:p>
-        </p:txBody>
-      </p:sp>
-      <p:sp>
-        <p:nvSpPr>
-          <p:cNvPr id="12" name="AutoShape 6" descr="Lógica Proposicional x Lógica de Argumento ⋆ Colaborae">
-            <a:extLst>
-              <a:ext uri="{FF2B5EF4-FFF2-40B4-BE49-F238E27FC236}">
-                <a16:creationId xmlns:a16="http://schemas.microsoft.com/office/drawing/2014/main" id="{60650552-5CD6-0B48-6261-174CD00E30C9}"/>
-              </a:ext>
-            </a:extLst>
-          </p:cNvPr>
-          <p:cNvSpPr>
-            <a:spLocks noChangeAspect="1" noChangeArrowheads="1"/>
-          </p:cNvSpPr>
-          <p:nvPr/>
-        </p:nvSpPr>
-        <p:spPr bwMode="auto">
-          <a:xfrm>
-            <a:off x="5943600" y="-1707776"/>
-            <a:ext cx="5289176" cy="5289176"/>
-          </a:xfrm>
-          <a:prstGeom prst="rect">
-            <a:avLst/>
-          </a:prstGeom>
-          <a:noFill/>
-          <a:extLst>
-            <a:ext uri="{909E8E84-426E-40DD-AFC4-6F175D3DCCD1}">
-              <a14:hiddenFill xmlns:a14="http://schemas.microsoft.com/office/drawing/2010/main">
-                <a:solidFill>
-                  <a:srgbClr val="FFFFFF"/>
-                </a:solidFill>
-              </a14:hiddenFill>
-            </a:ext>
-          </a:extLst>
-        </p:spPr>
-        <p:txBody>
-          <a:bodyPr vert="horz" wrap="square" lIns="91440" tIns="45720" rIns="91440" bIns="45720" numCol="1" anchor="t" anchorCtr="0" compatLnSpc="1">
-            <a:prstTxWarp prst="textNoShape">
-              <a:avLst/>
-            </a:prstTxWarp>
-          </a:bodyPr>
-          <a:lstStyle/>
-          <a:p>
-            <a:endParaRPr lang="pt-BR"/>
-          </a:p>
-        </p:txBody>
-      </p:sp>
-      <p:sp>
-        <p:nvSpPr>
-          <p:cNvPr id="6" name="Espaço Reservado para Conteúdo 5">
-            <a:extLst>
-              <a:ext uri="{FF2B5EF4-FFF2-40B4-BE49-F238E27FC236}">
-                <a16:creationId xmlns:a16="http://schemas.microsoft.com/office/drawing/2014/main" id="{C05AC19E-EA79-E17E-B527-D6B35B7B2D7C}"/>
-              </a:ext>
-            </a:extLst>
-          </p:cNvPr>
-          <p:cNvSpPr>
-            <a:spLocks noGrp="1"/>
-          </p:cNvSpPr>
-          <p:nvPr>
-            <p:ph idx="1"/>
-          </p:nvPr>
-        </p:nvSpPr>
-        <p:spPr>
-          <a:xfrm>
-            <a:off x="304338" y="1559906"/>
-            <a:ext cx="6115710" cy="5004177"/>
-          </a:xfrm>
-        </p:spPr>
-        <p:txBody>
-          <a:bodyPr>
-            <a:normAutofit/>
-          </a:bodyPr>
-          <a:lstStyle/>
-          <a:p>
-            <a:r>
-              <a:rPr lang="pt-BR" sz="2200" dirty="0"/>
-              <a:t>Operação matemática capaz de modificar ou extrair características da imagem.</a:t>
-            </a:r>
-          </a:p>
-          <a:p>
-            <a:endParaRPr lang="pt-BR" sz="2200" dirty="0"/>
-          </a:p>
-          <a:p>
-            <a:r>
-              <a:rPr lang="pt-BR" sz="2200" dirty="0"/>
-              <a:t>Utiliza um filtro convolucional (kernel),para ser  deslocado sobre a imagem principal.</a:t>
-            </a:r>
-          </a:p>
-          <a:p>
-            <a:endParaRPr lang="pt-BR" sz="2400" dirty="0"/>
-          </a:p>
-          <a:p>
-            <a:r>
-              <a:rPr lang="pt-BR" sz="2200" dirty="0"/>
-              <a:t>Principais aplicações:</a:t>
-            </a:r>
-          </a:p>
-          <a:p>
-            <a:pPr lvl="1"/>
-            <a:endParaRPr lang="pt-BR" sz="2000" dirty="0"/>
-          </a:p>
-          <a:p>
-            <a:pPr lvl="1">
-              <a:buFont typeface="Courier New" panose="02070309020205020404" pitchFamily="49" charset="0"/>
-              <a:buChar char="o"/>
-            </a:pPr>
-            <a:r>
-              <a:rPr lang="pt-BR" sz="2000" dirty="0"/>
-              <a:t>Desfoque e suavização.</a:t>
-            </a:r>
-          </a:p>
-          <a:p>
-            <a:pPr lvl="1">
-              <a:buFont typeface="Courier New" panose="02070309020205020404" pitchFamily="49" charset="0"/>
-              <a:buChar char="o"/>
-            </a:pPr>
-            <a:r>
-              <a:rPr lang="pt-BR" sz="2000" dirty="0"/>
-              <a:t>Remoção de ruídos.</a:t>
-            </a:r>
-          </a:p>
-          <a:p>
-            <a:pPr lvl="1">
-              <a:buFont typeface="Courier New" panose="02070309020205020404" pitchFamily="49" charset="0"/>
-              <a:buChar char="o"/>
-            </a:pPr>
-            <a:r>
-              <a:rPr lang="pt-BR" sz="2000" dirty="0"/>
-              <a:t>Detecção de bordas.</a:t>
-            </a:r>
-          </a:p>
-          <a:p>
-            <a:pPr lvl="1">
-              <a:buFont typeface="Courier New" panose="02070309020205020404" pitchFamily="49" charset="0"/>
-              <a:buChar char="o"/>
-            </a:pPr>
-            <a:r>
-              <a:rPr lang="pt-BR" sz="2000" dirty="0"/>
-              <a:t>Realce de Imagem.</a:t>
-            </a:r>
-          </a:p>
-          <a:p>
-            <a:pPr lvl="1">
-              <a:buFont typeface="Courier New" panose="02070309020205020404" pitchFamily="49" charset="0"/>
-              <a:buChar char="o"/>
-            </a:pPr>
-            <a:r>
-              <a:rPr lang="pt-BR" sz="2000" dirty="0"/>
-              <a:t>etc. </a:t>
-            </a:r>
-          </a:p>
-          <a:p>
-            <a:pPr lvl="1">
-              <a:buFont typeface="Courier New" panose="02070309020205020404" pitchFamily="49" charset="0"/>
-              <a:buChar char="o"/>
-            </a:pPr>
-            <a:endParaRPr lang="pt-BR" sz="2000" i="1" dirty="0"/>
-          </a:p>
-          <a:p>
-            <a:pPr>
-              <a:buFont typeface="Courier New" panose="02070309020205020404" pitchFamily="49" charset="0"/>
-              <a:buChar char="o"/>
-            </a:pPr>
-            <a:endParaRPr lang="pt-BR" sz="2400" i="1" dirty="0"/>
-          </a:p>
-        </p:txBody>
-      </p:sp>
-      <p:pic>
-        <p:nvPicPr>
-          <p:cNvPr id="3" name="Imagem 2">
-            <a:extLst>
-              <a:ext uri="{FF2B5EF4-FFF2-40B4-BE49-F238E27FC236}">
-                <a16:creationId xmlns:a16="http://schemas.microsoft.com/office/drawing/2014/main" id="{0F1FDE0C-7D89-B369-D77B-04963F1C10CA}"/>
-              </a:ext>
-            </a:extLst>
-          </p:cNvPr>
-          <p:cNvPicPr>
-            <a:picLocks noChangeAspect="1"/>
-          </p:cNvPicPr>
-          <p:nvPr/>
-        </p:nvPicPr>
-        <p:blipFill>
-          <a:blip r:embed="rId3"/>
-          <a:stretch>
-            <a:fillRect/>
-          </a:stretch>
-        </p:blipFill>
-        <p:spPr>
-          <a:xfrm>
-            <a:off x="6420048" y="2146356"/>
-            <a:ext cx="5593108" cy="3831279"/>
-          </a:xfrm>
-          <a:prstGeom prst="rect">
-            <a:avLst/>
-          </a:prstGeom>
-        </p:spPr>
-      </p:pic>
-    </p:spTree>
-    <p:extLst>
-      <p:ext uri="{BB962C8B-B14F-4D97-AF65-F5344CB8AC3E}">
-        <p14:creationId xmlns:p14="http://schemas.microsoft.com/office/powerpoint/2010/main" val="454732246"/>
       </p:ext>
     </p:extLst>
   </p:cSld>
@@ -10117,8 +14449,8 @@
           </a:fontRef>
         </p:style>
       </p:cxnSp>
-      <mc:AlternateContent xmlns:mc="http://schemas.openxmlformats.org/markup-compatibility/2006">
-        <mc:Choice xmlns:a14="http://schemas.microsoft.com/office/drawing/2010/main" Requires="a14">
+      <mc:AlternateContent xmlns:mc="http://schemas.openxmlformats.org/markup-compatibility/2006" xmlns:a14="http://schemas.microsoft.com/office/drawing/2010/main">
+        <mc:Choice Requires="a14">
           <p:sp>
             <p:nvSpPr>
               <p:cNvPr id="11" name="CaixaDeTexto 10">
@@ -10147,6 +14479,7 @@
               </a:bodyPr>
               <a:lstStyle/>
               <a:p>
+                <a:pPr/>
                 <a14:m>
                   <m:oMathPara xmlns:m="http://schemas.openxmlformats.org/officeDocument/2006/math">
                     <m:oMathParaPr>
@@ -10236,13 +14569,7 @@
                         <a:rPr lang="pt-BR" b="0" i="1" smtClean="0">
                           <a:latin typeface="Cambria Math" panose="02040503050406030204" pitchFamily="18" charset="0"/>
                         </a:rPr>
-                        <m:t>255</m:t>
-                      </m:r>
-                      <m:r>
-                        <a:rPr lang="pt-BR" b="0" i="1" smtClean="0">
-                          <a:latin typeface="Cambria Math" panose="02040503050406030204" pitchFamily="18" charset="0"/>
-                        </a:rPr>
-                        <m:t>+</m:t>
+                        <m:t>255+</m:t>
                       </m:r>
                       <m:r>
                         <a:rPr lang="pt-BR" i="1">
@@ -10300,7 +14627,7 @@
             </p:txBody>
           </p:sp>
         </mc:Choice>
-        <mc:Fallback>
+        <mc:Fallback xmlns="">
           <p:sp>
             <p:nvSpPr>
               <p:cNvPr id="11" name="CaixaDeTexto 10">
@@ -10345,8 +14672,8 @@
           </p:sp>
         </mc:Fallback>
       </mc:AlternateContent>
-      <mc:AlternateContent xmlns:mc="http://schemas.openxmlformats.org/markup-compatibility/2006">
-        <mc:Choice xmlns:a14="http://schemas.microsoft.com/office/drawing/2010/main" Requires="a14">
+      <mc:AlternateContent xmlns:mc="http://schemas.openxmlformats.org/markup-compatibility/2006" xmlns:a14="http://schemas.microsoft.com/office/drawing/2010/main">
+        <mc:Choice Requires="a14">
           <p:sp>
             <p:nvSpPr>
               <p:cNvPr id="13" name="CaixaDeTexto 12">
@@ -10375,6 +14702,7 @@
               </a:bodyPr>
               <a:lstStyle/>
               <a:p>
+                <a:pPr/>
                 <a14:m>
                   <m:oMathPara xmlns:m="http://schemas.openxmlformats.org/officeDocument/2006/math">
                     <m:oMathParaPr>
@@ -10446,19 +14774,7 @@
                         <a:rPr lang="pt-BR" b="0" i="1" smtClean="0">
                           <a:latin typeface="Cambria Math" panose="02040503050406030204" pitchFamily="18" charset="0"/>
                         </a:rPr>
-                        <m:t>+</m:t>
-                      </m:r>
-                      <m:r>
-                        <a:rPr lang="pt-BR" b="0" i="1" smtClean="0">
-                          <a:latin typeface="Cambria Math" panose="02040503050406030204" pitchFamily="18" charset="0"/>
-                        </a:rPr>
-                        <m:t>255</m:t>
-                      </m:r>
-                      <m:r>
-                        <a:rPr lang="pt-BR" b="0" i="1" smtClean="0">
-                          <a:latin typeface="Cambria Math" panose="02040503050406030204" pitchFamily="18" charset="0"/>
-                        </a:rPr>
-                        <m:t>+</m:t>
+                        <m:t>+255+</m:t>
                       </m:r>
                       <m:r>
                         <a:rPr lang="pt-BR" i="1">
@@ -10516,7 +14832,7 @@
             </p:txBody>
           </p:sp>
         </mc:Choice>
-        <mc:Fallback>
+        <mc:Fallback xmlns="">
           <p:sp>
             <p:nvSpPr>
               <p:cNvPr id="13" name="CaixaDeTexto 12">
@@ -10561,8 +14877,8 @@
           </p:sp>
         </mc:Fallback>
       </mc:AlternateContent>
-      <mc:AlternateContent xmlns:mc="http://schemas.openxmlformats.org/markup-compatibility/2006">
-        <mc:Choice xmlns:a14="http://schemas.microsoft.com/office/drawing/2010/main" Requires="a14">
+      <mc:AlternateContent xmlns:mc="http://schemas.openxmlformats.org/markup-compatibility/2006" xmlns:a14="http://schemas.microsoft.com/office/drawing/2010/main">
+        <mc:Choice Requires="a14">
           <p:sp>
             <p:nvSpPr>
               <p:cNvPr id="14" name="CaixaDeTexto 13">
@@ -10591,6 +14907,7 @@
               </a:bodyPr>
               <a:lstStyle/>
               <a:p>
+                <a:pPr/>
                 <a14:m>
                   <m:oMathPara xmlns:m="http://schemas.openxmlformats.org/officeDocument/2006/math">
                     <m:oMathParaPr>
@@ -10671,7 +14988,7 @@
             </p:txBody>
           </p:sp>
         </mc:Choice>
-        <mc:Fallback>
+        <mc:Fallback xmlns="">
           <p:sp>
             <p:nvSpPr>
               <p:cNvPr id="14" name="CaixaDeTexto 13">
@@ -10933,8 +15250,8 @@
           </a:p>
         </p:txBody>
       </p:sp>
-      <mc:AlternateContent xmlns:mc="http://schemas.openxmlformats.org/markup-compatibility/2006">
-        <mc:Choice xmlns:a14="http://schemas.microsoft.com/office/drawing/2010/main" Requires="a14">
+      <mc:AlternateContent xmlns:mc="http://schemas.openxmlformats.org/markup-compatibility/2006" xmlns:a14="http://schemas.microsoft.com/office/drawing/2010/main">
+        <mc:Choice Requires="a14">
           <p:sp>
             <p:nvSpPr>
               <p:cNvPr id="6" name="Espaço Reservado para Conteúdo 5">
@@ -11528,7 +15845,7 @@
             </p:txBody>
           </p:sp>
         </mc:Choice>
-        <mc:Fallback>
+        <mc:Fallback xmlns="">
           <p:sp>
             <p:nvSpPr>
               <p:cNvPr id="6" name="Espaço Reservado para Conteúdo 5">
@@ -11788,82 +16105,89 @@
                 <a:endParaRPr lang="pt-BR" sz="2200" dirty="0"/>
               </a:p>
               <a:p>
-                <a:pPr lvl="1" algn="just"/>
+                <a:pPr marL="457200" lvl="1" indent="0" algn="just">
+                  <a:buNone/>
+                </a:pPr>
                 <a14:m>
-                  <m:oMath xmlns:m="http://schemas.openxmlformats.org/officeDocument/2006/math">
-                    <m:r>
-                      <a:rPr lang="pt-BR" sz="2000" i="1" dirty="0" smtClean="0">
-                        <a:latin typeface="Cambria Math" panose="02040503050406030204" pitchFamily="18" charset="0"/>
-                      </a:rPr>
-                      <m:t>𝐾</m:t>
-                    </m:r>
-                    <m:r>
-                      <a:rPr lang="pt-BR" sz="2000" i="1" dirty="0" smtClean="0">
-                        <a:latin typeface="Cambria Math" panose="02040503050406030204" pitchFamily="18" charset="0"/>
-                      </a:rPr>
-                      <m:t>(</m:t>
-                    </m:r>
-                    <m:r>
-                      <a:rPr lang="pt-BR" sz="2000" i="1" dirty="0" err="1">
-                        <a:latin typeface="Cambria Math" panose="02040503050406030204" pitchFamily="18" charset="0"/>
-                      </a:rPr>
-                      <m:t>𝑖</m:t>
-                    </m:r>
-                    <m:r>
-                      <a:rPr lang="pt-BR" sz="2000" i="1" dirty="0" err="1">
-                        <a:latin typeface="Cambria Math" panose="02040503050406030204" pitchFamily="18" charset="0"/>
-                      </a:rPr>
-                      <m:t>,</m:t>
-                    </m:r>
-                    <m:r>
-                      <a:rPr lang="pt-BR" sz="2000" i="1" dirty="0" err="1">
-                        <a:latin typeface="Cambria Math" panose="02040503050406030204" pitchFamily="18" charset="0"/>
-                      </a:rPr>
-                      <m:t>𝑗</m:t>
-                    </m:r>
-                    <m:r>
-                      <a:rPr lang="pt-BR" sz="2000" i="1" dirty="0">
-                        <a:latin typeface="Cambria Math" panose="02040503050406030204" pitchFamily="18" charset="0"/>
-                      </a:rPr>
-                      <m:t>)→</m:t>
-                    </m:r>
-                    <m:r>
-                      <a:rPr lang="pt-BR" sz="2000" i="1" dirty="0">
-                        <a:latin typeface="Cambria Math" panose="02040503050406030204" pitchFamily="18" charset="0"/>
-                      </a:rPr>
-                      <m:t>𝐾</m:t>
-                    </m:r>
-                    <m:r>
-                      <a:rPr lang="pt-BR" sz="2000" i="1" dirty="0">
-                        <a:latin typeface="Cambria Math" panose="02040503050406030204" pitchFamily="18" charset="0"/>
-                      </a:rPr>
-                      <m:t>(−</m:t>
-                    </m:r>
-                    <m:r>
-                      <a:rPr lang="pt-BR" sz="2000" i="1" dirty="0">
-                        <a:latin typeface="Cambria Math" panose="02040503050406030204" pitchFamily="18" charset="0"/>
-                      </a:rPr>
-                      <m:t>𝑖</m:t>
-                    </m:r>
-                    <m:r>
-                      <a:rPr lang="pt-BR" sz="2000" i="1" dirty="0">
-                        <a:latin typeface="Cambria Math" panose="02040503050406030204" pitchFamily="18" charset="0"/>
-                      </a:rPr>
-                      <m:t>,−</m:t>
-                    </m:r>
-                    <m:r>
-                      <a:rPr lang="pt-BR" sz="2000" i="1" dirty="0">
-                        <a:latin typeface="Cambria Math" panose="02040503050406030204" pitchFamily="18" charset="0"/>
-                      </a:rPr>
-                      <m:t>𝑗</m:t>
-                    </m:r>
-                    <m:r>
-                      <a:rPr lang="pt-BR" sz="2000" i="1" dirty="0">
-                        <a:latin typeface="Cambria Math" panose="02040503050406030204" pitchFamily="18" charset="0"/>
-                      </a:rPr>
-                      <m:t>)</m:t>
-                    </m:r>
-                  </m:oMath>
+                  <m:oMathPara xmlns:m="http://schemas.openxmlformats.org/officeDocument/2006/math">
+                    <m:oMathParaPr>
+                      <m:jc m:val="centerGroup"/>
+                    </m:oMathParaPr>
+                    <m:oMath xmlns:m="http://schemas.openxmlformats.org/officeDocument/2006/math">
+                      <m:r>
+                        <a:rPr lang="pt-BR" sz="2000" i="1" dirty="0" smtClean="0">
+                          <a:latin typeface="Cambria Math" panose="02040503050406030204" pitchFamily="18" charset="0"/>
+                        </a:rPr>
+                        <m:t>𝐾</m:t>
+                      </m:r>
+                      <m:r>
+                        <a:rPr lang="pt-BR" sz="2000" i="1" dirty="0" smtClean="0">
+                          <a:latin typeface="Cambria Math" panose="02040503050406030204" pitchFamily="18" charset="0"/>
+                        </a:rPr>
+                        <m:t>(</m:t>
+                      </m:r>
+                      <m:r>
+                        <a:rPr lang="pt-BR" sz="2000" i="1" dirty="0" err="1">
+                          <a:latin typeface="Cambria Math" panose="02040503050406030204" pitchFamily="18" charset="0"/>
+                        </a:rPr>
+                        <m:t>𝑖</m:t>
+                      </m:r>
+                      <m:r>
+                        <a:rPr lang="pt-BR" sz="2000" i="1" dirty="0" err="1">
+                          <a:latin typeface="Cambria Math" panose="02040503050406030204" pitchFamily="18" charset="0"/>
+                        </a:rPr>
+                        <m:t>,</m:t>
+                      </m:r>
+                      <m:r>
+                        <a:rPr lang="pt-BR" sz="2000" i="1" dirty="0" err="1">
+                          <a:latin typeface="Cambria Math" panose="02040503050406030204" pitchFamily="18" charset="0"/>
+                        </a:rPr>
+                        <m:t>𝑗</m:t>
+                      </m:r>
+                      <m:r>
+                        <a:rPr lang="pt-BR" sz="2000" i="1" dirty="0">
+                          <a:latin typeface="Cambria Math" panose="02040503050406030204" pitchFamily="18" charset="0"/>
+                        </a:rPr>
+                        <m:t>)→</m:t>
+                      </m:r>
+                      <m:r>
+                        <a:rPr lang="pt-BR" sz="2000" i="1" dirty="0">
+                          <a:latin typeface="Cambria Math" panose="02040503050406030204" pitchFamily="18" charset="0"/>
+                        </a:rPr>
+                        <m:t>𝐾</m:t>
+                      </m:r>
+                      <m:r>
+                        <a:rPr lang="pt-BR" sz="2000" i="1" dirty="0">
+                          <a:latin typeface="Cambria Math" panose="02040503050406030204" pitchFamily="18" charset="0"/>
+                        </a:rPr>
+                        <m:t>(−</m:t>
+                      </m:r>
+                      <m:r>
+                        <a:rPr lang="pt-BR" sz="2000" i="1" dirty="0">
+                          <a:latin typeface="Cambria Math" panose="02040503050406030204" pitchFamily="18" charset="0"/>
+                        </a:rPr>
+                        <m:t>𝑖</m:t>
+                      </m:r>
+                      <m:r>
+                        <a:rPr lang="pt-BR" sz="2000" i="1" dirty="0">
+                          <a:latin typeface="Cambria Math" panose="02040503050406030204" pitchFamily="18" charset="0"/>
+                        </a:rPr>
+                        <m:t>,−</m:t>
+                      </m:r>
+                      <m:r>
+                        <a:rPr lang="pt-BR" sz="2000" i="1" dirty="0">
+                          <a:latin typeface="Cambria Math" panose="02040503050406030204" pitchFamily="18" charset="0"/>
+                        </a:rPr>
+                        <m:t>𝑗</m:t>
+                      </m:r>
+                      <m:r>
+                        <a:rPr lang="pt-BR" sz="2000" i="1" dirty="0">
+                          <a:latin typeface="Cambria Math" panose="02040503050406030204" pitchFamily="18" charset="0"/>
+                        </a:rPr>
+                        <m:t>)</m:t>
+                      </m:r>
+                    </m:oMath>
+                  </m:oMathPara>
                 </a14:m>
                 <a:endParaRPr lang="pt-BR" sz="1800" dirty="0"/>
               </a:p>
@@ -12370,8 +16694,8 @@
         </p:nvSpPr>
         <p:spPr>
           <a:xfrm>
-            <a:off x="2839810" y="5484308"/>
-            <a:ext cx="6512379" cy="1264834"/>
+            <a:off x="1376362" y="5593166"/>
+            <a:ext cx="9134476" cy="1264834"/>
           </a:xfrm>
           <a:prstGeom prst="rect">
             <a:avLst/>
@@ -12549,7 +16873,15 @@
             <a:pPr algn="just"/>
             <a:r>
               <a:rPr lang="pt-BR" sz="2200" dirty="0"/>
-              <a:t>Na prática, diversas implementações utilizam o procedimento de correlação cruzada, sem inverter o kernel.</a:t>
+              <a:t>Na prática, diversas implementações utilizam o procedimento de </a:t>
+            </a:r>
+            <a:r>
+              <a:rPr lang="pt-BR" sz="2200" b="1" dirty="0"/>
+              <a:t>correlação</a:t>
+            </a:r>
+            <a:r>
+              <a:rPr lang="pt-BR" sz="2200" dirty="0"/>
+              <a:t>, sem inverter o kernel. Isso ocorre em razão da simetria do kernel.</a:t>
             </a:r>
           </a:p>
         </p:txBody>
@@ -12745,8 +17077,8 @@
         </p:nvSpPr>
         <p:spPr>
           <a:xfrm>
-            <a:off x="2839810" y="1737998"/>
-            <a:ext cx="6512379" cy="1647487"/>
+            <a:off x="728158" y="2055894"/>
+            <a:ext cx="6987092" cy="4024866"/>
           </a:xfrm>
         </p:spPr>
         <p:txBody>
@@ -12756,10 +17088,103 @@
           <a:lstStyle/>
           <a:p>
             <a:pPr algn="just"/>
+            <a:r>
+              <a:rPr lang="pt-BR" sz="2200" dirty="0"/>
+              <a:t>É necessário um ajuste quando a convolução é aplicada em pixels localizadas nas bordas da imagem.</a:t>
+            </a:r>
+          </a:p>
+          <a:p>
+            <a:pPr algn="just"/>
             <a:endParaRPr lang="pt-BR" sz="2200" dirty="0"/>
           </a:p>
-        </p:txBody>
-      </p:sp>
+          <a:p>
+            <a:pPr algn="just"/>
+            <a:r>
+              <a:rPr lang="pt-BR" sz="2200" dirty="0"/>
+              <a:t>Esses pixels não contém uma vizinhança completa. Portanto comumente são aplicadas:</a:t>
+            </a:r>
+          </a:p>
+          <a:p>
+            <a:pPr lvl="1" algn="just"/>
+            <a:endParaRPr lang="pt-BR" sz="2000" dirty="0"/>
+          </a:p>
+          <a:p>
+            <a:pPr lvl="1" algn="just">
+              <a:buFont typeface="Courier New" panose="02070309020205020404" pitchFamily="49" charset="0"/>
+              <a:buChar char="o"/>
+            </a:pPr>
+            <a:r>
+              <a:rPr lang="pt-BR" sz="2000" dirty="0"/>
+              <a:t>Zero </a:t>
+            </a:r>
+            <a:r>
+              <a:rPr lang="pt-BR" sz="2000" dirty="0" err="1"/>
+              <a:t>Padding</a:t>
+            </a:r>
+            <a:r>
+              <a:rPr lang="pt-BR" sz="2000" dirty="0"/>
+              <a:t> </a:t>
+            </a:r>
+          </a:p>
+          <a:p>
+            <a:pPr lvl="1" algn="just">
+              <a:buFont typeface="Courier New" panose="02070309020205020404" pitchFamily="49" charset="0"/>
+              <a:buChar char="o"/>
+            </a:pPr>
+            <a:r>
+              <a:rPr lang="pt-BR" sz="2000" dirty="0"/>
+              <a:t>Replicação dos pixels</a:t>
+            </a:r>
+          </a:p>
+        </p:txBody>
+      </p:sp>
+      <p:pic>
+        <p:nvPicPr>
+          <p:cNvPr id="1026" name="Picture 2" descr="Padding in Convolutional Neural Networks - Deep Learning">
+            <a:extLst>
+              <a:ext uri="{FF2B5EF4-FFF2-40B4-BE49-F238E27FC236}">
+                <a16:creationId xmlns:a16="http://schemas.microsoft.com/office/drawing/2014/main" id="{12E16C13-51A1-730D-4377-A6E992496767}"/>
+              </a:ext>
+            </a:extLst>
+          </p:cNvPr>
+          <p:cNvPicPr>
+            <a:picLocks noChangeAspect="1" noChangeArrowheads="1"/>
+          </p:cNvPicPr>
+          <p:nvPr/>
+        </p:nvPicPr>
+        <p:blipFill>
+          <a:blip r:embed="rId3">
+            <a:extLst>
+              <a:ext uri="{28A0092B-C50C-407E-A947-70E740481C1C}">
+                <a14:useLocalDpi xmlns:a14="http://schemas.microsoft.com/office/drawing/2010/main" val="0"/>
+              </a:ext>
+            </a:extLst>
+          </a:blip>
+          <a:srcRect/>
+          <a:stretch>
+            <a:fillRect/>
+          </a:stretch>
+        </p:blipFill>
+        <p:spPr bwMode="auto">
+          <a:xfrm>
+            <a:off x="8322497" y="2879639"/>
+            <a:ext cx="3141345" cy="2899703"/>
+          </a:xfrm>
+          <a:prstGeom prst="rect">
+            <a:avLst/>
+          </a:prstGeom>
+          <a:noFill/>
+          <a:extLst>
+            <a:ext uri="{909E8E84-426E-40DD-AFC4-6F175D3DCCD1}">
+              <a14:hiddenFill xmlns:a14="http://schemas.microsoft.com/office/drawing/2010/main">
+                <a:solidFill>
+                  <a:srgbClr val="FFFFFF"/>
+                </a:solidFill>
+              </a14:hiddenFill>
+            </a:ext>
+          </a:extLst>
+        </p:spPr>
+      </p:pic>
     </p:spTree>
     <p:extLst>
       <p:ext uri="{BB962C8B-B14F-4D97-AF65-F5344CB8AC3E}">
